--- a/decks/feature-store/feature-store.pptx
+++ b/decks/feature-store/feature-store.pptx
@@ -1299,6 +1299,13 @@
 <file path=ppt/slides/slide1.xml><?xml version="1.0" encoding="utf-8"?>
 <p:sld xmlns:a="http://schemas.openxmlformats.org/drawingml/2006/main" xmlns:r="http://schemas.openxmlformats.org/officeDocument/2006/relationships" xmlns:p="http://schemas.openxmlformats.org/presentationml/2006/main">
   <p:cSld name="Slide 1">
+    <p:bg>
+      <p:bgPr>
+        <a:solidFill>
+          <a:srgbClr val="FFFFFF"/>
+        </a:solidFill>
+      </p:bgPr>
+    </p:bg>
     <p:spTree>
       <p:nvGrpSpPr>
         <p:cNvPr id="1" name=""/>
@@ -1313,30 +1320,481 @@
           <a:chExt cx="0" cy="0"/>
         </a:xfrm>
       </p:grpSpPr>
-      <p:pic>
-        <p:nvPicPr>
-          <p:cNvPr id="2" name="Image 0" descr="/tmp/slide-1787840588684-6vbsss7nvrt.png">    </p:cNvPr>
-          <p:cNvPicPr>
-            <a:picLocks noChangeAspect="1"/>
-          </p:cNvPicPr>
-          <p:nvPr/>
-        </p:nvPicPr>
-        <p:blipFill>
-          <a:blip r:embed="rId1"/>
-          <a:stretch>
-            <a:fillRect/>
-          </a:stretch>
-        </p:blipFill>
-        <p:spPr>
-          <a:xfrm>
-            <a:off x="0" y="0"/>
-            <a:ext cx="12188952" cy="6858000"/>
-          </a:xfrm>
-          <a:prstGeom prst="rect">
-            <a:avLst/>
-          </a:prstGeom>
-        </p:spPr>
-      </p:pic>
+      <p:sp>
+        <p:nvSpPr>
+          <p:cNvPr id="2" name="Text 0"/>
+          <p:cNvSpPr/>
+          <p:nvPr/>
+        </p:nvSpPr>
+        <p:spPr>
+          <a:xfrm>
+            <a:off x="541599" y="457200"/>
+            <a:ext cx="11327869" cy="440333"/>
+          </a:xfrm>
+          <a:prstGeom prst="rect">
+            <a:avLst/>
+          </a:prstGeom>
+          <a:noFill/>
+          <a:ln/>
+        </p:spPr>
+        <p:txBody>
+          <a:bodyPr wrap="square" lIns="0" tIns="0" rIns="0" bIns="0" rtlCol="0" anchor="t"/>
+          <a:lstStyle/>
+          <a:p>
+            <a:pPr algn="l" indent="0" marL="0">
+              <a:lnSpc>
+                <a:spcPts val="3466"/>
+              </a:lnSpc>
+              <a:buNone/>
+            </a:pPr>
+            <a:r>
+              <a:rPr lang="en-US" sz="2666" b="1" dirty="0">
+                <a:solidFill>
+                  <a:srgbClr val="1A1A1A"/>
+                </a:solidFill>
+                <a:latin typeface="Inter" pitchFamily="34" charset="0"/>
+                <a:ea typeface="Inter" pitchFamily="34" charset="-122"/>
+                <a:cs typeface="Inter" pitchFamily="34" charset="-120"/>
+              </a:rPr>
+              <a:t>Feature Store — adoption review</a:t>
+            </a:r>
+            <a:endParaRPr lang="en-US" sz="2666" dirty="0"/>
+          </a:p>
+        </p:txBody>
+      </p:sp>
+      <p:sp>
+        <p:nvSpPr>
+          <p:cNvPr id="3" name="Text 1"/>
+          <p:cNvSpPr/>
+          <p:nvPr/>
+        </p:nvSpPr>
+        <p:spPr>
+          <a:xfrm>
+            <a:off x="541599" y="999133"/>
+            <a:ext cx="11327869" cy="270073"/>
+          </a:xfrm>
+          <a:prstGeom prst="rect">
+            <a:avLst/>
+          </a:prstGeom>
+          <a:noFill/>
+          <a:ln/>
+        </p:spPr>
+        <p:txBody>
+          <a:bodyPr wrap="square" lIns="0" tIns="0" rIns="0" bIns="0" rtlCol="0" anchor="t"/>
+          <a:lstStyle/>
+          <a:p>
+            <a:pPr algn="l" indent="0" marL="0">
+              <a:lnSpc>
+                <a:spcPts val="2126"/>
+              </a:lnSpc>
+              <a:spcBef>
+                <a:spcPts val="800"/>
+              </a:spcBef>
+              <a:buNone/>
+            </a:pPr>
+            <a:r>
+              <a:rPr lang="en-US" sz="1466" dirty="0">
+                <a:solidFill>
+                  <a:srgbClr val="7A828F"/>
+                </a:solidFill>
+                <a:latin typeface="Inter" pitchFamily="34" charset="0"/>
+                <a:ea typeface="Inter" pitchFamily="34" charset="-122"/>
+                <a:cs typeface="Inter" pitchFamily="34" charset="-120"/>
+              </a:rPr>
+              <a:t>ML PLATFORM / DECISION REVIEW</a:t>
+            </a:r>
+            <a:endParaRPr lang="en-US" sz="1466" dirty="0"/>
+          </a:p>
+        </p:txBody>
+      </p:sp>
+      <p:sp>
+        <p:nvSpPr>
+          <p:cNvPr id="4" name="Text 2"/>
+          <p:cNvSpPr/>
+          <p:nvPr/>
+        </p:nvSpPr>
+        <p:spPr>
+          <a:xfrm>
+            <a:off x="541599" y="2805112"/>
+            <a:ext cx="8288487" cy="883841"/>
+          </a:xfrm>
+          <a:prstGeom prst="rect">
+            <a:avLst/>
+          </a:prstGeom>
+          <a:noFill/>
+          <a:ln/>
+        </p:spPr>
+        <p:txBody>
+          <a:bodyPr wrap="square" lIns="0" tIns="0" rIns="0" bIns="0" rtlCol="0" anchor="t"/>
+          <a:lstStyle/>
+          <a:p>
+            <a:pPr algn="l" indent="0" marL="0">
+              <a:lnSpc>
+                <a:spcPts val="3480"/>
+              </a:lnSpc>
+              <a:buNone/>
+            </a:pPr>
+            <a:r>
+              <a:rPr lang="en-US" sz="2400" dirty="0">
+                <a:solidFill>
+                  <a:srgbClr val="1A1A1A"/>
+                </a:solidFill>
+                <a:latin typeface="Inter" pitchFamily="34" charset="0"/>
+                <a:ea typeface="Inter" pitchFamily="34" charset="-122"/>
+                <a:cs typeface="Inter" pitchFamily="34" charset="-120"/>
+              </a:rPr>
+              <a:t>A feature store is a decision about ownership,</a:t>
+            </a:r>
+            <a:endParaRPr lang="en-US" sz="2400" dirty="0"/>
+          </a:p>
+          <a:p>
+            <a:pPr algn="l" indent="0" marL="0">
+              <a:lnSpc>
+                <a:spcPts val="3480"/>
+              </a:lnSpc>
+              <a:buNone/>
+            </a:pPr>
+            <a:r>
+              <a:rPr lang="en-US" sz="2400" dirty="0">
+                <a:solidFill>
+                  <a:srgbClr val="1A1A1A"/>
+                </a:solidFill>
+                <a:latin typeface="Inter" pitchFamily="34" charset="0"/>
+                <a:ea typeface="Inter" pitchFamily="34" charset="-122"/>
+                <a:cs typeface="Inter" pitchFamily="34" charset="-120"/>
+              </a:rPr>
+              <a:t>not about tooling.</a:t>
+            </a:r>
+            <a:endParaRPr lang="en-US" sz="2400" dirty="0"/>
+          </a:p>
+        </p:txBody>
+      </p:sp>
+      <p:sp>
+        <p:nvSpPr>
+          <p:cNvPr id="5" name="Shape 3"/>
+          <p:cNvSpPr/>
+          <p:nvPr/>
+        </p:nvSpPr>
+        <p:spPr>
+          <a:xfrm>
+            <a:off x="541599" y="4959945"/>
+            <a:ext cx="11105754" cy="0"/>
+          </a:xfrm>
+          <a:prstGeom prst="line">
+            <a:avLst/>
+          </a:prstGeom>
+          <a:noFill/>
+          <a:ln w="12698">
+            <a:solidFill>
+              <a:srgbClr val="C9CDD3"/>
+            </a:solidFill>
+            <a:prstDash val="solid"/>
+          </a:ln>
+        </p:spPr>
+      </p:sp>
+      <p:sp>
+        <p:nvSpPr>
+          <p:cNvPr id="6" name="Text 4"/>
+          <p:cNvSpPr/>
+          <p:nvPr/>
+        </p:nvSpPr>
+        <p:spPr>
+          <a:xfrm>
+            <a:off x="541599" y="5203230"/>
+            <a:ext cx="2279334" cy="270073"/>
+          </a:xfrm>
+          <a:prstGeom prst="rect">
+            <a:avLst/>
+          </a:prstGeom>
+          <a:noFill/>
+          <a:ln/>
+        </p:spPr>
+        <p:txBody>
+          <a:bodyPr wrap="square" lIns="0" tIns="0" rIns="0" bIns="0" rtlCol="0" anchor="t"/>
+          <a:lstStyle/>
+          <a:p>
+            <a:pPr algn="l" indent="0" marL="0">
+              <a:lnSpc>
+                <a:spcPts val="2126"/>
+              </a:lnSpc>
+              <a:spcAft>
+                <a:spcPts val="667"/>
+              </a:spcAft>
+              <a:buNone/>
+            </a:pPr>
+            <a:r>
+              <a:rPr lang="en-US" sz="1466" dirty="0">
+                <a:solidFill>
+                  <a:srgbClr val="7A828F"/>
+                </a:solidFill>
+                <a:latin typeface="Inter" pitchFamily="34" charset="0"/>
+                <a:ea typeface="Inter" pitchFamily="34" charset="-122"/>
+                <a:cs typeface="Inter" pitchFamily="34" charset="-120"/>
+              </a:rPr>
+              <a:t>PREPARED BY</a:t>
+            </a:r>
+            <a:endParaRPr lang="en-US" sz="1466" dirty="0"/>
+          </a:p>
+        </p:txBody>
+      </p:sp>
+      <p:sp>
+        <p:nvSpPr>
+          <p:cNvPr id="7" name="Text 5"/>
+          <p:cNvSpPr/>
+          <p:nvPr/>
+        </p:nvSpPr>
+        <p:spPr>
+          <a:xfrm>
+            <a:off x="541599" y="5557838"/>
+            <a:ext cx="2279334" cy="343694"/>
+          </a:xfrm>
+          <a:prstGeom prst="rect">
+            <a:avLst/>
+          </a:prstGeom>
+          <a:noFill/>
+          <a:ln/>
+        </p:spPr>
+        <p:txBody>
+          <a:bodyPr wrap="square" lIns="0" tIns="0" rIns="0" bIns="0" rtlCol="0" anchor="t"/>
+          <a:lstStyle/>
+          <a:p>
+            <a:pPr algn="l" indent="0" marL="0">
+              <a:lnSpc>
+                <a:spcPts val="2706"/>
+              </a:lnSpc>
+              <a:buNone/>
+            </a:pPr>
+            <a:r>
+              <a:rPr lang="en-US" sz="1866" dirty="0">
+                <a:solidFill>
+                  <a:srgbClr val="1A1A1A"/>
+                </a:solidFill>
+                <a:latin typeface="Inter" pitchFamily="34" charset="0"/>
+                <a:ea typeface="Inter" pitchFamily="34" charset="-122"/>
+                <a:cs typeface="Inter" pitchFamily="34" charset="-120"/>
+              </a:rPr>
+              <a:t>PRESENTER · TEAM</a:t>
+            </a:r>
+            <a:endParaRPr lang="en-US" sz="1866" dirty="0"/>
+          </a:p>
+        </p:txBody>
+      </p:sp>
+      <p:sp>
+        <p:nvSpPr>
+          <p:cNvPr id="8" name="Text 6"/>
+          <p:cNvSpPr/>
+          <p:nvPr/>
+        </p:nvSpPr>
+        <p:spPr>
+          <a:xfrm>
+            <a:off x="3690412" y="5203230"/>
+            <a:ext cx="984258" cy="270073"/>
+          </a:xfrm>
+          <a:prstGeom prst="rect">
+            <a:avLst/>
+          </a:prstGeom>
+          <a:noFill/>
+          <a:ln/>
+        </p:spPr>
+        <p:txBody>
+          <a:bodyPr wrap="square" lIns="0" tIns="0" rIns="0" bIns="0" rtlCol="0" anchor="t"/>
+          <a:lstStyle/>
+          <a:p>
+            <a:pPr algn="l" indent="0" marL="0">
+              <a:lnSpc>
+                <a:spcPts val="2126"/>
+              </a:lnSpc>
+              <a:spcAft>
+                <a:spcPts val="667"/>
+              </a:spcAft>
+              <a:buNone/>
+            </a:pPr>
+            <a:r>
+              <a:rPr lang="en-US" sz="1466" dirty="0">
+                <a:solidFill>
+                  <a:srgbClr val="7A828F"/>
+                </a:solidFill>
+                <a:latin typeface="Inter" pitchFamily="34" charset="0"/>
+                <a:ea typeface="Inter" pitchFamily="34" charset="-122"/>
+                <a:cs typeface="Inter" pitchFamily="34" charset="-120"/>
+              </a:rPr>
+              <a:t>DATE</a:t>
+            </a:r>
+            <a:endParaRPr lang="en-US" sz="1466" dirty="0"/>
+          </a:p>
+        </p:txBody>
+      </p:sp>
+      <p:sp>
+        <p:nvSpPr>
+          <p:cNvPr id="9" name="Text 7"/>
+          <p:cNvSpPr/>
+          <p:nvPr/>
+        </p:nvSpPr>
+        <p:spPr>
+          <a:xfrm>
+            <a:off x="3690412" y="5557838"/>
+            <a:ext cx="984258" cy="343694"/>
+          </a:xfrm>
+          <a:prstGeom prst="rect">
+            <a:avLst/>
+          </a:prstGeom>
+          <a:noFill/>
+          <a:ln/>
+        </p:spPr>
+        <p:txBody>
+          <a:bodyPr wrap="square" lIns="0" tIns="0" rIns="0" bIns="0" rtlCol="0" anchor="t"/>
+          <a:lstStyle/>
+          <a:p>
+            <a:pPr algn="l" indent="0" marL="0">
+              <a:lnSpc>
+                <a:spcPts val="2706"/>
+              </a:lnSpc>
+              <a:buNone/>
+            </a:pPr>
+            <a:r>
+              <a:rPr lang="en-US" sz="1866" dirty="0">
+                <a:solidFill>
+                  <a:srgbClr val="1A1A1A"/>
+                </a:solidFill>
+                <a:latin typeface="Inter" pitchFamily="34" charset="0"/>
+                <a:ea typeface="Inter" pitchFamily="34" charset="-122"/>
+                <a:cs typeface="Inter" pitchFamily="34" charset="-120"/>
+              </a:rPr>
+              <a:t>2026.08</a:t>
+            </a:r>
+            <a:endParaRPr lang="en-US" sz="1866" dirty="0"/>
+          </a:p>
+        </p:txBody>
+      </p:sp>
+      <p:sp>
+        <p:nvSpPr>
+          <p:cNvPr id="10" name="Text 8"/>
+          <p:cNvSpPr/>
+          <p:nvPr/>
+        </p:nvSpPr>
+        <p:spPr>
+          <a:xfrm>
+            <a:off x="5569542" y="5203230"/>
+            <a:ext cx="3172937" cy="270073"/>
+          </a:xfrm>
+          <a:prstGeom prst="rect">
+            <a:avLst/>
+          </a:prstGeom>
+          <a:noFill/>
+          <a:ln/>
+        </p:spPr>
+        <p:txBody>
+          <a:bodyPr wrap="square" lIns="0" tIns="0" rIns="0" bIns="0" rtlCol="0" anchor="t"/>
+          <a:lstStyle/>
+          <a:p>
+            <a:pPr algn="l" indent="0" marL="0">
+              <a:lnSpc>
+                <a:spcPts val="2126"/>
+              </a:lnSpc>
+              <a:spcAft>
+                <a:spcPts val="667"/>
+              </a:spcAft>
+              <a:buNone/>
+            </a:pPr>
+            <a:r>
+              <a:rPr lang="en-US" sz="1466" dirty="0">
+                <a:solidFill>
+                  <a:srgbClr val="7A828F"/>
+                </a:solidFill>
+                <a:latin typeface="Inter" pitchFamily="34" charset="0"/>
+                <a:ea typeface="Inter" pitchFamily="34" charset="-122"/>
+                <a:cs typeface="Inter" pitchFamily="34" charset="-120"/>
+              </a:rPr>
+              <a:t>AUDIENCE</a:t>
+            </a:r>
+            <a:endParaRPr lang="en-US" sz="1466" dirty="0"/>
+          </a:p>
+        </p:txBody>
+      </p:sp>
+      <p:sp>
+        <p:nvSpPr>
+          <p:cNvPr id="11" name="Text 9"/>
+          <p:cNvSpPr/>
+          <p:nvPr/>
+        </p:nvSpPr>
+        <p:spPr>
+          <a:xfrm>
+            <a:off x="5569542" y="5557838"/>
+            <a:ext cx="3172937" cy="343694"/>
+          </a:xfrm>
+          <a:prstGeom prst="rect">
+            <a:avLst/>
+          </a:prstGeom>
+          <a:noFill/>
+          <a:ln/>
+        </p:spPr>
+        <p:txBody>
+          <a:bodyPr wrap="square" lIns="0" tIns="0" rIns="0" bIns="0" rtlCol="0" anchor="t"/>
+          <a:lstStyle/>
+          <a:p>
+            <a:pPr algn="l" indent="0" marL="0">
+              <a:lnSpc>
+                <a:spcPts val="2706"/>
+              </a:lnSpc>
+              <a:buNone/>
+            </a:pPr>
+            <a:r>
+              <a:rPr lang="en-US" sz="1866" dirty="0">
+                <a:solidFill>
+                  <a:srgbClr val="1A1A1A"/>
+                </a:solidFill>
+                <a:latin typeface="Inter" pitchFamily="34" charset="0"/>
+                <a:ea typeface="Inter" pitchFamily="34" charset="-122"/>
+                <a:cs typeface="Inter" pitchFamily="34" charset="-120"/>
+              </a:rPr>
+              <a:t>ML PLATFORM &amp; DATA ENG</a:t>
+            </a:r>
+            <a:endParaRPr lang="en-US" sz="1866" dirty="0"/>
+          </a:p>
+        </p:txBody>
+      </p:sp>
+      <p:sp>
+        <p:nvSpPr>
+          <p:cNvPr id="12" name="Text 10"/>
+          <p:cNvSpPr/>
+          <p:nvPr/>
+        </p:nvSpPr>
+        <p:spPr>
+          <a:xfrm>
+            <a:off x="319484" y="6104731"/>
+            <a:ext cx="11327869" cy="245269"/>
+          </a:xfrm>
+          <a:prstGeom prst="rect">
+            <a:avLst/>
+          </a:prstGeom>
+          <a:noFill/>
+          <a:ln/>
+        </p:spPr>
+        <p:txBody>
+          <a:bodyPr wrap="square" lIns="0" tIns="0" rIns="0" bIns="0" rtlCol="0" anchor="t"/>
+          <a:lstStyle/>
+          <a:p>
+            <a:pPr algn="r" indent="0" marL="0">
+              <a:lnSpc>
+                <a:spcPts val="1933"/>
+              </a:lnSpc>
+              <a:buNone/>
+            </a:pPr>
+            <a:r>
+              <a:rPr lang="en-US" sz="1333" dirty="0">
+                <a:solidFill>
+                  <a:srgbClr val="7A828F"/>
+                </a:solidFill>
+                <a:latin typeface="Inter" pitchFamily="34" charset="0"/>
+                <a:ea typeface="Inter" pitchFamily="34" charset="-122"/>
+                <a:cs typeface="Inter" pitchFamily="34" charset="-120"/>
+              </a:rPr>
+              <a:t>FEATURE STORE — ADOPTION REVIEW · SHEET 01/06 · FRAMEWORK ONLY, NO EXTERNAL DATA</a:t>
+            </a:r>
+            <a:endParaRPr lang="en-US" sz="1333" dirty="0"/>
+          </a:p>
+        </p:txBody>
+      </p:sp>
     </p:spTree>
   </p:cSld>
   <p:clrMapOvr>
@@ -1348,6 +1806,13 @@
 <file path=ppt/slides/slide2.xml><?xml version="1.0" encoding="utf-8"?>
 <p:sld xmlns:a="http://schemas.openxmlformats.org/drawingml/2006/main" xmlns:r="http://schemas.openxmlformats.org/officeDocument/2006/relationships" xmlns:p="http://schemas.openxmlformats.org/presentationml/2006/main">
   <p:cSld name="Slide 2">
+    <p:bg>
+      <p:bgPr>
+        <a:solidFill>
+          <a:srgbClr val="FFFFFF"/>
+        </a:solidFill>
+      </p:bgPr>
+    </p:bg>
     <p:spTree>
       <p:nvGrpSpPr>
         <p:cNvPr id="1" name=""/>
@@ -1362,30 +1827,986 @@
           <a:chExt cx="0" cy="0"/>
         </a:xfrm>
       </p:grpSpPr>
+      <p:sp>
+        <p:nvSpPr>
+          <p:cNvPr id="2" name="Text 0"/>
+          <p:cNvSpPr/>
+          <p:nvPr/>
+        </p:nvSpPr>
+        <p:spPr>
+          <a:xfrm>
+            <a:off x="541599" y="457200"/>
+            <a:ext cx="11327869" cy="440333"/>
+          </a:xfrm>
+          <a:prstGeom prst="rect">
+            <a:avLst/>
+          </a:prstGeom>
+          <a:noFill/>
+          <a:ln/>
+        </p:spPr>
+        <p:txBody>
+          <a:bodyPr wrap="square" lIns="0" tIns="0" rIns="0" bIns="0" rtlCol="0" anchor="t"/>
+          <a:lstStyle/>
+          <a:p>
+            <a:pPr algn="l" indent="0" marL="0">
+              <a:lnSpc>
+                <a:spcPts val="3466"/>
+              </a:lnSpc>
+              <a:buNone/>
+            </a:pPr>
+            <a:r>
+              <a:rPr lang="en-US" sz="2666" b="1" dirty="0">
+                <a:solidFill>
+                  <a:srgbClr val="1A1A1A"/>
+                </a:solidFill>
+                <a:latin typeface="Inter" pitchFamily="34" charset="0"/>
+                <a:ea typeface="Inter" pitchFamily="34" charset="-122"/>
+                <a:cs typeface="Inter" pitchFamily="34" charset="-120"/>
+              </a:rPr>
+              <a:t>The problem a feature store solves is duplication, not storage</a:t>
+            </a:r>
+            <a:endParaRPr lang="en-US" sz="2666" dirty="0"/>
+          </a:p>
+        </p:txBody>
+      </p:sp>
+      <p:sp>
+        <p:nvSpPr>
+          <p:cNvPr id="3" name="Text 1"/>
+          <p:cNvSpPr/>
+          <p:nvPr/>
+        </p:nvSpPr>
+        <p:spPr>
+          <a:xfrm>
+            <a:off x="541599" y="999133"/>
+            <a:ext cx="11327869" cy="270073"/>
+          </a:xfrm>
+          <a:prstGeom prst="rect">
+            <a:avLst/>
+          </a:prstGeom>
+          <a:noFill/>
+          <a:ln/>
+        </p:spPr>
+        <p:txBody>
+          <a:bodyPr wrap="square" lIns="0" tIns="0" rIns="0" bIns="0" rtlCol="0" anchor="t"/>
+          <a:lstStyle/>
+          <a:p>
+            <a:pPr algn="l" indent="0" marL="0">
+              <a:lnSpc>
+                <a:spcPts val="2126"/>
+              </a:lnSpc>
+              <a:spcBef>
+                <a:spcPts val="800"/>
+              </a:spcBef>
+              <a:buNone/>
+            </a:pPr>
+            <a:r>
+              <a:rPr lang="en-US" sz="1466" dirty="0">
+                <a:solidFill>
+                  <a:srgbClr val="7A828F"/>
+                </a:solidFill>
+                <a:latin typeface="Inter" pitchFamily="34" charset="0"/>
+                <a:ea typeface="Inter" pitchFamily="34" charset="-122"/>
+                <a:cs typeface="Inter" pitchFamily="34" charset="-120"/>
+              </a:rPr>
+              <a:t>WHAT IT SOLVES</a:t>
+            </a:r>
+            <a:endParaRPr lang="en-US" sz="1466" dirty="0"/>
+          </a:p>
+        </p:txBody>
+      </p:sp>
+      <p:sp>
+        <p:nvSpPr>
+          <p:cNvPr id="4" name="Text 2"/>
+          <p:cNvSpPr/>
+          <p:nvPr/>
+        </p:nvSpPr>
+        <p:spPr>
+          <a:xfrm>
+            <a:off x="541599" y="1540669"/>
+            <a:ext cx="3851435" cy="704056"/>
+          </a:xfrm>
+          <a:prstGeom prst="rect">
+            <a:avLst/>
+          </a:prstGeom>
+          <a:noFill/>
+          <a:ln/>
+        </p:spPr>
+        <p:txBody>
+          <a:bodyPr wrap="square" lIns="0" tIns="0" rIns="0" bIns="0" rtlCol="0" anchor="t"/>
+          <a:lstStyle/>
+          <a:p>
+            <a:pPr algn="l" indent="0" marL="0">
+              <a:lnSpc>
+                <a:spcPts val="2773"/>
+              </a:lnSpc>
+              <a:spcAft>
+                <a:spcPts val="1333"/>
+              </a:spcAft>
+              <a:buNone/>
+            </a:pPr>
+            <a:r>
+              <a:rPr lang="en-US" sz="2133" b="1" dirty="0">
+                <a:solidFill>
+                  <a:srgbClr val="1A1A1A"/>
+                </a:solidFill>
+                <a:latin typeface="Inter" pitchFamily="34" charset="0"/>
+                <a:ea typeface="Inter" pitchFamily="34" charset="-122"/>
+                <a:cs typeface="Inter" pitchFamily="34" charset="-120"/>
+              </a:rPr>
+              <a:t>The same feature, written twice</a:t>
+            </a:r>
+            <a:endParaRPr lang="en-US" sz="2133" dirty="0"/>
+          </a:p>
+        </p:txBody>
+      </p:sp>
+      <p:sp>
+        <p:nvSpPr>
+          <p:cNvPr id="5" name="Text 3"/>
+          <p:cNvSpPr/>
+          <p:nvPr/>
+        </p:nvSpPr>
+        <p:spPr>
+          <a:xfrm>
+            <a:off x="541599" y="2413992"/>
+            <a:ext cx="3851435" cy="1031081"/>
+          </a:xfrm>
+          <a:prstGeom prst="rect">
+            <a:avLst/>
+          </a:prstGeom>
+          <a:noFill/>
+          <a:ln/>
+        </p:spPr>
+        <p:txBody>
+          <a:bodyPr wrap="square" lIns="0" tIns="0" rIns="0" bIns="0" rtlCol="0" anchor="t"/>
+          <a:lstStyle/>
+          <a:p>
+            <a:pPr algn="l" indent="0" marL="0">
+              <a:lnSpc>
+                <a:spcPts val="2706"/>
+              </a:lnSpc>
+              <a:buNone/>
+            </a:pPr>
+            <a:r>
+              <a:rPr lang="en-US" sz="1866" dirty="0">
+                <a:solidFill>
+                  <a:srgbClr val="3D4350"/>
+                </a:solidFill>
+                <a:latin typeface="Inter" pitchFamily="34" charset="0"/>
+                <a:ea typeface="Inter" pitchFamily="34" charset="-122"/>
+                <a:cs typeface="Inter" pitchFamily="34" charset="-120"/>
+              </a:rPr>
+              <a:t>A feature computed one way for training and another way for serving will drift apart.</a:t>
+            </a:r>
+            <a:endParaRPr lang="en-US" sz="1866" dirty="0"/>
+          </a:p>
+        </p:txBody>
+      </p:sp>
+      <p:sp>
+        <p:nvSpPr>
+          <p:cNvPr id="6" name="Text 4"/>
+          <p:cNvSpPr/>
+          <p:nvPr/>
+        </p:nvSpPr>
+        <p:spPr>
+          <a:xfrm>
+            <a:off x="541599" y="3648273"/>
+            <a:ext cx="3851435" cy="1031081"/>
+          </a:xfrm>
+          <a:prstGeom prst="rect">
+            <a:avLst/>
+          </a:prstGeom>
+          <a:noFill/>
+          <a:ln/>
+        </p:spPr>
+        <p:txBody>
+          <a:bodyPr wrap="square" lIns="0" tIns="0" rIns="0" bIns="0" rtlCol="0" anchor="t"/>
+          <a:lstStyle/>
+          <a:p>
+            <a:pPr algn="l" indent="0" marL="0">
+              <a:lnSpc>
+                <a:spcPts val="2706"/>
+              </a:lnSpc>
+              <a:spcBef>
+                <a:spcPts val="1600"/>
+              </a:spcBef>
+              <a:buNone/>
+            </a:pPr>
+            <a:r>
+              <a:rPr lang="en-US" sz="1866" dirty="0">
+                <a:solidFill>
+                  <a:srgbClr val="3D4350"/>
+                </a:solidFill>
+                <a:latin typeface="Inter" pitchFamily="34" charset="0"/>
+                <a:ea typeface="Inter" pitchFamily="34" charset="-122"/>
+                <a:cs typeface="Inter" pitchFamily="34" charset="-120"/>
+              </a:rPr>
+              <a:t>The failure is silent: the model does not error, it just gets quietly worse.</a:t>
+            </a:r>
+            <a:endParaRPr lang="en-US" sz="1866" dirty="0"/>
+          </a:p>
+        </p:txBody>
+      </p:sp>
+      <p:sp>
+        <p:nvSpPr>
+          <p:cNvPr id="7" name="Text 5"/>
+          <p:cNvSpPr/>
+          <p:nvPr/>
+        </p:nvSpPr>
+        <p:spPr>
+          <a:xfrm>
+            <a:off x="4689890" y="1851422"/>
+            <a:ext cx="7096613" cy="270073"/>
+          </a:xfrm>
+          <a:prstGeom prst="rect">
+            <a:avLst/>
+          </a:prstGeom>
+          <a:noFill/>
+          <a:ln/>
+        </p:spPr>
+        <p:txBody>
+          <a:bodyPr wrap="square" lIns="0" tIns="0" rIns="0" bIns="0" rtlCol="0" anchor="t"/>
+          <a:lstStyle/>
+          <a:p>
+            <a:pPr algn="l" indent="0" marL="0">
+              <a:lnSpc>
+                <a:spcPts val="2126"/>
+              </a:lnSpc>
+              <a:spcAft>
+                <a:spcPts val="800"/>
+              </a:spcAft>
+              <a:buNone/>
+            </a:pPr>
+            <a:r>
+              <a:rPr lang="en-US" sz="1466" dirty="0">
+                <a:solidFill>
+                  <a:srgbClr val="7A828F"/>
+                </a:solidFill>
+                <a:latin typeface="Inter" pitchFamily="34" charset="0"/>
+                <a:ea typeface="Inter" pitchFamily="34" charset="-122"/>
+                <a:cs typeface="Inter" pitchFamily="34" charset="-120"/>
+              </a:rPr>
+              <a:t>TRAINING PATH</a:t>
+            </a:r>
+            <a:endParaRPr lang="en-US" sz="1466" dirty="0"/>
+          </a:p>
+        </p:txBody>
+      </p:sp>
+      <p:sp>
+        <p:nvSpPr>
+          <p:cNvPr id="8" name="Text 6"/>
+          <p:cNvSpPr/>
+          <p:nvPr/>
+        </p:nvSpPr>
+        <p:spPr>
+          <a:xfrm>
+            <a:off x="4689890" y="2223095"/>
+            <a:ext cx="2116005" cy="707628"/>
+          </a:xfrm>
+          <a:prstGeom prst="rect">
+            <a:avLst/>
+          </a:prstGeom>
+          <a:noFill/>
+          <a:ln w="12698">
+            <a:solidFill>
+              <a:srgbClr val="C9CDD3"/>
+            </a:solidFill>
+          </a:ln>
+        </p:spPr>
+        <p:txBody>
+          <a:bodyPr wrap="square" rtlCol="0" anchor="ctr"/>
+          <a:lstStyle/>
+          <a:p>
+            <a:pPr indent="0" marL="0">
+              <a:buNone/>
+            </a:pPr>
+            <a:endParaRPr lang="en-US" dirty="0"/>
+          </a:p>
+        </p:txBody>
+      </p:sp>
+      <p:sp>
+        <p:nvSpPr>
+          <p:cNvPr id="9" name="Text 7"/>
+          <p:cNvSpPr/>
+          <p:nvPr/>
+        </p:nvSpPr>
+        <p:spPr>
+          <a:xfrm>
+            <a:off x="4819687" y="2405062"/>
+            <a:ext cx="1856411" cy="343694"/>
+          </a:xfrm>
+          <a:prstGeom prst="rect">
+            <a:avLst/>
+          </a:prstGeom>
+          <a:noFill/>
+          <a:ln/>
+        </p:spPr>
+        <p:txBody>
+          <a:bodyPr wrap="square" lIns="0" tIns="0" rIns="0" bIns="0" rtlCol="0" anchor="t"/>
+          <a:lstStyle/>
+          <a:p>
+            <a:pPr algn="ctr" indent="0" marL="0">
+              <a:lnSpc>
+                <a:spcPts val="2706"/>
+              </a:lnSpc>
+              <a:buNone/>
+            </a:pPr>
+            <a:r>
+              <a:rPr lang="en-US" sz="1866" dirty="0">
+                <a:solidFill>
+                  <a:srgbClr val="1A1A1A"/>
+                </a:solidFill>
+                <a:latin typeface="Inter" pitchFamily="34" charset="0"/>
+                <a:ea typeface="Inter" pitchFamily="34" charset="-122"/>
+                <a:cs typeface="Inter" pitchFamily="34" charset="-120"/>
+              </a:rPr>
+              <a:t>batch job</a:t>
+            </a:r>
+            <a:endParaRPr lang="en-US" sz="1866" dirty="0"/>
+          </a:p>
+        </p:txBody>
+      </p:sp>
       <p:pic>
         <p:nvPicPr>
-          <p:cNvPr id="2" name="Image 0" descr="/tmp/slide-1787840589028-q41krhm2d9f.png">    </p:cNvPr>
+          <p:cNvPr id="10" name="Image 0" descr="preencoded.png">    </p:cNvPr>
           <p:cNvPicPr>
             <a:picLocks noChangeAspect="1"/>
           </p:cNvPicPr>
           <p:nvPr/>
         </p:nvPicPr>
         <p:blipFill>
-          <a:blip r:embed="rId1"/>
+          <a:blip r:embed="rId1">
+            <a:extLst>
+              <a:ext uri="{96DAC541-7B7A-43D3-8B79-37D633B846F1}">
+                <asvg:svgBlip xmlns:asvg="http://schemas.microsoft.com/office/drawing/2016/SVG/main" r:embed="rId2"/>
+              </a:ext>
+            </a:extLst>
+          </a:blip>
           <a:stretch>
             <a:fillRect/>
           </a:stretch>
         </p:blipFill>
         <p:spPr>
           <a:xfrm>
-            <a:off x="0" y="0"/>
-            <a:ext cx="12188952" cy="6858000"/>
+            <a:off x="6805895" y="2492177"/>
+            <a:ext cx="304724" cy="169267"/>
           </a:xfrm>
           <a:prstGeom prst="rect">
             <a:avLst/>
           </a:prstGeom>
         </p:spPr>
       </p:pic>
+      <p:sp>
+        <p:nvSpPr>
+          <p:cNvPr id="11" name="Text 8"/>
+          <p:cNvSpPr/>
+          <p:nvPr/>
+        </p:nvSpPr>
+        <p:spPr>
+          <a:xfrm>
+            <a:off x="7110619" y="2223095"/>
+            <a:ext cx="2116005" cy="707628"/>
+          </a:xfrm>
+          <a:prstGeom prst="rect">
+            <a:avLst/>
+          </a:prstGeom>
+          <a:noFill/>
+          <a:ln w="12698">
+            <a:solidFill>
+              <a:srgbClr val="C9CDD3"/>
+            </a:solidFill>
+          </a:ln>
+        </p:spPr>
+        <p:txBody>
+          <a:bodyPr wrap="square" rtlCol="0" anchor="ctr"/>
+          <a:lstStyle/>
+          <a:p>
+            <a:pPr indent="0" marL="0">
+              <a:buNone/>
+            </a:pPr>
+            <a:endParaRPr lang="en-US" dirty="0"/>
+          </a:p>
+        </p:txBody>
+      </p:sp>
+      <p:sp>
+        <p:nvSpPr>
+          <p:cNvPr id="12" name="Text 9"/>
+          <p:cNvSpPr/>
+          <p:nvPr/>
+        </p:nvSpPr>
+        <p:spPr>
+          <a:xfrm>
+            <a:off x="7240416" y="2405062"/>
+            <a:ext cx="1856411" cy="343694"/>
+          </a:xfrm>
+          <a:prstGeom prst="rect">
+            <a:avLst/>
+          </a:prstGeom>
+          <a:noFill/>
+          <a:ln/>
+        </p:spPr>
+        <p:txBody>
+          <a:bodyPr wrap="square" lIns="0" tIns="0" rIns="0" bIns="0" rtlCol="0" anchor="t"/>
+          <a:lstStyle/>
+          <a:p>
+            <a:pPr algn="ctr" indent="0" marL="0">
+              <a:lnSpc>
+                <a:spcPts val="2706"/>
+              </a:lnSpc>
+              <a:buNone/>
+            </a:pPr>
+            <a:r>
+              <a:rPr lang="en-US" sz="1866" dirty="0">
+                <a:solidFill>
+                  <a:srgbClr val="1A1A1A"/>
+                </a:solidFill>
+                <a:latin typeface="Inter" pitchFamily="34" charset="0"/>
+                <a:ea typeface="Inter" pitchFamily="34" charset="-122"/>
+                <a:cs typeface="Inter" pitchFamily="34" charset="-120"/>
+              </a:rPr>
+              <a:t>feature table</a:t>
+            </a:r>
+            <a:endParaRPr lang="en-US" sz="1866" dirty="0"/>
+          </a:p>
+        </p:txBody>
+      </p:sp>
+      <p:pic>
+        <p:nvPicPr>
+          <p:cNvPr id="13" name="Image 1" descr="preencoded.png">    </p:cNvPr>
+          <p:cNvPicPr>
+            <a:picLocks noChangeAspect="1"/>
+          </p:cNvPicPr>
+          <p:nvPr/>
+        </p:nvPicPr>
+        <p:blipFill>
+          <a:blip r:embed="rId3">
+            <a:extLst>
+              <a:ext uri="{96DAC541-7B7A-43D3-8B79-37D633B846F1}">
+                <asvg:svgBlip xmlns:asvg="http://schemas.microsoft.com/office/drawing/2016/SVG/main" r:embed="rId4"/>
+              </a:ext>
+            </a:extLst>
+          </a:blip>
+          <a:stretch>
+            <a:fillRect/>
+          </a:stretch>
+        </p:blipFill>
+        <p:spPr>
+          <a:xfrm>
+            <a:off x="9226624" y="2492177"/>
+            <a:ext cx="304724" cy="169267"/>
+          </a:xfrm>
+          <a:prstGeom prst="rect">
+            <a:avLst/>
+          </a:prstGeom>
+        </p:spPr>
+      </p:pic>
+      <p:sp>
+        <p:nvSpPr>
+          <p:cNvPr id="14" name="Text 10"/>
+          <p:cNvSpPr/>
+          <p:nvPr/>
+        </p:nvSpPr>
+        <p:spPr>
+          <a:xfrm>
+            <a:off x="9531348" y="2223095"/>
+            <a:ext cx="2116005" cy="707628"/>
+          </a:xfrm>
+          <a:prstGeom prst="rect">
+            <a:avLst/>
+          </a:prstGeom>
+          <a:noFill/>
+          <a:ln w="12698">
+            <a:solidFill>
+              <a:srgbClr val="C9CDD3"/>
+            </a:solidFill>
+          </a:ln>
+        </p:spPr>
+        <p:txBody>
+          <a:bodyPr wrap="square" rtlCol="0" anchor="ctr"/>
+          <a:lstStyle/>
+          <a:p>
+            <a:pPr indent="0" marL="0">
+              <a:buNone/>
+            </a:pPr>
+            <a:endParaRPr lang="en-US" dirty="0"/>
+          </a:p>
+        </p:txBody>
+      </p:sp>
+      <p:sp>
+        <p:nvSpPr>
+          <p:cNvPr id="15" name="Text 11"/>
+          <p:cNvSpPr/>
+          <p:nvPr/>
+        </p:nvSpPr>
+        <p:spPr>
+          <a:xfrm>
+            <a:off x="9661145" y="2405062"/>
+            <a:ext cx="1856411" cy="343694"/>
+          </a:xfrm>
+          <a:prstGeom prst="rect">
+            <a:avLst/>
+          </a:prstGeom>
+          <a:noFill/>
+          <a:ln/>
+        </p:spPr>
+        <p:txBody>
+          <a:bodyPr wrap="square" lIns="0" tIns="0" rIns="0" bIns="0" rtlCol="0" anchor="t"/>
+          <a:lstStyle/>
+          <a:p>
+            <a:pPr algn="ctr" indent="0" marL="0">
+              <a:lnSpc>
+                <a:spcPts val="2706"/>
+              </a:lnSpc>
+              <a:buNone/>
+            </a:pPr>
+            <a:r>
+              <a:rPr lang="en-US" sz="1866" dirty="0">
+                <a:solidFill>
+                  <a:srgbClr val="1A1A1A"/>
+                </a:solidFill>
+                <a:latin typeface="Inter" pitchFamily="34" charset="0"/>
+                <a:ea typeface="Inter" pitchFamily="34" charset="-122"/>
+                <a:cs typeface="Inter" pitchFamily="34" charset="-120"/>
+              </a:rPr>
+              <a:t>model</a:t>
+            </a:r>
+            <a:endParaRPr lang="en-US" sz="1866" dirty="0"/>
+          </a:p>
+        </p:txBody>
+      </p:sp>
+      <p:sp>
+        <p:nvSpPr>
+          <p:cNvPr id="16" name="Text 12"/>
+          <p:cNvSpPr/>
+          <p:nvPr/>
+        </p:nvSpPr>
+        <p:spPr>
+          <a:xfrm>
+            <a:off x="4689890" y="3303191"/>
+            <a:ext cx="7096613" cy="270073"/>
+          </a:xfrm>
+          <a:prstGeom prst="rect">
+            <a:avLst/>
+          </a:prstGeom>
+          <a:noFill/>
+          <a:ln/>
+        </p:spPr>
+        <p:txBody>
+          <a:bodyPr wrap="square" lIns="0" tIns="0" rIns="0" bIns="0" rtlCol="0" anchor="t"/>
+          <a:lstStyle/>
+          <a:p>
+            <a:pPr algn="l" indent="0" marL="0">
+              <a:lnSpc>
+                <a:spcPts val="2126"/>
+              </a:lnSpc>
+              <a:spcAft>
+                <a:spcPts val="800"/>
+              </a:spcAft>
+              <a:buNone/>
+            </a:pPr>
+            <a:r>
+              <a:rPr lang="en-US" sz="1466" dirty="0">
+                <a:solidFill>
+                  <a:srgbClr val="7A828F"/>
+                </a:solidFill>
+                <a:latin typeface="Inter" pitchFamily="34" charset="0"/>
+                <a:ea typeface="Inter" pitchFamily="34" charset="-122"/>
+                <a:cs typeface="Inter" pitchFamily="34" charset="-120"/>
+              </a:rPr>
+              <a:t>SERVING PATH</a:t>
+            </a:r>
+            <a:endParaRPr lang="en-US" sz="1466" dirty="0"/>
+          </a:p>
+        </p:txBody>
+      </p:sp>
+      <p:sp>
+        <p:nvSpPr>
+          <p:cNvPr id="17" name="Text 13"/>
+          <p:cNvSpPr/>
+          <p:nvPr/>
+        </p:nvSpPr>
+        <p:spPr>
+          <a:xfrm>
+            <a:off x="4689890" y="3674864"/>
+            <a:ext cx="2116005" cy="707628"/>
+          </a:xfrm>
+          <a:prstGeom prst="rect">
+            <a:avLst/>
+          </a:prstGeom>
+          <a:noFill/>
+          <a:ln w="12698">
+            <a:solidFill>
+              <a:srgbClr val="C9CDD3"/>
+            </a:solidFill>
+          </a:ln>
+        </p:spPr>
+        <p:txBody>
+          <a:bodyPr wrap="square" rtlCol="0" anchor="ctr"/>
+          <a:lstStyle/>
+          <a:p>
+            <a:pPr indent="0" marL="0">
+              <a:buNone/>
+            </a:pPr>
+            <a:endParaRPr lang="en-US" dirty="0"/>
+          </a:p>
+        </p:txBody>
+      </p:sp>
+      <p:sp>
+        <p:nvSpPr>
+          <p:cNvPr id="18" name="Text 14"/>
+          <p:cNvSpPr/>
+          <p:nvPr/>
+        </p:nvSpPr>
+        <p:spPr>
+          <a:xfrm>
+            <a:off x="4819687" y="3856831"/>
+            <a:ext cx="1856411" cy="343694"/>
+          </a:xfrm>
+          <a:prstGeom prst="rect">
+            <a:avLst/>
+          </a:prstGeom>
+          <a:noFill/>
+          <a:ln/>
+        </p:spPr>
+        <p:txBody>
+          <a:bodyPr wrap="square" lIns="0" tIns="0" rIns="0" bIns="0" rtlCol="0" anchor="t"/>
+          <a:lstStyle/>
+          <a:p>
+            <a:pPr algn="ctr" indent="0" marL="0">
+              <a:lnSpc>
+                <a:spcPts val="2706"/>
+              </a:lnSpc>
+              <a:buNone/>
+            </a:pPr>
+            <a:r>
+              <a:rPr lang="en-US" sz="1866" dirty="0">
+                <a:solidFill>
+                  <a:srgbClr val="1A1A1A"/>
+                </a:solidFill>
+                <a:latin typeface="Inter" pitchFamily="34" charset="0"/>
+                <a:ea typeface="Inter" pitchFamily="34" charset="-122"/>
+                <a:cs typeface="Inter" pitchFamily="34" charset="-120"/>
+              </a:rPr>
+              <a:t>service code</a:t>
+            </a:r>
+            <a:endParaRPr lang="en-US" sz="1866" dirty="0"/>
+          </a:p>
+        </p:txBody>
+      </p:sp>
+      <p:pic>
+        <p:nvPicPr>
+          <p:cNvPr id="19" name="Image 2" descr="preencoded.png">    </p:cNvPr>
+          <p:cNvPicPr>
+            <a:picLocks noChangeAspect="1"/>
+          </p:cNvPicPr>
+          <p:nvPr/>
+        </p:nvPicPr>
+        <p:blipFill>
+          <a:blip r:embed="rId5">
+            <a:extLst>
+              <a:ext uri="{96DAC541-7B7A-43D3-8B79-37D633B846F1}">
+                <asvg:svgBlip xmlns:asvg="http://schemas.microsoft.com/office/drawing/2016/SVG/main" r:embed="rId6"/>
+              </a:ext>
+            </a:extLst>
+          </a:blip>
+          <a:stretch>
+            <a:fillRect/>
+          </a:stretch>
+        </p:blipFill>
+        <p:spPr>
+          <a:xfrm>
+            <a:off x="6805895" y="3943945"/>
+            <a:ext cx="304724" cy="169267"/>
+          </a:xfrm>
+          <a:prstGeom prst="rect">
+            <a:avLst/>
+          </a:prstGeom>
+        </p:spPr>
+      </p:pic>
+      <p:sp>
+        <p:nvSpPr>
+          <p:cNvPr id="20" name="Text 15"/>
+          <p:cNvSpPr/>
+          <p:nvPr/>
+        </p:nvSpPr>
+        <p:spPr>
+          <a:xfrm>
+            <a:off x="7110619" y="3674864"/>
+            <a:ext cx="2116005" cy="707628"/>
+          </a:xfrm>
+          <a:prstGeom prst="rect">
+            <a:avLst/>
+          </a:prstGeom>
+          <a:noFill/>
+          <a:ln w="12698">
+            <a:solidFill>
+              <a:srgbClr val="C9CDD3"/>
+            </a:solidFill>
+          </a:ln>
+        </p:spPr>
+        <p:txBody>
+          <a:bodyPr wrap="square" rtlCol="0" anchor="ctr"/>
+          <a:lstStyle/>
+          <a:p>
+            <a:pPr indent="0" marL="0">
+              <a:buNone/>
+            </a:pPr>
+            <a:endParaRPr lang="en-US" dirty="0"/>
+          </a:p>
+        </p:txBody>
+      </p:sp>
+      <p:sp>
+        <p:nvSpPr>
+          <p:cNvPr id="21" name="Text 16"/>
+          <p:cNvSpPr/>
+          <p:nvPr/>
+        </p:nvSpPr>
+        <p:spPr>
+          <a:xfrm>
+            <a:off x="7240416" y="3856831"/>
+            <a:ext cx="1856411" cy="343694"/>
+          </a:xfrm>
+          <a:prstGeom prst="rect">
+            <a:avLst/>
+          </a:prstGeom>
+          <a:noFill/>
+          <a:ln/>
+        </p:spPr>
+        <p:txBody>
+          <a:bodyPr wrap="square" lIns="0" tIns="0" rIns="0" bIns="0" rtlCol="0" anchor="t"/>
+          <a:lstStyle/>
+          <a:p>
+            <a:pPr algn="ctr" indent="0" marL="0">
+              <a:lnSpc>
+                <a:spcPts val="2706"/>
+              </a:lnSpc>
+              <a:buNone/>
+            </a:pPr>
+            <a:r>
+              <a:rPr lang="en-US" sz="1866" dirty="0">
+                <a:solidFill>
+                  <a:srgbClr val="1A1A1A"/>
+                </a:solidFill>
+                <a:latin typeface="Inter" pitchFamily="34" charset="0"/>
+                <a:ea typeface="Inter" pitchFamily="34" charset="-122"/>
+                <a:cs typeface="Inter" pitchFamily="34" charset="-120"/>
+              </a:rPr>
+              <a:t>feature</a:t>
+            </a:r>
+            <a:endParaRPr lang="en-US" sz="1866" dirty="0"/>
+          </a:p>
+        </p:txBody>
+      </p:sp>
+      <p:pic>
+        <p:nvPicPr>
+          <p:cNvPr id="22" name="Image 3" descr="preencoded.png">    </p:cNvPr>
+          <p:cNvPicPr>
+            <a:picLocks noChangeAspect="1"/>
+          </p:cNvPicPr>
+          <p:nvPr/>
+        </p:nvPicPr>
+        <p:blipFill>
+          <a:blip r:embed="rId7">
+            <a:extLst>
+              <a:ext uri="{96DAC541-7B7A-43D3-8B79-37D633B846F1}">
+                <asvg:svgBlip xmlns:asvg="http://schemas.microsoft.com/office/drawing/2016/SVG/main" r:embed="rId8"/>
+              </a:ext>
+            </a:extLst>
+          </a:blip>
+          <a:stretch>
+            <a:fillRect/>
+          </a:stretch>
+        </p:blipFill>
+        <p:spPr>
+          <a:xfrm>
+            <a:off x="9226624" y="3943945"/>
+            <a:ext cx="304724" cy="169267"/>
+          </a:xfrm>
+          <a:prstGeom prst="rect">
+            <a:avLst/>
+          </a:prstGeom>
+        </p:spPr>
+      </p:pic>
+      <p:sp>
+        <p:nvSpPr>
+          <p:cNvPr id="23" name="Text 17"/>
+          <p:cNvSpPr/>
+          <p:nvPr/>
+        </p:nvSpPr>
+        <p:spPr>
+          <a:xfrm>
+            <a:off x="9531348" y="3674864"/>
+            <a:ext cx="2116005" cy="707628"/>
+          </a:xfrm>
+          <a:prstGeom prst="rect">
+            <a:avLst/>
+          </a:prstGeom>
+          <a:noFill/>
+          <a:ln w="12698">
+            <a:solidFill>
+              <a:srgbClr val="C9CDD3"/>
+            </a:solidFill>
+          </a:ln>
+        </p:spPr>
+        <p:txBody>
+          <a:bodyPr wrap="square" rtlCol="0" anchor="ctr"/>
+          <a:lstStyle/>
+          <a:p>
+            <a:pPr indent="0" marL="0">
+              <a:buNone/>
+            </a:pPr>
+            <a:endParaRPr lang="en-US" dirty="0"/>
+          </a:p>
+        </p:txBody>
+      </p:sp>
+      <p:sp>
+        <p:nvSpPr>
+          <p:cNvPr id="24" name="Text 18"/>
+          <p:cNvSpPr/>
+          <p:nvPr/>
+        </p:nvSpPr>
+        <p:spPr>
+          <a:xfrm>
+            <a:off x="9661145" y="3856831"/>
+            <a:ext cx="1856411" cy="343694"/>
+          </a:xfrm>
+          <a:prstGeom prst="rect">
+            <a:avLst/>
+          </a:prstGeom>
+          <a:noFill/>
+          <a:ln/>
+        </p:spPr>
+        <p:txBody>
+          <a:bodyPr wrap="square" lIns="0" tIns="0" rIns="0" bIns="0" rtlCol="0" anchor="t"/>
+          <a:lstStyle/>
+          <a:p>
+            <a:pPr algn="ctr" indent="0" marL="0">
+              <a:lnSpc>
+                <a:spcPts val="2706"/>
+              </a:lnSpc>
+              <a:buNone/>
+            </a:pPr>
+            <a:r>
+              <a:rPr lang="en-US" sz="1866" dirty="0">
+                <a:solidFill>
+                  <a:srgbClr val="1A1A1A"/>
+                </a:solidFill>
+                <a:latin typeface="Inter" pitchFamily="34" charset="0"/>
+                <a:ea typeface="Inter" pitchFamily="34" charset="-122"/>
+                <a:cs typeface="Inter" pitchFamily="34" charset="-120"/>
+              </a:rPr>
+              <a:t>model</a:t>
+            </a:r>
+            <a:endParaRPr lang="en-US" sz="1866" dirty="0"/>
+          </a:p>
+        </p:txBody>
+      </p:sp>
+      <p:sp>
+        <p:nvSpPr>
+          <p:cNvPr id="25" name="Shape 19"/>
+          <p:cNvSpPr/>
+          <p:nvPr/>
+        </p:nvSpPr>
+        <p:spPr>
+          <a:xfrm>
+            <a:off x="4689890" y="4693642"/>
+            <a:ext cx="6957463" cy="0"/>
+          </a:xfrm>
+          <a:prstGeom prst="line">
+            <a:avLst/>
+          </a:prstGeom>
+          <a:noFill/>
+          <a:ln w="12698">
+            <a:solidFill>
+              <a:srgbClr val="C9CDD3"/>
+            </a:solidFill>
+            <a:prstDash val="solid"/>
+          </a:ln>
+        </p:spPr>
+      </p:sp>
+      <p:sp>
+        <p:nvSpPr>
+          <p:cNvPr id="26" name="Text 20"/>
+          <p:cNvSpPr/>
+          <p:nvPr/>
+        </p:nvSpPr>
+        <p:spPr>
+          <a:xfrm>
+            <a:off x="4689890" y="4903192"/>
+            <a:ext cx="7096613" cy="687388"/>
+          </a:xfrm>
+          <a:prstGeom prst="rect">
+            <a:avLst/>
+          </a:prstGeom>
+          <a:noFill/>
+          <a:ln/>
+        </p:spPr>
+        <p:txBody>
+          <a:bodyPr wrap="square" lIns="0" tIns="0" rIns="0" bIns="0" rtlCol="0" anchor="t"/>
+          <a:lstStyle/>
+          <a:p>
+            <a:pPr algn="l" indent="0" marL="0">
+              <a:lnSpc>
+                <a:spcPts val="2706"/>
+              </a:lnSpc>
+              <a:buNone/>
+            </a:pPr>
+            <a:r>
+              <a:rPr lang="en-US" sz="1866" dirty="0">
+                <a:solidFill>
+                  <a:srgbClr val="7A828F"/>
+                </a:solidFill>
+                <a:latin typeface="Inter" pitchFamily="34" charset="0"/>
+                <a:ea typeface="Inter" pitchFamily="34" charset="-122"/>
+                <a:cs typeface="Inter" pitchFamily="34" charset="-120"/>
+              </a:rPr>
+              <a:t>One definition, two implementations — and nothing compares them.</a:t>
+            </a:r>
+            <a:endParaRPr lang="en-US" sz="1866" dirty="0"/>
+          </a:p>
+        </p:txBody>
+      </p:sp>
+      <p:sp>
+        <p:nvSpPr>
+          <p:cNvPr id="27" name="Text 21"/>
+          <p:cNvSpPr/>
+          <p:nvPr/>
+        </p:nvSpPr>
+        <p:spPr>
+          <a:xfrm>
+            <a:off x="319484" y="6104731"/>
+            <a:ext cx="11327869" cy="245269"/>
+          </a:xfrm>
+          <a:prstGeom prst="rect">
+            <a:avLst/>
+          </a:prstGeom>
+          <a:noFill/>
+          <a:ln/>
+        </p:spPr>
+        <p:txBody>
+          <a:bodyPr wrap="square" lIns="0" tIns="0" rIns="0" bIns="0" rtlCol="0" anchor="t"/>
+          <a:lstStyle/>
+          <a:p>
+            <a:pPr algn="r" indent="0" marL="0">
+              <a:lnSpc>
+                <a:spcPts val="1933"/>
+              </a:lnSpc>
+              <a:buNone/>
+            </a:pPr>
+            <a:r>
+              <a:rPr lang="en-US" sz="1333" dirty="0">
+                <a:solidFill>
+                  <a:srgbClr val="7A828F"/>
+                </a:solidFill>
+                <a:latin typeface="Inter" pitchFamily="34" charset="0"/>
+                <a:ea typeface="Inter" pitchFamily="34" charset="-122"/>
+                <a:cs typeface="Inter" pitchFamily="34" charset="-120"/>
+              </a:rPr>
+              <a:t>FEATURE STORE — ADOPTION REVIEW · SHEET 02/06 · FRAMEWORK ONLY, NO EXTERNAL DATA</a:t>
+            </a:r>
+            <a:endParaRPr lang="en-US" sz="1333" dirty="0"/>
+          </a:p>
+        </p:txBody>
+      </p:sp>
     </p:spTree>
   </p:cSld>
   <p:clrMapOvr>
@@ -1397,6 +2818,13 @@
 <file path=ppt/slides/slide3.xml><?xml version="1.0" encoding="utf-8"?>
 <p:sld xmlns:a="http://schemas.openxmlformats.org/drawingml/2006/main" xmlns:r="http://schemas.openxmlformats.org/officeDocument/2006/relationships" xmlns:p="http://schemas.openxmlformats.org/presentationml/2006/main">
   <p:cSld name="Slide 3">
+    <p:bg>
+      <p:bgPr>
+        <a:solidFill>
+          <a:srgbClr val="FFFFFF"/>
+        </a:solidFill>
+      </p:bgPr>
+    </p:bg>
     <p:spTree>
       <p:nvGrpSpPr>
         <p:cNvPr id="1" name=""/>
@@ -1411,30 +2839,1047 @@
           <a:chExt cx="0" cy="0"/>
         </a:xfrm>
       </p:grpSpPr>
-      <p:pic>
-        <p:nvPicPr>
-          <p:cNvPr id="2" name="Image 0" descr="/tmp/slide-1787840589327-3boya6mwjpa.png">    </p:cNvPr>
-          <p:cNvPicPr>
-            <a:picLocks noChangeAspect="1"/>
-          </p:cNvPicPr>
-          <p:nvPr/>
-        </p:nvPicPr>
-        <p:blipFill>
-          <a:blip r:embed="rId1"/>
-          <a:stretch>
-            <a:fillRect/>
-          </a:stretch>
-        </p:blipFill>
-        <p:spPr>
-          <a:xfrm>
-            <a:off x="0" y="0"/>
-            <a:ext cx="12188952" cy="6858000"/>
-          </a:xfrm>
-          <a:prstGeom prst="rect">
-            <a:avLst/>
-          </a:prstGeom>
-        </p:spPr>
-      </p:pic>
+      <p:sp>
+        <p:nvSpPr>
+          <p:cNvPr id="2" name="Text 0"/>
+          <p:cNvSpPr/>
+          <p:nvPr/>
+        </p:nvSpPr>
+        <p:spPr>
+          <a:xfrm>
+            <a:off x="541599" y="457200"/>
+            <a:ext cx="11327869" cy="440333"/>
+          </a:xfrm>
+          <a:prstGeom prst="rect">
+            <a:avLst/>
+          </a:prstGeom>
+          <a:noFill/>
+          <a:ln/>
+        </p:spPr>
+        <p:txBody>
+          <a:bodyPr wrap="square" lIns="0" tIns="0" rIns="0" bIns="0" rtlCol="0" anchor="t"/>
+          <a:lstStyle/>
+          <a:p>
+            <a:pPr algn="l" indent="0" marL="0">
+              <a:lnSpc>
+                <a:spcPts val="3466"/>
+              </a:lnSpc>
+              <a:buNone/>
+            </a:pPr>
+            <a:r>
+              <a:rPr lang="en-US" sz="2666" b="1" dirty="0">
+                <a:solidFill>
+                  <a:srgbClr val="1A1A1A"/>
+                </a:solidFill>
+                <a:latin typeface="Inter" pitchFamily="34" charset="0"/>
+                <a:ea typeface="Inter" pitchFamily="34" charset="-122"/>
+                <a:cs typeface="Inter" pitchFamily="34" charset="-120"/>
+              </a:rPr>
+              <a:t>A feature store is three services, and you may only need one</a:t>
+            </a:r>
+            <a:endParaRPr lang="en-US" sz="2666" dirty="0"/>
+          </a:p>
+        </p:txBody>
+      </p:sp>
+      <p:sp>
+        <p:nvSpPr>
+          <p:cNvPr id="3" name="Text 1"/>
+          <p:cNvSpPr/>
+          <p:nvPr/>
+        </p:nvSpPr>
+        <p:spPr>
+          <a:xfrm>
+            <a:off x="541599" y="999133"/>
+            <a:ext cx="11327869" cy="270073"/>
+          </a:xfrm>
+          <a:prstGeom prst="rect">
+            <a:avLst/>
+          </a:prstGeom>
+          <a:noFill/>
+          <a:ln/>
+        </p:spPr>
+        <p:txBody>
+          <a:bodyPr wrap="square" lIns="0" tIns="0" rIns="0" bIns="0" rtlCol="0" anchor="t"/>
+          <a:lstStyle/>
+          <a:p>
+            <a:pPr algn="l" indent="0" marL="0">
+              <a:lnSpc>
+                <a:spcPts val="2126"/>
+              </a:lnSpc>
+              <a:spcBef>
+                <a:spcPts val="800"/>
+              </a:spcBef>
+              <a:buNone/>
+            </a:pPr>
+            <a:r>
+              <a:rPr lang="en-US" sz="1466" dirty="0">
+                <a:solidFill>
+                  <a:srgbClr val="7A828F"/>
+                </a:solidFill>
+                <a:latin typeface="Inter" pitchFamily="34" charset="0"/>
+                <a:ea typeface="Inter" pitchFamily="34" charset="-122"/>
+                <a:cs typeface="Inter" pitchFamily="34" charset="-120"/>
+              </a:rPr>
+              <a:t>WHAT IT IS</a:t>
+            </a:r>
+            <a:endParaRPr lang="en-US" sz="1466" dirty="0"/>
+          </a:p>
+        </p:txBody>
+      </p:sp>
+      <p:sp>
+        <p:nvSpPr>
+          <p:cNvPr id="4" name="Text 2"/>
+          <p:cNvSpPr/>
+          <p:nvPr/>
+        </p:nvSpPr>
+        <p:spPr>
+          <a:xfrm>
+            <a:off x="541599" y="1540669"/>
+            <a:ext cx="3544001" cy="4360862"/>
+          </a:xfrm>
+          <a:prstGeom prst="rect">
+            <a:avLst/>
+          </a:prstGeom>
+          <a:noFill/>
+          <a:ln w="12698">
+            <a:solidFill>
+              <a:srgbClr val="C9CDD3"/>
+            </a:solidFill>
+          </a:ln>
+        </p:spPr>
+        <p:txBody>
+          <a:bodyPr wrap="square" rtlCol="0" anchor="ctr"/>
+          <a:lstStyle/>
+          <a:p>
+            <a:pPr indent="0" marL="0">
+              <a:buNone/>
+            </a:pPr>
+            <a:endParaRPr lang="en-US" dirty="0"/>
+          </a:p>
+        </p:txBody>
+      </p:sp>
+      <p:sp>
+        <p:nvSpPr>
+          <p:cNvPr id="5" name="Text 3"/>
+          <p:cNvSpPr/>
+          <p:nvPr/>
+        </p:nvSpPr>
+        <p:spPr>
+          <a:xfrm>
+            <a:off x="791171" y="1773436"/>
+            <a:ext cx="372374" cy="372467"/>
+          </a:xfrm>
+          <a:prstGeom prst="rect">
+            <a:avLst/>
+          </a:prstGeom>
+          <a:solidFill>
+            <a:srgbClr val="1F3A5F"/>
+          </a:solidFill>
+          <a:ln/>
+        </p:spPr>
+        <p:txBody>
+          <a:bodyPr wrap="square" rtlCol="0" anchor="ctr"/>
+          <a:lstStyle/>
+          <a:p>
+            <a:pPr indent="0" marL="0">
+              <a:buNone/>
+            </a:pPr>
+            <a:endParaRPr lang="en-US" dirty="0"/>
+          </a:p>
+        </p:txBody>
+      </p:sp>
+      <p:sp>
+        <p:nvSpPr>
+          <p:cNvPr id="6" name="Text 4"/>
+          <p:cNvSpPr/>
+          <p:nvPr/>
+        </p:nvSpPr>
+        <p:spPr>
+          <a:xfrm>
+            <a:off x="862987" y="1817489"/>
+            <a:ext cx="233114" cy="284361"/>
+          </a:xfrm>
+          <a:prstGeom prst="rect">
+            <a:avLst/>
+          </a:prstGeom>
+          <a:noFill/>
+          <a:ln/>
+        </p:spPr>
+        <p:txBody>
+          <a:bodyPr wrap="square" lIns="0" tIns="0" rIns="0" bIns="0" rtlCol="0" anchor="t"/>
+          <a:lstStyle/>
+          <a:p>
+            <a:pPr algn="l" indent="0" marL="0">
+              <a:lnSpc>
+                <a:spcPts val="2240"/>
+              </a:lnSpc>
+              <a:buNone/>
+            </a:pPr>
+            <a:r>
+              <a:rPr lang="en-US" sz="1600" b="1" dirty="0">
+                <a:solidFill>
+                  <a:srgbClr val="FFFFFF"/>
+                </a:solidFill>
+                <a:latin typeface="Inter" pitchFamily="34" charset="0"/>
+                <a:ea typeface="Inter" pitchFamily="34" charset="-122"/>
+                <a:cs typeface="Inter" pitchFamily="34" charset="-120"/>
+              </a:rPr>
+              <a:t>01</a:t>
+            </a:r>
+            <a:endParaRPr lang="en-US" sz="1600" dirty="0"/>
+          </a:p>
+        </p:txBody>
+      </p:sp>
+      <p:sp>
+        <p:nvSpPr>
+          <p:cNvPr id="7" name="Text 5"/>
+          <p:cNvSpPr/>
+          <p:nvPr/>
+        </p:nvSpPr>
+        <p:spPr>
+          <a:xfrm>
+            <a:off x="791171" y="2332038"/>
+            <a:ext cx="3105754" cy="352028"/>
+          </a:xfrm>
+          <a:prstGeom prst="rect">
+            <a:avLst/>
+          </a:prstGeom>
+          <a:noFill/>
+          <a:ln/>
+        </p:spPr>
+        <p:txBody>
+          <a:bodyPr wrap="square" lIns="0" tIns="0" rIns="0" bIns="0" rtlCol="0" anchor="t"/>
+          <a:lstStyle/>
+          <a:p>
+            <a:pPr algn="l" indent="0" marL="0">
+              <a:lnSpc>
+                <a:spcPts val="2773"/>
+              </a:lnSpc>
+              <a:spcAft>
+                <a:spcPts val="1067"/>
+              </a:spcAft>
+              <a:buNone/>
+            </a:pPr>
+            <a:r>
+              <a:rPr lang="en-US" sz="2133" b="1" dirty="0">
+                <a:solidFill>
+                  <a:srgbClr val="1A1A1A"/>
+                </a:solidFill>
+                <a:latin typeface="Inter" pitchFamily="34" charset="0"/>
+                <a:ea typeface="Inter" pitchFamily="34" charset="-122"/>
+                <a:cs typeface="Inter" pitchFamily="34" charset="-120"/>
+              </a:rPr>
+              <a:t>Registry</a:t>
+            </a:r>
+            <a:endParaRPr lang="en-US" sz="2133" dirty="0"/>
+          </a:p>
+        </p:txBody>
+      </p:sp>
+      <p:sp>
+        <p:nvSpPr>
+          <p:cNvPr id="8" name="Text 6"/>
+          <p:cNvSpPr/>
+          <p:nvPr/>
+        </p:nvSpPr>
+        <p:spPr>
+          <a:xfrm>
+            <a:off x="791171" y="2819400"/>
+            <a:ext cx="3105754" cy="1031081"/>
+          </a:xfrm>
+          <a:prstGeom prst="rect">
+            <a:avLst/>
+          </a:prstGeom>
+          <a:noFill/>
+          <a:ln/>
+        </p:spPr>
+        <p:txBody>
+          <a:bodyPr wrap="square" lIns="0" tIns="0" rIns="0" bIns="0" rtlCol="0" anchor="t"/>
+          <a:lstStyle/>
+          <a:p>
+            <a:pPr algn="l" indent="0" marL="0">
+              <a:lnSpc>
+                <a:spcPts val="2706"/>
+              </a:lnSpc>
+              <a:spcAft>
+                <a:spcPts val="1600"/>
+              </a:spcAft>
+              <a:buNone/>
+            </a:pPr>
+            <a:r>
+              <a:rPr lang="en-US" sz="1866" dirty="0">
+                <a:solidFill>
+                  <a:srgbClr val="3D4350"/>
+                </a:solidFill>
+                <a:latin typeface="Inter" pitchFamily="34" charset="0"/>
+                <a:ea typeface="Inter" pitchFamily="34" charset="-122"/>
+                <a:cs typeface="Inter" pitchFamily="34" charset="-120"/>
+              </a:rPr>
+              <a:t>One place where a feature is defined, owned and discoverable.</a:t>
+            </a:r>
+            <a:endParaRPr lang="en-US" sz="1866" dirty="0"/>
+          </a:p>
+        </p:txBody>
+      </p:sp>
+      <p:sp>
+        <p:nvSpPr>
+          <p:cNvPr id="9" name="Shape 7"/>
+          <p:cNvSpPr/>
+          <p:nvPr/>
+        </p:nvSpPr>
+        <p:spPr>
+          <a:xfrm>
+            <a:off x="791171" y="4090591"/>
+            <a:ext cx="3044857" cy="0"/>
+          </a:xfrm>
+          <a:prstGeom prst="line">
+            <a:avLst/>
+          </a:prstGeom>
+          <a:noFill/>
+          <a:ln w="12698">
+            <a:solidFill>
+              <a:srgbClr val="C9CDD3"/>
+            </a:solidFill>
+            <a:prstDash val="solid"/>
+          </a:ln>
+        </p:spPr>
+      </p:sp>
+      <p:sp>
+        <p:nvSpPr>
+          <p:cNvPr id="10" name="Text 8"/>
+          <p:cNvSpPr/>
+          <p:nvPr/>
+        </p:nvSpPr>
+        <p:spPr>
+          <a:xfrm>
+            <a:off x="791171" y="4283075"/>
+            <a:ext cx="3105754" cy="270073"/>
+          </a:xfrm>
+          <a:prstGeom prst="rect">
+            <a:avLst/>
+          </a:prstGeom>
+          <a:noFill/>
+          <a:ln/>
+        </p:spPr>
+        <p:txBody>
+          <a:bodyPr wrap="square" lIns="0" tIns="0" rIns="0" bIns="0" rtlCol="0" anchor="t"/>
+          <a:lstStyle/>
+          <a:p>
+            <a:pPr algn="l" indent="0" marL="0">
+              <a:lnSpc>
+                <a:spcPts val="2126"/>
+              </a:lnSpc>
+              <a:spcAft>
+                <a:spcPts val="667"/>
+              </a:spcAft>
+              <a:buNone/>
+            </a:pPr>
+            <a:r>
+              <a:rPr lang="en-US" sz="1466" dirty="0">
+                <a:solidFill>
+                  <a:srgbClr val="7A828F"/>
+                </a:solidFill>
+                <a:latin typeface="Inter" pitchFamily="34" charset="0"/>
+                <a:ea typeface="Inter" pitchFamily="34" charset="-122"/>
+                <a:cs typeface="Inter" pitchFamily="34" charset="-120"/>
+              </a:rPr>
+              <a:t>YOU NEED IT WHEN</a:t>
+            </a:r>
+            <a:endParaRPr lang="en-US" sz="1466" dirty="0"/>
+          </a:p>
+        </p:txBody>
+      </p:sp>
+      <p:sp>
+        <p:nvSpPr>
+          <p:cNvPr id="11" name="Text 9"/>
+          <p:cNvSpPr/>
+          <p:nvPr/>
+        </p:nvSpPr>
+        <p:spPr>
+          <a:xfrm>
+            <a:off x="791171" y="4637683"/>
+            <a:ext cx="3105754" cy="1031081"/>
+          </a:xfrm>
+          <a:prstGeom prst="rect">
+            <a:avLst/>
+          </a:prstGeom>
+          <a:noFill/>
+          <a:ln/>
+        </p:spPr>
+        <p:txBody>
+          <a:bodyPr wrap="square" lIns="0" tIns="0" rIns="0" bIns="0" rtlCol="0" anchor="t"/>
+          <a:lstStyle/>
+          <a:p>
+            <a:pPr algn="l" indent="0" marL="0">
+              <a:lnSpc>
+                <a:spcPts val="2706"/>
+              </a:lnSpc>
+              <a:buNone/>
+            </a:pPr>
+            <a:r>
+              <a:rPr lang="en-US" sz="1866" dirty="0">
+                <a:solidFill>
+                  <a:srgbClr val="1A1A1A"/>
+                </a:solidFill>
+                <a:latin typeface="Inter" pitchFamily="34" charset="0"/>
+                <a:ea typeface="Inter" pitchFamily="34" charset="-122"/>
+                <a:cs typeface="Inter" pitchFamily="34" charset="-120"/>
+              </a:rPr>
+              <a:t>You need it as soon as two teams use the same feature.</a:t>
+            </a:r>
+            <a:endParaRPr lang="en-US" sz="1866" dirty="0"/>
+          </a:p>
+        </p:txBody>
+      </p:sp>
+      <p:sp>
+        <p:nvSpPr>
+          <p:cNvPr id="12" name="Text 10"/>
+          <p:cNvSpPr/>
+          <p:nvPr/>
+        </p:nvSpPr>
+        <p:spPr>
+          <a:xfrm>
+            <a:off x="4322475" y="1540669"/>
+            <a:ext cx="3544001" cy="4360862"/>
+          </a:xfrm>
+          <a:prstGeom prst="rect">
+            <a:avLst/>
+          </a:prstGeom>
+          <a:noFill/>
+          <a:ln w="12698">
+            <a:solidFill>
+              <a:srgbClr val="C9CDD3"/>
+            </a:solidFill>
+          </a:ln>
+        </p:spPr>
+        <p:txBody>
+          <a:bodyPr wrap="square" rtlCol="0" anchor="ctr"/>
+          <a:lstStyle/>
+          <a:p>
+            <a:pPr indent="0" marL="0">
+              <a:buNone/>
+            </a:pPr>
+            <a:endParaRPr lang="en-US" dirty="0"/>
+          </a:p>
+        </p:txBody>
+      </p:sp>
+      <p:sp>
+        <p:nvSpPr>
+          <p:cNvPr id="13" name="Text 11"/>
+          <p:cNvSpPr/>
+          <p:nvPr/>
+        </p:nvSpPr>
+        <p:spPr>
+          <a:xfrm>
+            <a:off x="4572047" y="1773436"/>
+            <a:ext cx="372374" cy="372467"/>
+          </a:xfrm>
+          <a:prstGeom prst="rect">
+            <a:avLst/>
+          </a:prstGeom>
+          <a:solidFill>
+            <a:srgbClr val="1F3A5F"/>
+          </a:solidFill>
+          <a:ln/>
+        </p:spPr>
+        <p:txBody>
+          <a:bodyPr wrap="square" rtlCol="0" anchor="ctr"/>
+          <a:lstStyle/>
+          <a:p>
+            <a:pPr indent="0" marL="0">
+              <a:buNone/>
+            </a:pPr>
+            <a:endParaRPr lang="en-US" dirty="0"/>
+          </a:p>
+        </p:txBody>
+      </p:sp>
+      <p:sp>
+        <p:nvSpPr>
+          <p:cNvPr id="14" name="Text 12"/>
+          <p:cNvSpPr/>
+          <p:nvPr/>
+        </p:nvSpPr>
+        <p:spPr>
+          <a:xfrm>
+            <a:off x="4624819" y="1817489"/>
+            <a:ext cx="271966" cy="284361"/>
+          </a:xfrm>
+          <a:prstGeom prst="rect">
+            <a:avLst/>
+          </a:prstGeom>
+          <a:noFill/>
+          <a:ln/>
+        </p:spPr>
+        <p:txBody>
+          <a:bodyPr wrap="square" lIns="0" tIns="0" rIns="0" bIns="0" rtlCol="0" anchor="t"/>
+          <a:lstStyle/>
+          <a:p>
+            <a:pPr algn="l" indent="0" marL="0">
+              <a:lnSpc>
+                <a:spcPts val="2240"/>
+              </a:lnSpc>
+              <a:buNone/>
+            </a:pPr>
+            <a:r>
+              <a:rPr lang="en-US" sz="1600" b="1" dirty="0">
+                <a:solidFill>
+                  <a:srgbClr val="FFFFFF"/>
+                </a:solidFill>
+                <a:latin typeface="Inter" pitchFamily="34" charset="0"/>
+                <a:ea typeface="Inter" pitchFamily="34" charset="-122"/>
+                <a:cs typeface="Inter" pitchFamily="34" charset="-120"/>
+              </a:rPr>
+              <a:t>02</a:t>
+            </a:r>
+            <a:endParaRPr lang="en-US" sz="1600" dirty="0"/>
+          </a:p>
+        </p:txBody>
+      </p:sp>
+      <p:sp>
+        <p:nvSpPr>
+          <p:cNvPr id="15" name="Text 13"/>
+          <p:cNvSpPr/>
+          <p:nvPr/>
+        </p:nvSpPr>
+        <p:spPr>
+          <a:xfrm>
+            <a:off x="4572047" y="2332038"/>
+            <a:ext cx="3105754" cy="352028"/>
+          </a:xfrm>
+          <a:prstGeom prst="rect">
+            <a:avLst/>
+          </a:prstGeom>
+          <a:noFill/>
+          <a:ln/>
+        </p:spPr>
+        <p:txBody>
+          <a:bodyPr wrap="square" lIns="0" tIns="0" rIns="0" bIns="0" rtlCol="0" anchor="t"/>
+          <a:lstStyle/>
+          <a:p>
+            <a:pPr algn="l" indent="0" marL="0">
+              <a:lnSpc>
+                <a:spcPts val="2773"/>
+              </a:lnSpc>
+              <a:spcAft>
+                <a:spcPts val="1067"/>
+              </a:spcAft>
+              <a:buNone/>
+            </a:pPr>
+            <a:r>
+              <a:rPr lang="en-US" sz="2133" b="1" dirty="0">
+                <a:solidFill>
+                  <a:srgbClr val="1A1A1A"/>
+                </a:solidFill>
+                <a:latin typeface="Inter" pitchFamily="34" charset="0"/>
+                <a:ea typeface="Inter" pitchFamily="34" charset="-122"/>
+                <a:cs typeface="Inter" pitchFamily="34" charset="-120"/>
+              </a:rPr>
+              <a:t>Offline store</a:t>
+            </a:r>
+            <a:endParaRPr lang="en-US" sz="2133" dirty="0"/>
+          </a:p>
+        </p:txBody>
+      </p:sp>
+      <p:sp>
+        <p:nvSpPr>
+          <p:cNvPr id="16" name="Text 14"/>
+          <p:cNvSpPr/>
+          <p:nvPr/>
+        </p:nvSpPr>
+        <p:spPr>
+          <a:xfrm>
+            <a:off x="4572047" y="2819400"/>
+            <a:ext cx="3105754" cy="1031081"/>
+          </a:xfrm>
+          <a:prstGeom prst="rect">
+            <a:avLst/>
+          </a:prstGeom>
+          <a:noFill/>
+          <a:ln/>
+        </p:spPr>
+        <p:txBody>
+          <a:bodyPr wrap="square" lIns="0" tIns="0" rIns="0" bIns="0" rtlCol="0" anchor="t"/>
+          <a:lstStyle/>
+          <a:p>
+            <a:pPr algn="l" indent="0" marL="0">
+              <a:lnSpc>
+                <a:spcPts val="2706"/>
+              </a:lnSpc>
+              <a:spcAft>
+                <a:spcPts val="1600"/>
+              </a:spcAft>
+              <a:buNone/>
+            </a:pPr>
+            <a:r>
+              <a:rPr lang="en-US" sz="1866" dirty="0">
+                <a:solidFill>
+                  <a:srgbClr val="3D4350"/>
+                </a:solidFill>
+                <a:latin typeface="Inter" pitchFamily="34" charset="0"/>
+                <a:ea typeface="Inter" pitchFamily="34" charset="-122"/>
+                <a:cs typeface="Inter" pitchFamily="34" charset="-120"/>
+              </a:rPr>
+              <a:t>Point-in-time correct history, used to build training sets.</a:t>
+            </a:r>
+            <a:endParaRPr lang="en-US" sz="1866" dirty="0"/>
+          </a:p>
+        </p:txBody>
+      </p:sp>
+      <p:sp>
+        <p:nvSpPr>
+          <p:cNvPr id="17" name="Shape 15"/>
+          <p:cNvSpPr/>
+          <p:nvPr/>
+        </p:nvSpPr>
+        <p:spPr>
+          <a:xfrm>
+            <a:off x="4572047" y="4434284"/>
+            <a:ext cx="3044857" cy="0"/>
+          </a:xfrm>
+          <a:prstGeom prst="line">
+            <a:avLst/>
+          </a:prstGeom>
+          <a:noFill/>
+          <a:ln w="12698">
+            <a:solidFill>
+              <a:srgbClr val="C9CDD3"/>
+            </a:solidFill>
+            <a:prstDash val="solid"/>
+          </a:ln>
+        </p:spPr>
+      </p:sp>
+      <p:sp>
+        <p:nvSpPr>
+          <p:cNvPr id="18" name="Text 16"/>
+          <p:cNvSpPr/>
+          <p:nvPr/>
+        </p:nvSpPr>
+        <p:spPr>
+          <a:xfrm>
+            <a:off x="4572047" y="4626769"/>
+            <a:ext cx="3105754" cy="270073"/>
+          </a:xfrm>
+          <a:prstGeom prst="rect">
+            <a:avLst/>
+          </a:prstGeom>
+          <a:noFill/>
+          <a:ln/>
+        </p:spPr>
+        <p:txBody>
+          <a:bodyPr wrap="square" lIns="0" tIns="0" rIns="0" bIns="0" rtlCol="0" anchor="t"/>
+          <a:lstStyle/>
+          <a:p>
+            <a:pPr algn="l" indent="0" marL="0">
+              <a:lnSpc>
+                <a:spcPts val="2126"/>
+              </a:lnSpc>
+              <a:spcAft>
+                <a:spcPts val="667"/>
+              </a:spcAft>
+              <a:buNone/>
+            </a:pPr>
+            <a:r>
+              <a:rPr lang="en-US" sz="1466" dirty="0">
+                <a:solidFill>
+                  <a:srgbClr val="7A828F"/>
+                </a:solidFill>
+                <a:latin typeface="Inter" pitchFamily="34" charset="0"/>
+                <a:ea typeface="Inter" pitchFamily="34" charset="-122"/>
+                <a:cs typeface="Inter" pitchFamily="34" charset="-120"/>
+              </a:rPr>
+              <a:t>YOU NEED IT WHEN</a:t>
+            </a:r>
+            <a:endParaRPr lang="en-US" sz="1466" dirty="0"/>
+          </a:p>
+        </p:txBody>
+      </p:sp>
+      <p:sp>
+        <p:nvSpPr>
+          <p:cNvPr id="19" name="Text 17"/>
+          <p:cNvSpPr/>
+          <p:nvPr/>
+        </p:nvSpPr>
+        <p:spPr>
+          <a:xfrm>
+            <a:off x="4572047" y="4981377"/>
+            <a:ext cx="3105754" cy="687388"/>
+          </a:xfrm>
+          <a:prstGeom prst="rect">
+            <a:avLst/>
+          </a:prstGeom>
+          <a:noFill/>
+          <a:ln/>
+        </p:spPr>
+        <p:txBody>
+          <a:bodyPr wrap="square" lIns="0" tIns="0" rIns="0" bIns="0" rtlCol="0" anchor="t"/>
+          <a:lstStyle/>
+          <a:p>
+            <a:pPr algn="l" indent="0" marL="0">
+              <a:lnSpc>
+                <a:spcPts val="2706"/>
+              </a:lnSpc>
+              <a:buNone/>
+            </a:pPr>
+            <a:r>
+              <a:rPr lang="en-US" sz="1866" dirty="0">
+                <a:solidFill>
+                  <a:srgbClr val="1A1A1A"/>
+                </a:solidFill>
+                <a:latin typeface="Inter" pitchFamily="34" charset="0"/>
+                <a:ea typeface="Inter" pitchFamily="34" charset="-122"/>
+                <a:cs typeface="Inter" pitchFamily="34" charset="-120"/>
+              </a:rPr>
+              <a:t>You need it if backfills keep leaking future data.</a:t>
+            </a:r>
+            <a:endParaRPr lang="en-US" sz="1866" dirty="0"/>
+          </a:p>
+        </p:txBody>
+      </p:sp>
+      <p:sp>
+        <p:nvSpPr>
+          <p:cNvPr id="20" name="Text 18"/>
+          <p:cNvSpPr/>
+          <p:nvPr/>
+        </p:nvSpPr>
+        <p:spPr>
+          <a:xfrm>
+            <a:off x="8103352" y="1540669"/>
+            <a:ext cx="3544001" cy="4360862"/>
+          </a:xfrm>
+          <a:prstGeom prst="rect">
+            <a:avLst/>
+          </a:prstGeom>
+          <a:noFill/>
+          <a:ln w="12698">
+            <a:solidFill>
+              <a:srgbClr val="C9CDD3"/>
+            </a:solidFill>
+          </a:ln>
+        </p:spPr>
+        <p:txBody>
+          <a:bodyPr wrap="square" rtlCol="0" anchor="ctr"/>
+          <a:lstStyle/>
+          <a:p>
+            <a:pPr indent="0" marL="0">
+              <a:buNone/>
+            </a:pPr>
+            <a:endParaRPr lang="en-US" dirty="0"/>
+          </a:p>
+        </p:txBody>
+      </p:sp>
+      <p:sp>
+        <p:nvSpPr>
+          <p:cNvPr id="21" name="Text 19"/>
+          <p:cNvSpPr/>
+          <p:nvPr/>
+        </p:nvSpPr>
+        <p:spPr>
+          <a:xfrm>
+            <a:off x="8352924" y="1773436"/>
+            <a:ext cx="372374" cy="372467"/>
+          </a:xfrm>
+          <a:prstGeom prst="rect">
+            <a:avLst/>
+          </a:prstGeom>
+          <a:solidFill>
+            <a:srgbClr val="1F3A5F"/>
+          </a:solidFill>
+          <a:ln/>
+        </p:spPr>
+        <p:txBody>
+          <a:bodyPr wrap="square" rtlCol="0" anchor="ctr"/>
+          <a:lstStyle/>
+          <a:p>
+            <a:pPr indent="0" marL="0">
+              <a:buNone/>
+            </a:pPr>
+            <a:endParaRPr lang="en-US" dirty="0"/>
+          </a:p>
+        </p:txBody>
+      </p:sp>
+      <p:sp>
+        <p:nvSpPr>
+          <p:cNvPr id="22" name="Text 20"/>
+          <p:cNvSpPr/>
+          <p:nvPr/>
+        </p:nvSpPr>
+        <p:spPr>
+          <a:xfrm>
+            <a:off x="8405695" y="1817489"/>
+            <a:ext cx="271966" cy="284361"/>
+          </a:xfrm>
+          <a:prstGeom prst="rect">
+            <a:avLst/>
+          </a:prstGeom>
+          <a:noFill/>
+          <a:ln/>
+        </p:spPr>
+        <p:txBody>
+          <a:bodyPr wrap="square" lIns="0" tIns="0" rIns="0" bIns="0" rtlCol="0" anchor="t"/>
+          <a:lstStyle/>
+          <a:p>
+            <a:pPr algn="l" indent="0" marL="0">
+              <a:lnSpc>
+                <a:spcPts val="2240"/>
+              </a:lnSpc>
+              <a:buNone/>
+            </a:pPr>
+            <a:r>
+              <a:rPr lang="en-US" sz="1600" b="1" dirty="0">
+                <a:solidFill>
+                  <a:srgbClr val="FFFFFF"/>
+                </a:solidFill>
+                <a:latin typeface="Inter" pitchFamily="34" charset="0"/>
+                <a:ea typeface="Inter" pitchFamily="34" charset="-122"/>
+                <a:cs typeface="Inter" pitchFamily="34" charset="-120"/>
+              </a:rPr>
+              <a:t>03</a:t>
+            </a:r>
+            <a:endParaRPr lang="en-US" sz="1600" dirty="0"/>
+          </a:p>
+        </p:txBody>
+      </p:sp>
+      <p:sp>
+        <p:nvSpPr>
+          <p:cNvPr id="23" name="Text 21"/>
+          <p:cNvSpPr/>
+          <p:nvPr/>
+        </p:nvSpPr>
+        <p:spPr>
+          <a:xfrm>
+            <a:off x="8352924" y="2332038"/>
+            <a:ext cx="3105754" cy="352028"/>
+          </a:xfrm>
+          <a:prstGeom prst="rect">
+            <a:avLst/>
+          </a:prstGeom>
+          <a:noFill/>
+          <a:ln/>
+        </p:spPr>
+        <p:txBody>
+          <a:bodyPr wrap="square" lIns="0" tIns="0" rIns="0" bIns="0" rtlCol="0" anchor="t"/>
+          <a:lstStyle/>
+          <a:p>
+            <a:pPr algn="l" indent="0" marL="0">
+              <a:lnSpc>
+                <a:spcPts val="2773"/>
+              </a:lnSpc>
+              <a:spcAft>
+                <a:spcPts val="1067"/>
+              </a:spcAft>
+              <a:buNone/>
+            </a:pPr>
+            <a:r>
+              <a:rPr lang="en-US" sz="2133" b="1" dirty="0">
+                <a:solidFill>
+                  <a:srgbClr val="1A1A1A"/>
+                </a:solidFill>
+                <a:latin typeface="Inter" pitchFamily="34" charset="0"/>
+                <a:ea typeface="Inter" pitchFamily="34" charset="-122"/>
+                <a:cs typeface="Inter" pitchFamily="34" charset="-120"/>
+              </a:rPr>
+              <a:t>Online store</a:t>
+            </a:r>
+            <a:endParaRPr lang="en-US" sz="2133" dirty="0"/>
+          </a:p>
+        </p:txBody>
+      </p:sp>
+      <p:sp>
+        <p:nvSpPr>
+          <p:cNvPr id="24" name="Text 22"/>
+          <p:cNvSpPr/>
+          <p:nvPr/>
+        </p:nvSpPr>
+        <p:spPr>
+          <a:xfrm>
+            <a:off x="8352924" y="2819400"/>
+            <a:ext cx="3105754" cy="1031081"/>
+          </a:xfrm>
+          <a:prstGeom prst="rect">
+            <a:avLst/>
+          </a:prstGeom>
+          <a:noFill/>
+          <a:ln/>
+        </p:spPr>
+        <p:txBody>
+          <a:bodyPr wrap="square" lIns="0" tIns="0" rIns="0" bIns="0" rtlCol="0" anchor="t"/>
+          <a:lstStyle/>
+          <a:p>
+            <a:pPr algn="l" indent="0" marL="0">
+              <a:lnSpc>
+                <a:spcPts val="2706"/>
+              </a:lnSpc>
+              <a:spcAft>
+                <a:spcPts val="1600"/>
+              </a:spcAft>
+              <a:buNone/>
+            </a:pPr>
+            <a:r>
+              <a:rPr lang="en-US" sz="1866" dirty="0">
+                <a:solidFill>
+                  <a:srgbClr val="3D4350"/>
+                </a:solidFill>
+                <a:latin typeface="Inter" pitchFamily="34" charset="0"/>
+                <a:ea typeface="Inter" pitchFamily="34" charset="-122"/>
+                <a:cs typeface="Inter" pitchFamily="34" charset="-120"/>
+              </a:rPr>
+              <a:t>Low-latency reads of the same values at serving time.</a:t>
+            </a:r>
+            <a:endParaRPr lang="en-US" sz="1866" dirty="0"/>
+          </a:p>
+        </p:txBody>
+      </p:sp>
+      <p:sp>
+        <p:nvSpPr>
+          <p:cNvPr id="25" name="Shape 23"/>
+          <p:cNvSpPr/>
+          <p:nvPr/>
+        </p:nvSpPr>
+        <p:spPr>
+          <a:xfrm>
+            <a:off x="8352924" y="4434284"/>
+            <a:ext cx="3044857" cy="0"/>
+          </a:xfrm>
+          <a:prstGeom prst="line">
+            <a:avLst/>
+          </a:prstGeom>
+          <a:noFill/>
+          <a:ln w="12698">
+            <a:solidFill>
+              <a:srgbClr val="C9CDD3"/>
+            </a:solidFill>
+            <a:prstDash val="solid"/>
+          </a:ln>
+        </p:spPr>
+      </p:sp>
+      <p:sp>
+        <p:nvSpPr>
+          <p:cNvPr id="26" name="Text 24"/>
+          <p:cNvSpPr/>
+          <p:nvPr/>
+        </p:nvSpPr>
+        <p:spPr>
+          <a:xfrm>
+            <a:off x="8352924" y="4626769"/>
+            <a:ext cx="3105754" cy="270073"/>
+          </a:xfrm>
+          <a:prstGeom prst="rect">
+            <a:avLst/>
+          </a:prstGeom>
+          <a:noFill/>
+          <a:ln/>
+        </p:spPr>
+        <p:txBody>
+          <a:bodyPr wrap="square" lIns="0" tIns="0" rIns="0" bIns="0" rtlCol="0" anchor="t"/>
+          <a:lstStyle/>
+          <a:p>
+            <a:pPr algn="l" indent="0" marL="0">
+              <a:lnSpc>
+                <a:spcPts val="2126"/>
+              </a:lnSpc>
+              <a:spcAft>
+                <a:spcPts val="667"/>
+              </a:spcAft>
+              <a:buNone/>
+            </a:pPr>
+            <a:r>
+              <a:rPr lang="en-US" sz="1466" dirty="0">
+                <a:solidFill>
+                  <a:srgbClr val="7A828F"/>
+                </a:solidFill>
+                <a:latin typeface="Inter" pitchFamily="34" charset="0"/>
+                <a:ea typeface="Inter" pitchFamily="34" charset="-122"/>
+                <a:cs typeface="Inter" pitchFamily="34" charset="-120"/>
+              </a:rPr>
+              <a:t>YOU NEED IT WHEN</a:t>
+            </a:r>
+            <a:endParaRPr lang="en-US" sz="1466" dirty="0"/>
+          </a:p>
+        </p:txBody>
+      </p:sp>
+      <p:sp>
+        <p:nvSpPr>
+          <p:cNvPr id="27" name="Text 25"/>
+          <p:cNvSpPr/>
+          <p:nvPr/>
+        </p:nvSpPr>
+        <p:spPr>
+          <a:xfrm>
+            <a:off x="8352924" y="4981377"/>
+            <a:ext cx="3105754" cy="687388"/>
+          </a:xfrm>
+          <a:prstGeom prst="rect">
+            <a:avLst/>
+          </a:prstGeom>
+          <a:noFill/>
+          <a:ln/>
+        </p:spPr>
+        <p:txBody>
+          <a:bodyPr wrap="square" lIns="0" tIns="0" rIns="0" bIns="0" rtlCol="0" anchor="t"/>
+          <a:lstStyle/>
+          <a:p>
+            <a:pPr algn="l" indent="0" marL="0">
+              <a:lnSpc>
+                <a:spcPts val="2706"/>
+              </a:lnSpc>
+              <a:buNone/>
+            </a:pPr>
+            <a:r>
+              <a:rPr lang="en-US" sz="1866" dirty="0">
+                <a:solidFill>
+                  <a:srgbClr val="1A1A1A"/>
+                </a:solidFill>
+                <a:latin typeface="Inter" pitchFamily="34" charset="0"/>
+                <a:ea typeface="Inter" pitchFamily="34" charset="-122"/>
+                <a:cs typeface="Inter" pitchFamily="34" charset="-120"/>
+              </a:rPr>
+              <a:t>You need it only if models serve online requests.</a:t>
+            </a:r>
+            <a:endParaRPr lang="en-US" sz="1866" dirty="0"/>
+          </a:p>
+        </p:txBody>
+      </p:sp>
+      <p:sp>
+        <p:nvSpPr>
+          <p:cNvPr id="28" name="Text 26"/>
+          <p:cNvSpPr/>
+          <p:nvPr/>
+        </p:nvSpPr>
+        <p:spPr>
+          <a:xfrm>
+            <a:off x="319484" y="6104731"/>
+            <a:ext cx="11327869" cy="245269"/>
+          </a:xfrm>
+          <a:prstGeom prst="rect">
+            <a:avLst/>
+          </a:prstGeom>
+          <a:noFill/>
+          <a:ln/>
+        </p:spPr>
+        <p:txBody>
+          <a:bodyPr wrap="square" lIns="0" tIns="0" rIns="0" bIns="0" rtlCol="0" anchor="t"/>
+          <a:lstStyle/>
+          <a:p>
+            <a:pPr algn="r" indent="0" marL="0">
+              <a:lnSpc>
+                <a:spcPts val="1933"/>
+              </a:lnSpc>
+              <a:buNone/>
+            </a:pPr>
+            <a:r>
+              <a:rPr lang="en-US" sz="1333" dirty="0">
+                <a:solidFill>
+                  <a:srgbClr val="7A828F"/>
+                </a:solidFill>
+                <a:latin typeface="Inter" pitchFamily="34" charset="0"/>
+                <a:ea typeface="Inter" pitchFamily="34" charset="-122"/>
+                <a:cs typeface="Inter" pitchFamily="34" charset="-120"/>
+              </a:rPr>
+              <a:t>FEATURE STORE — ADOPTION REVIEW · SHEET 03/06 · FRAMEWORK ONLY, NO EXTERNAL DATA</a:t>
+            </a:r>
+            <a:endParaRPr lang="en-US" sz="1333" dirty="0"/>
+          </a:p>
+        </p:txBody>
+      </p:sp>
     </p:spTree>
   </p:cSld>
   <p:clrMapOvr>
@@ -1446,6 +3891,13 @@
 <file path=ppt/slides/slide4.xml><?xml version="1.0" encoding="utf-8"?>
 <p:sld xmlns:a="http://schemas.openxmlformats.org/drawingml/2006/main" xmlns:r="http://schemas.openxmlformats.org/officeDocument/2006/relationships" xmlns:p="http://schemas.openxmlformats.org/presentationml/2006/main">
   <p:cSld name="Slide 4">
+    <p:bg>
+      <p:bgPr>
+        <a:solidFill>
+          <a:srgbClr val="FFFFFF"/>
+        </a:solidFill>
+      </p:bgPr>
+    </p:bg>
     <p:spTree>
       <p:nvGrpSpPr>
         <p:cNvPr id="1" name=""/>
@@ -1460,30 +3912,835 @@
           <a:chExt cx="0" cy="0"/>
         </a:xfrm>
       </p:grpSpPr>
-      <p:pic>
-        <p:nvPicPr>
-          <p:cNvPr id="2" name="Image 0" descr="/tmp/slide-1787840589621-y7rhz6eg2e.png">    </p:cNvPr>
-          <p:cNvPicPr>
-            <a:picLocks noChangeAspect="1"/>
-          </p:cNvPicPr>
-          <p:nvPr/>
-        </p:nvPicPr>
-        <p:blipFill>
-          <a:blip r:embed="rId1"/>
-          <a:stretch>
-            <a:fillRect/>
-          </a:stretch>
-        </p:blipFill>
-        <p:spPr>
-          <a:xfrm>
-            <a:off x="0" y="0"/>
-            <a:ext cx="12188952" cy="6858000"/>
-          </a:xfrm>
-          <a:prstGeom prst="rect">
-            <a:avLst/>
-          </a:prstGeom>
-        </p:spPr>
-      </p:pic>
+      <p:sp>
+        <p:nvSpPr>
+          <p:cNvPr id="2" name="Text 0"/>
+          <p:cNvSpPr/>
+          <p:nvPr/>
+        </p:nvSpPr>
+        <p:spPr>
+          <a:xfrm>
+            <a:off x="541599" y="457200"/>
+            <a:ext cx="11327869" cy="440333"/>
+          </a:xfrm>
+          <a:prstGeom prst="rect">
+            <a:avLst/>
+          </a:prstGeom>
+          <a:noFill/>
+          <a:ln/>
+        </p:spPr>
+        <p:txBody>
+          <a:bodyPr wrap="square" lIns="0" tIns="0" rIns="0" bIns="0" rtlCol="0" anchor="t"/>
+          <a:lstStyle/>
+          <a:p>
+            <a:pPr algn="l" indent="0" marL="0">
+              <a:lnSpc>
+                <a:spcPts val="3466"/>
+              </a:lnSpc>
+              <a:buNone/>
+            </a:pPr>
+            <a:r>
+              <a:rPr lang="en-US" sz="2666" b="1" dirty="0">
+                <a:solidFill>
+                  <a:srgbClr val="1A1A1A"/>
+                </a:solidFill>
+                <a:latin typeface="Inter" pitchFamily="34" charset="0"/>
+                <a:ea typeface="Inter" pitchFamily="34" charset="-122"/>
+                <a:cs typeface="Inter" pitchFamily="34" charset="-120"/>
+              </a:rPr>
+              <a:t>Adoption depends on reuse and on whether serving is online</a:t>
+            </a:r>
+            <a:endParaRPr lang="en-US" sz="2666" dirty="0"/>
+          </a:p>
+        </p:txBody>
+      </p:sp>
+      <p:sp>
+        <p:nvSpPr>
+          <p:cNvPr id="3" name="Text 1"/>
+          <p:cNvSpPr/>
+          <p:nvPr/>
+        </p:nvSpPr>
+        <p:spPr>
+          <a:xfrm>
+            <a:off x="541599" y="999133"/>
+            <a:ext cx="11327869" cy="270073"/>
+          </a:xfrm>
+          <a:prstGeom prst="rect">
+            <a:avLst/>
+          </a:prstGeom>
+          <a:noFill/>
+          <a:ln/>
+        </p:spPr>
+        <p:txBody>
+          <a:bodyPr wrap="square" lIns="0" tIns="0" rIns="0" bIns="0" rtlCol="0" anchor="t"/>
+          <a:lstStyle/>
+          <a:p>
+            <a:pPr algn="l" indent="0" marL="0">
+              <a:lnSpc>
+                <a:spcPts val="2126"/>
+              </a:lnSpc>
+              <a:spcBef>
+                <a:spcPts val="800"/>
+              </a:spcBef>
+              <a:buNone/>
+            </a:pPr>
+            <a:r>
+              <a:rPr lang="en-US" sz="1466" dirty="0">
+                <a:solidFill>
+                  <a:srgbClr val="7A828F"/>
+                </a:solidFill>
+                <a:latin typeface="Inter" pitchFamily="34" charset="0"/>
+                <a:ea typeface="Inter" pitchFamily="34" charset="-122"/>
+                <a:cs typeface="Inter" pitchFamily="34" charset="-120"/>
+              </a:rPr>
+              <a:t>WHEN IT IS WORTH IT</a:t>
+            </a:r>
+            <a:endParaRPr lang="en-US" sz="1466" dirty="0"/>
+          </a:p>
+        </p:txBody>
+      </p:sp>
+      <p:sp>
+        <p:nvSpPr>
+          <p:cNvPr id="4" name="Text 2"/>
+          <p:cNvSpPr/>
+          <p:nvPr/>
+        </p:nvSpPr>
+        <p:spPr>
+          <a:xfrm>
+            <a:off x="541599" y="1540669"/>
+            <a:ext cx="3624797" cy="704056"/>
+          </a:xfrm>
+          <a:prstGeom prst="rect">
+            <a:avLst/>
+          </a:prstGeom>
+          <a:noFill/>
+          <a:ln/>
+        </p:spPr>
+        <p:txBody>
+          <a:bodyPr wrap="square" lIns="0" tIns="0" rIns="0" bIns="0" rtlCol="0" anchor="t"/>
+          <a:lstStyle/>
+          <a:p>
+            <a:pPr algn="l" indent="0" marL="0">
+              <a:lnSpc>
+                <a:spcPts val="2773"/>
+              </a:lnSpc>
+              <a:spcAft>
+                <a:spcPts val="1333"/>
+              </a:spcAft>
+              <a:buNone/>
+            </a:pPr>
+            <a:r>
+              <a:rPr lang="en-US" sz="2133" b="1" dirty="0">
+                <a:solidFill>
+                  <a:srgbClr val="1A1A1A"/>
+                </a:solidFill>
+                <a:latin typeface="Inter" pitchFamily="34" charset="0"/>
+                <a:ea typeface="Inter" pitchFamily="34" charset="-122"/>
+                <a:cs typeface="Inter" pitchFamily="34" charset="-120"/>
+              </a:rPr>
+              <a:t>Two conditions, and both must hold</a:t>
+            </a:r>
+            <a:endParaRPr lang="en-US" sz="2133" dirty="0"/>
+          </a:p>
+        </p:txBody>
+      </p:sp>
+      <p:sp>
+        <p:nvSpPr>
+          <p:cNvPr id="5" name="Text 3"/>
+          <p:cNvSpPr/>
+          <p:nvPr/>
+        </p:nvSpPr>
+        <p:spPr>
+          <a:xfrm>
+            <a:off x="541599" y="2413992"/>
+            <a:ext cx="3624797" cy="1031081"/>
+          </a:xfrm>
+          <a:prstGeom prst="rect">
+            <a:avLst/>
+          </a:prstGeom>
+          <a:noFill/>
+          <a:ln/>
+        </p:spPr>
+        <p:txBody>
+          <a:bodyPr wrap="square" lIns="0" tIns="0" rIns="0" bIns="0" rtlCol="0" anchor="t"/>
+          <a:lstStyle/>
+          <a:p>
+            <a:pPr algn="l" indent="0" marL="0">
+              <a:lnSpc>
+                <a:spcPts val="2706"/>
+              </a:lnSpc>
+              <a:buNone/>
+            </a:pPr>
+            <a:r>
+              <a:rPr lang="en-US" sz="1866" dirty="0">
+                <a:solidFill>
+                  <a:srgbClr val="3D4350"/>
+                </a:solidFill>
+                <a:latin typeface="Inter" pitchFamily="34" charset="0"/>
+                <a:ea typeface="Inter" pitchFamily="34" charset="-122"/>
+                <a:cs typeface="Inter" pitchFamily="34" charset="-120"/>
+              </a:rPr>
+              <a:t>Reuse alone is a registry problem. Online serving alone is a caching problem.</a:t>
+            </a:r>
+            <a:endParaRPr lang="en-US" sz="1866" dirty="0"/>
+          </a:p>
+        </p:txBody>
+      </p:sp>
+      <p:sp>
+        <p:nvSpPr>
+          <p:cNvPr id="6" name="Text 4"/>
+          <p:cNvSpPr/>
+          <p:nvPr/>
+        </p:nvSpPr>
+        <p:spPr>
+          <a:xfrm>
+            <a:off x="541599" y="3648273"/>
+            <a:ext cx="3624797" cy="687388"/>
+          </a:xfrm>
+          <a:prstGeom prst="rect">
+            <a:avLst/>
+          </a:prstGeom>
+          <a:noFill/>
+          <a:ln/>
+        </p:spPr>
+        <p:txBody>
+          <a:bodyPr wrap="square" lIns="0" tIns="0" rIns="0" bIns="0" rtlCol="0" anchor="t"/>
+          <a:lstStyle/>
+          <a:p>
+            <a:pPr algn="l" indent="0" marL="0">
+              <a:lnSpc>
+                <a:spcPts val="2706"/>
+              </a:lnSpc>
+              <a:spcBef>
+                <a:spcPts val="1600"/>
+              </a:spcBef>
+              <a:buNone/>
+            </a:pPr>
+            <a:r>
+              <a:rPr lang="en-US" sz="1866" dirty="0">
+                <a:solidFill>
+                  <a:srgbClr val="3D4350"/>
+                </a:solidFill>
+                <a:latin typeface="Inter" pitchFamily="34" charset="0"/>
+                <a:ea typeface="Inter" pitchFamily="34" charset="-122"/>
+                <a:cs typeface="Inter" pitchFamily="34" charset="-120"/>
+              </a:rPr>
+              <a:t>Only together do they justify running all three services.</a:t>
+            </a:r>
+            <a:endParaRPr lang="en-US" sz="1866" dirty="0"/>
+          </a:p>
+        </p:txBody>
+      </p:sp>
+      <p:sp>
+        <p:nvSpPr>
+          <p:cNvPr id="7" name="Text 5"/>
+          <p:cNvSpPr/>
+          <p:nvPr/>
+        </p:nvSpPr>
+        <p:spPr>
+          <a:xfrm>
+            <a:off x="4467695" y="1540669"/>
+            <a:ext cx="7323251" cy="270073"/>
+          </a:xfrm>
+          <a:prstGeom prst="rect">
+            <a:avLst/>
+          </a:prstGeom>
+          <a:noFill/>
+          <a:ln/>
+        </p:spPr>
+        <p:txBody>
+          <a:bodyPr wrap="square" lIns="0" tIns="0" rIns="0" bIns="0" rtlCol="0" anchor="t"/>
+          <a:lstStyle/>
+          <a:p>
+            <a:pPr algn="l" indent="0" marL="0">
+              <a:lnSpc>
+                <a:spcPts val="2126"/>
+              </a:lnSpc>
+              <a:spcAft>
+                <a:spcPts val="800"/>
+              </a:spcAft>
+              <a:buNone/>
+            </a:pPr>
+            <a:r>
+              <a:rPr lang="en-US" sz="1466" dirty="0">
+                <a:solidFill>
+                  <a:srgbClr val="7A828F"/>
+                </a:solidFill>
+                <a:latin typeface="Inter" pitchFamily="34" charset="0"/>
+                <a:ea typeface="Inter" pitchFamily="34" charset="-122"/>
+                <a:cs typeface="Inter" pitchFamily="34" charset="-120"/>
+              </a:rPr>
+              <a:t>↑ ONLINE SERVING NEED</a:t>
+            </a:r>
+            <a:endParaRPr lang="en-US" sz="1466" dirty="0"/>
+          </a:p>
+        </p:txBody>
+      </p:sp>
+      <p:sp>
+        <p:nvSpPr>
+          <p:cNvPr id="8" name="Text 6"/>
+          <p:cNvSpPr/>
+          <p:nvPr/>
+        </p:nvSpPr>
+        <p:spPr>
+          <a:xfrm>
+            <a:off x="4467695" y="1912342"/>
+            <a:ext cx="3505117" cy="1724025"/>
+          </a:xfrm>
+          <a:prstGeom prst="rect">
+            <a:avLst/>
+          </a:prstGeom>
+          <a:noFill/>
+          <a:ln w="12698">
+            <a:solidFill>
+              <a:srgbClr val="C9CDD3"/>
+            </a:solidFill>
+          </a:ln>
+        </p:spPr>
+        <p:txBody>
+          <a:bodyPr wrap="square" rtlCol="0" anchor="ctr"/>
+          <a:lstStyle/>
+          <a:p>
+            <a:pPr indent="0" marL="0">
+              <a:buNone/>
+            </a:pPr>
+            <a:endParaRPr lang="en-US" dirty="0"/>
+          </a:p>
+        </p:txBody>
+      </p:sp>
+      <p:sp>
+        <p:nvSpPr>
+          <p:cNvPr id="9" name="Text 7"/>
+          <p:cNvSpPr/>
+          <p:nvPr/>
+        </p:nvSpPr>
+        <p:spPr>
+          <a:xfrm>
+            <a:off x="4717267" y="2195314"/>
+            <a:ext cx="3066093" cy="352028"/>
+          </a:xfrm>
+          <a:prstGeom prst="rect">
+            <a:avLst/>
+          </a:prstGeom>
+          <a:noFill/>
+          <a:ln/>
+        </p:spPr>
+        <p:txBody>
+          <a:bodyPr wrap="square" lIns="0" tIns="0" rIns="0" bIns="0" rtlCol="0" anchor="t"/>
+          <a:lstStyle/>
+          <a:p>
+            <a:pPr algn="l" indent="0" marL="0">
+              <a:lnSpc>
+                <a:spcPts val="2773"/>
+              </a:lnSpc>
+              <a:spcAft>
+                <a:spcPts val="933"/>
+              </a:spcAft>
+              <a:buNone/>
+            </a:pPr>
+            <a:r>
+              <a:rPr lang="en-US" sz="2133" b="1" dirty="0">
+                <a:solidFill>
+                  <a:srgbClr val="1A1A1A"/>
+                </a:solidFill>
+                <a:latin typeface="Inter" pitchFamily="34" charset="0"/>
+                <a:ea typeface="Inter" pitchFamily="34" charset="-122"/>
+                <a:cs typeface="Inter" pitchFamily="34" charset="-120"/>
+              </a:rPr>
+              <a:t>Cache, not a platform</a:t>
+            </a:r>
+            <a:endParaRPr lang="en-US" sz="2133" dirty="0"/>
+          </a:p>
+        </p:txBody>
+      </p:sp>
+      <p:sp>
+        <p:nvSpPr>
+          <p:cNvPr id="10" name="Text 8"/>
+          <p:cNvSpPr/>
+          <p:nvPr/>
+        </p:nvSpPr>
+        <p:spPr>
+          <a:xfrm>
+            <a:off x="4717267" y="2665809"/>
+            <a:ext cx="3066093" cy="687388"/>
+          </a:xfrm>
+          <a:prstGeom prst="rect">
+            <a:avLst/>
+          </a:prstGeom>
+          <a:noFill/>
+          <a:ln/>
+        </p:spPr>
+        <p:txBody>
+          <a:bodyPr wrap="square" lIns="0" tIns="0" rIns="0" bIns="0" rtlCol="0" anchor="t"/>
+          <a:lstStyle/>
+          <a:p>
+            <a:pPr algn="l" indent="0" marL="0">
+              <a:lnSpc>
+                <a:spcPts val="2706"/>
+              </a:lnSpc>
+              <a:buNone/>
+            </a:pPr>
+            <a:r>
+              <a:rPr lang="en-US" sz="1866" dirty="0">
+                <a:solidFill>
+                  <a:srgbClr val="3D4350"/>
+                </a:solidFill>
+                <a:latin typeface="Inter" pitchFamily="34" charset="0"/>
+                <a:ea typeface="Inter" pitchFamily="34" charset="-122"/>
+                <a:cs typeface="Inter" pitchFamily="34" charset="-120"/>
+              </a:rPr>
+              <a:t>One model serving online does not need a store.</a:t>
+            </a:r>
+            <a:endParaRPr lang="en-US" sz="1866" dirty="0"/>
+          </a:p>
+        </p:txBody>
+      </p:sp>
+      <p:sp>
+        <p:nvSpPr>
+          <p:cNvPr id="11" name="Text 9"/>
+          <p:cNvSpPr/>
+          <p:nvPr/>
+        </p:nvSpPr>
+        <p:spPr>
+          <a:xfrm>
+            <a:off x="8142037" y="1912342"/>
+            <a:ext cx="3505316" cy="1724025"/>
+          </a:xfrm>
+          <a:prstGeom prst="rect">
+            <a:avLst/>
+          </a:prstGeom>
+          <a:solidFill>
+            <a:srgbClr val="1F3A5F"/>
+          </a:solidFill>
+          <a:ln w="12698">
+            <a:solidFill>
+              <a:srgbClr val="1F3A5F"/>
+            </a:solidFill>
+          </a:ln>
+        </p:spPr>
+        <p:txBody>
+          <a:bodyPr wrap="square" rtlCol="0" anchor="ctr"/>
+          <a:lstStyle/>
+          <a:p>
+            <a:pPr indent="0" marL="0">
+              <a:buNone/>
+            </a:pPr>
+            <a:endParaRPr lang="en-US" dirty="0"/>
+          </a:p>
+        </p:txBody>
+      </p:sp>
+      <p:sp>
+        <p:nvSpPr>
+          <p:cNvPr id="12" name="Text 10"/>
+          <p:cNvSpPr/>
+          <p:nvPr/>
+        </p:nvSpPr>
+        <p:spPr>
+          <a:xfrm>
+            <a:off x="8391609" y="2195314"/>
+            <a:ext cx="3066295" cy="352028"/>
+          </a:xfrm>
+          <a:prstGeom prst="rect">
+            <a:avLst/>
+          </a:prstGeom>
+          <a:noFill/>
+          <a:ln/>
+        </p:spPr>
+        <p:txBody>
+          <a:bodyPr wrap="square" lIns="0" tIns="0" rIns="0" bIns="0" rtlCol="0" anchor="t"/>
+          <a:lstStyle/>
+          <a:p>
+            <a:pPr algn="l" indent="0" marL="0">
+              <a:lnSpc>
+                <a:spcPts val="2773"/>
+              </a:lnSpc>
+              <a:spcAft>
+                <a:spcPts val="933"/>
+              </a:spcAft>
+              <a:buNone/>
+            </a:pPr>
+            <a:r>
+              <a:rPr lang="en-US" sz="2133" b="1" dirty="0">
+                <a:solidFill>
+                  <a:srgbClr val="FFFFFF"/>
+                </a:solidFill>
+                <a:latin typeface="Inter" pitchFamily="34" charset="0"/>
+                <a:ea typeface="Inter" pitchFamily="34" charset="-122"/>
+                <a:cs typeface="Inter" pitchFamily="34" charset="-120"/>
+              </a:rPr>
+              <a:t>Adopt all three</a:t>
+            </a:r>
+            <a:endParaRPr lang="en-US" sz="2133" dirty="0"/>
+          </a:p>
+        </p:txBody>
+      </p:sp>
+      <p:sp>
+        <p:nvSpPr>
+          <p:cNvPr id="13" name="Text 11"/>
+          <p:cNvSpPr/>
+          <p:nvPr/>
+        </p:nvSpPr>
+        <p:spPr>
+          <a:xfrm>
+            <a:off x="8391609" y="2665809"/>
+            <a:ext cx="3066295" cy="687388"/>
+          </a:xfrm>
+          <a:prstGeom prst="rect">
+            <a:avLst/>
+          </a:prstGeom>
+          <a:noFill/>
+          <a:ln/>
+        </p:spPr>
+        <p:txBody>
+          <a:bodyPr wrap="square" lIns="0" tIns="0" rIns="0" bIns="0" rtlCol="0" anchor="t"/>
+          <a:lstStyle/>
+          <a:p>
+            <a:pPr algn="l" indent="0" marL="0">
+              <a:lnSpc>
+                <a:spcPts val="2706"/>
+              </a:lnSpc>
+              <a:buNone/>
+            </a:pPr>
+            <a:r>
+              <a:rPr lang="en-US" sz="1866" dirty="0">
+                <a:solidFill>
+                  <a:srgbClr val="FFFFFF"/>
+                </a:solidFill>
+                <a:latin typeface="Inter" pitchFamily="34" charset="0"/>
+                <a:ea typeface="Inter" pitchFamily="34" charset="-122"/>
+                <a:cs typeface="Inter" pitchFamily="34" charset="-120"/>
+              </a:rPr>
+              <a:t>This is the case the thing was built for.</a:t>
+            </a:r>
+            <a:endParaRPr lang="en-US" sz="1866" dirty="0"/>
+          </a:p>
+        </p:txBody>
+      </p:sp>
+      <p:sp>
+        <p:nvSpPr>
+          <p:cNvPr id="14" name="Text 12"/>
+          <p:cNvSpPr/>
+          <p:nvPr/>
+        </p:nvSpPr>
+        <p:spPr>
+          <a:xfrm>
+            <a:off x="4467695" y="3805634"/>
+            <a:ext cx="3505117" cy="1724223"/>
+          </a:xfrm>
+          <a:prstGeom prst="rect">
+            <a:avLst/>
+          </a:prstGeom>
+          <a:noFill/>
+          <a:ln w="12698">
+            <a:solidFill>
+              <a:srgbClr val="C9CDD3"/>
+            </a:solidFill>
+          </a:ln>
+        </p:spPr>
+        <p:txBody>
+          <a:bodyPr wrap="square" rtlCol="0" anchor="ctr"/>
+          <a:lstStyle/>
+          <a:p>
+            <a:pPr indent="0" marL="0">
+              <a:buNone/>
+            </a:pPr>
+            <a:endParaRPr lang="en-US" dirty="0"/>
+          </a:p>
+        </p:txBody>
+      </p:sp>
+      <p:sp>
+        <p:nvSpPr>
+          <p:cNvPr id="15" name="Text 13"/>
+          <p:cNvSpPr/>
+          <p:nvPr/>
+        </p:nvSpPr>
+        <p:spPr>
+          <a:xfrm>
+            <a:off x="4717267" y="4088805"/>
+            <a:ext cx="3066093" cy="352028"/>
+          </a:xfrm>
+          <a:prstGeom prst="rect">
+            <a:avLst/>
+          </a:prstGeom>
+          <a:noFill/>
+          <a:ln/>
+        </p:spPr>
+        <p:txBody>
+          <a:bodyPr wrap="square" lIns="0" tIns="0" rIns="0" bIns="0" rtlCol="0" anchor="t"/>
+          <a:lstStyle/>
+          <a:p>
+            <a:pPr algn="l" indent="0" marL="0">
+              <a:lnSpc>
+                <a:spcPts val="2773"/>
+              </a:lnSpc>
+              <a:spcAft>
+                <a:spcPts val="933"/>
+              </a:spcAft>
+              <a:buNone/>
+            </a:pPr>
+            <a:r>
+              <a:rPr lang="en-US" sz="2133" b="1" dirty="0">
+                <a:solidFill>
+                  <a:srgbClr val="1A1A1A"/>
+                </a:solidFill>
+                <a:latin typeface="Inter" pitchFamily="34" charset="0"/>
+                <a:ea typeface="Inter" pitchFamily="34" charset="-122"/>
+                <a:cs typeface="Inter" pitchFamily="34" charset="-120"/>
+              </a:rPr>
+              <a:t>Do not adopt</a:t>
+            </a:r>
+            <a:endParaRPr lang="en-US" sz="2133" dirty="0"/>
+          </a:p>
+        </p:txBody>
+      </p:sp>
+      <p:sp>
+        <p:nvSpPr>
+          <p:cNvPr id="16" name="Text 14"/>
+          <p:cNvSpPr/>
+          <p:nvPr/>
+        </p:nvSpPr>
+        <p:spPr>
+          <a:xfrm>
+            <a:off x="4717267" y="4559300"/>
+            <a:ext cx="3066093" cy="687388"/>
+          </a:xfrm>
+          <a:prstGeom prst="rect">
+            <a:avLst/>
+          </a:prstGeom>
+          <a:noFill/>
+          <a:ln/>
+        </p:spPr>
+        <p:txBody>
+          <a:bodyPr wrap="square" lIns="0" tIns="0" rIns="0" bIns="0" rtlCol="0" anchor="t"/>
+          <a:lstStyle/>
+          <a:p>
+            <a:pPr algn="l" indent="0" marL="0">
+              <a:lnSpc>
+                <a:spcPts val="2706"/>
+              </a:lnSpc>
+              <a:buNone/>
+            </a:pPr>
+            <a:r>
+              <a:rPr lang="en-US" sz="1866" dirty="0">
+                <a:solidFill>
+                  <a:srgbClr val="3D4350"/>
+                </a:solidFill>
+                <a:latin typeface="Inter" pitchFamily="34" charset="0"/>
+                <a:ea typeface="Inter" pitchFamily="34" charset="-122"/>
+                <a:cs typeface="Inter" pitchFamily="34" charset="-120"/>
+              </a:rPr>
+              <a:t>A table and a scheduled job are enough.</a:t>
+            </a:r>
+            <a:endParaRPr lang="en-US" sz="1866" dirty="0"/>
+          </a:p>
+        </p:txBody>
+      </p:sp>
+      <p:sp>
+        <p:nvSpPr>
+          <p:cNvPr id="17" name="Text 15"/>
+          <p:cNvSpPr/>
+          <p:nvPr/>
+        </p:nvSpPr>
+        <p:spPr>
+          <a:xfrm>
+            <a:off x="8142037" y="3805634"/>
+            <a:ext cx="3505316" cy="1724223"/>
+          </a:xfrm>
+          <a:prstGeom prst="rect">
+            <a:avLst/>
+          </a:prstGeom>
+          <a:noFill/>
+          <a:ln w="12698">
+            <a:solidFill>
+              <a:srgbClr val="C9CDD3"/>
+            </a:solidFill>
+          </a:ln>
+        </p:spPr>
+        <p:txBody>
+          <a:bodyPr wrap="square" rtlCol="0" anchor="ctr"/>
+          <a:lstStyle/>
+          <a:p>
+            <a:pPr indent="0" marL="0">
+              <a:buNone/>
+            </a:pPr>
+            <a:endParaRPr lang="en-US" dirty="0"/>
+          </a:p>
+        </p:txBody>
+      </p:sp>
+      <p:sp>
+        <p:nvSpPr>
+          <p:cNvPr id="18" name="Text 16"/>
+          <p:cNvSpPr/>
+          <p:nvPr/>
+        </p:nvSpPr>
+        <p:spPr>
+          <a:xfrm>
+            <a:off x="8391609" y="3912791"/>
+            <a:ext cx="3066295" cy="704056"/>
+          </a:xfrm>
+          <a:prstGeom prst="rect">
+            <a:avLst/>
+          </a:prstGeom>
+          <a:noFill/>
+          <a:ln/>
+        </p:spPr>
+        <p:txBody>
+          <a:bodyPr wrap="square" lIns="0" tIns="0" rIns="0" bIns="0" rtlCol="0" anchor="t"/>
+          <a:lstStyle/>
+          <a:p>
+            <a:pPr algn="l" indent="0" marL="0">
+              <a:lnSpc>
+                <a:spcPts val="2773"/>
+              </a:lnSpc>
+              <a:spcAft>
+                <a:spcPts val="933"/>
+              </a:spcAft>
+              <a:buNone/>
+            </a:pPr>
+            <a:r>
+              <a:rPr lang="en-US" sz="2133" b="1" dirty="0">
+                <a:solidFill>
+                  <a:srgbClr val="1A1A1A"/>
+                </a:solidFill>
+                <a:latin typeface="Inter" pitchFamily="34" charset="0"/>
+                <a:ea typeface="Inter" pitchFamily="34" charset="-122"/>
+                <a:cs typeface="Inter" pitchFamily="34" charset="-120"/>
+              </a:rPr>
+              <a:t>Adopt the registry only</a:t>
+            </a:r>
+            <a:endParaRPr lang="en-US" sz="2133" dirty="0"/>
+          </a:p>
+        </p:txBody>
+      </p:sp>
+      <p:sp>
+        <p:nvSpPr>
+          <p:cNvPr id="19" name="Text 17"/>
+          <p:cNvSpPr/>
+          <p:nvPr/>
+        </p:nvSpPr>
+        <p:spPr>
+          <a:xfrm>
+            <a:off x="8391609" y="4735314"/>
+            <a:ext cx="3066295" cy="687388"/>
+          </a:xfrm>
+          <a:prstGeom prst="rect">
+            <a:avLst/>
+          </a:prstGeom>
+          <a:noFill/>
+          <a:ln/>
+        </p:spPr>
+        <p:txBody>
+          <a:bodyPr wrap="square" lIns="0" tIns="0" rIns="0" bIns="0" rtlCol="0" anchor="t"/>
+          <a:lstStyle/>
+          <a:p>
+            <a:pPr algn="l" indent="0" marL="0">
+              <a:lnSpc>
+                <a:spcPts val="2706"/>
+              </a:lnSpc>
+              <a:buNone/>
+            </a:pPr>
+            <a:r>
+              <a:rPr lang="en-US" sz="1866" dirty="0">
+                <a:solidFill>
+                  <a:srgbClr val="3D4350"/>
+                </a:solidFill>
+                <a:latin typeface="Inter" pitchFamily="34" charset="0"/>
+                <a:ea typeface="Inter" pitchFamily="34" charset="-122"/>
+                <a:cs typeface="Inter" pitchFamily="34" charset="-120"/>
+              </a:rPr>
+              <a:t>Shared definitions, without an online store.</a:t>
+            </a:r>
+            <a:endParaRPr lang="en-US" sz="1866" dirty="0"/>
+          </a:p>
+        </p:txBody>
+      </p:sp>
+      <p:sp>
+        <p:nvSpPr>
+          <p:cNvPr id="20" name="Text 18"/>
+          <p:cNvSpPr/>
+          <p:nvPr/>
+        </p:nvSpPr>
+        <p:spPr>
+          <a:xfrm>
+            <a:off x="4324102" y="5631458"/>
+            <a:ext cx="7323251" cy="270073"/>
+          </a:xfrm>
+          <a:prstGeom prst="rect">
+            <a:avLst/>
+          </a:prstGeom>
+          <a:noFill/>
+          <a:ln/>
+        </p:spPr>
+        <p:txBody>
+          <a:bodyPr wrap="square" lIns="0" tIns="0" rIns="0" bIns="0" rtlCol="0" anchor="t"/>
+          <a:lstStyle/>
+          <a:p>
+            <a:pPr algn="r" indent="0" marL="0">
+              <a:lnSpc>
+                <a:spcPts val="2126"/>
+              </a:lnSpc>
+              <a:spcBef>
+                <a:spcPts val="800"/>
+              </a:spcBef>
+              <a:buNone/>
+            </a:pPr>
+            <a:r>
+              <a:rPr lang="en-US" sz="1466" dirty="0">
+                <a:solidFill>
+                  <a:srgbClr val="7A828F"/>
+                </a:solidFill>
+                <a:latin typeface="Inter" pitchFamily="34" charset="0"/>
+                <a:ea typeface="Inter" pitchFamily="34" charset="-122"/>
+                <a:cs typeface="Inter" pitchFamily="34" charset="-120"/>
+              </a:rPr>
+              <a:t>FEATURE REUSE ACROSS TEAMS →</a:t>
+            </a:r>
+            <a:endParaRPr lang="en-US" sz="1466" dirty="0"/>
+          </a:p>
+        </p:txBody>
+      </p:sp>
+      <p:sp>
+        <p:nvSpPr>
+          <p:cNvPr id="21" name="Text 19"/>
+          <p:cNvSpPr/>
+          <p:nvPr/>
+        </p:nvSpPr>
+        <p:spPr>
+          <a:xfrm>
+            <a:off x="319484" y="6104731"/>
+            <a:ext cx="11327869" cy="245269"/>
+          </a:xfrm>
+          <a:prstGeom prst="rect">
+            <a:avLst/>
+          </a:prstGeom>
+          <a:noFill/>
+          <a:ln/>
+        </p:spPr>
+        <p:txBody>
+          <a:bodyPr wrap="square" lIns="0" tIns="0" rIns="0" bIns="0" rtlCol="0" anchor="t"/>
+          <a:lstStyle/>
+          <a:p>
+            <a:pPr algn="r" indent="0" marL="0">
+              <a:lnSpc>
+                <a:spcPts val="1933"/>
+              </a:lnSpc>
+              <a:buNone/>
+            </a:pPr>
+            <a:r>
+              <a:rPr lang="en-US" sz="1333" dirty="0">
+                <a:solidFill>
+                  <a:srgbClr val="7A828F"/>
+                </a:solidFill>
+                <a:latin typeface="Inter" pitchFamily="34" charset="0"/>
+                <a:ea typeface="Inter" pitchFamily="34" charset="-122"/>
+                <a:cs typeface="Inter" pitchFamily="34" charset="-120"/>
+              </a:rPr>
+              <a:t>FEATURE STORE — ADOPTION REVIEW · SHEET 04/06 · FRAMEWORK ONLY, NO EXTERNAL DATA</a:t>
+            </a:r>
+            <a:endParaRPr lang="en-US" sz="1333" dirty="0"/>
+          </a:p>
+        </p:txBody>
+      </p:sp>
     </p:spTree>
   </p:cSld>
   <p:clrMapOvr>
@@ -1495,6 +4752,13 @@
 <file path=ppt/slides/slide5.xml><?xml version="1.0" encoding="utf-8"?>
 <p:sld xmlns:a="http://schemas.openxmlformats.org/drawingml/2006/main" xmlns:r="http://schemas.openxmlformats.org/officeDocument/2006/relationships" xmlns:p="http://schemas.openxmlformats.org/presentationml/2006/main">
   <p:cSld name="Slide 5">
+    <p:bg>
+      <p:bgPr>
+        <a:solidFill>
+          <a:srgbClr val="FFFFFF"/>
+        </a:solidFill>
+      </p:bgPr>
+    </p:bg>
     <p:spTree>
       <p:nvGrpSpPr>
         <p:cNvPr id="1" name=""/>
@@ -1509,30 +4773,887 @@
           <a:chExt cx="0" cy="0"/>
         </a:xfrm>
       </p:grpSpPr>
-      <p:pic>
-        <p:nvPicPr>
-          <p:cNvPr id="2" name="Image 0" descr="/tmp/slide-1787840589927-emim4v1cx.png">    </p:cNvPr>
-          <p:cNvPicPr>
-            <a:picLocks noChangeAspect="1"/>
-          </p:cNvPicPr>
-          <p:nvPr/>
-        </p:nvPicPr>
-        <p:blipFill>
-          <a:blip r:embed="rId1"/>
-          <a:stretch>
-            <a:fillRect/>
-          </a:stretch>
-        </p:blipFill>
-        <p:spPr>
-          <a:xfrm>
-            <a:off x="0" y="0"/>
-            <a:ext cx="12188952" cy="6858000"/>
-          </a:xfrm>
-          <a:prstGeom prst="rect">
-            <a:avLst/>
-          </a:prstGeom>
-        </p:spPr>
-      </p:pic>
+      <p:sp>
+        <p:nvSpPr>
+          <p:cNvPr id="2" name="Text 0"/>
+          <p:cNvSpPr/>
+          <p:nvPr/>
+        </p:nvSpPr>
+        <p:spPr>
+          <a:xfrm>
+            <a:off x="541599" y="457200"/>
+            <a:ext cx="11327869" cy="440333"/>
+          </a:xfrm>
+          <a:prstGeom prst="rect">
+            <a:avLst/>
+          </a:prstGeom>
+          <a:noFill/>
+          <a:ln/>
+        </p:spPr>
+        <p:txBody>
+          <a:bodyPr wrap="square" lIns="0" tIns="0" rIns="0" bIns="0" rtlCol="0" anchor="t"/>
+          <a:lstStyle/>
+          <a:p>
+            <a:pPr algn="l" indent="0" marL="0">
+              <a:lnSpc>
+                <a:spcPts val="3466"/>
+              </a:lnSpc>
+              <a:buNone/>
+            </a:pPr>
+            <a:r>
+              <a:rPr lang="en-US" sz="2666" b="1" dirty="0">
+                <a:solidFill>
+                  <a:srgbClr val="1A1A1A"/>
+                </a:solidFill>
+                <a:latin typeface="Inter" pitchFamily="34" charset="0"/>
+                <a:ea typeface="Inter" pitchFamily="34" charset="-122"/>
+                <a:cs typeface="Inter" pitchFamily="34" charset="-120"/>
+              </a:rPr>
+              <a:t>The cost is a new critical dependency in the serving path</a:t>
+            </a:r>
+            <a:endParaRPr lang="en-US" sz="2666" dirty="0"/>
+          </a:p>
+        </p:txBody>
+      </p:sp>
+      <p:sp>
+        <p:nvSpPr>
+          <p:cNvPr id="3" name="Text 1"/>
+          <p:cNvSpPr/>
+          <p:nvPr/>
+        </p:nvSpPr>
+        <p:spPr>
+          <a:xfrm>
+            <a:off x="541599" y="999133"/>
+            <a:ext cx="11327869" cy="270073"/>
+          </a:xfrm>
+          <a:prstGeom prst="rect">
+            <a:avLst/>
+          </a:prstGeom>
+          <a:noFill/>
+          <a:ln/>
+        </p:spPr>
+        <p:txBody>
+          <a:bodyPr wrap="square" lIns="0" tIns="0" rIns="0" bIns="0" rtlCol="0" anchor="t"/>
+          <a:lstStyle/>
+          <a:p>
+            <a:pPr algn="l" indent="0" marL="0">
+              <a:lnSpc>
+                <a:spcPts val="2126"/>
+              </a:lnSpc>
+              <a:spcBef>
+                <a:spcPts val="800"/>
+              </a:spcBef>
+              <a:buNone/>
+            </a:pPr>
+            <a:r>
+              <a:rPr lang="en-US" sz="1466" dirty="0">
+                <a:solidFill>
+                  <a:srgbClr val="7A828F"/>
+                </a:solidFill>
+                <a:latin typeface="Inter" pitchFamily="34" charset="0"/>
+                <a:ea typeface="Inter" pitchFamily="34" charset="-122"/>
+                <a:cs typeface="Inter" pitchFamily="34" charset="-120"/>
+              </a:rPr>
+              <a:t>WHAT IT COSTS</a:t>
+            </a:r>
+            <a:endParaRPr lang="en-US" sz="1466" dirty="0"/>
+          </a:p>
+        </p:txBody>
+      </p:sp>
+      <p:sp>
+        <p:nvSpPr>
+          <p:cNvPr id="4" name="Text 2"/>
+          <p:cNvSpPr/>
+          <p:nvPr/>
+        </p:nvSpPr>
+        <p:spPr>
+          <a:xfrm>
+            <a:off x="541599" y="1540669"/>
+            <a:ext cx="5434439" cy="2061964"/>
+          </a:xfrm>
+          <a:prstGeom prst="rect">
+            <a:avLst/>
+          </a:prstGeom>
+          <a:noFill/>
+          <a:ln w="12698">
+            <a:solidFill>
+              <a:srgbClr val="C9CDD3"/>
+            </a:solidFill>
+          </a:ln>
+        </p:spPr>
+        <p:txBody>
+          <a:bodyPr wrap="square" rtlCol="0" anchor="ctr"/>
+          <a:lstStyle/>
+          <a:p>
+            <a:pPr indent="0" marL="0">
+              <a:buNone/>
+            </a:pPr>
+            <a:endParaRPr lang="en-US" dirty="0"/>
+          </a:p>
+        </p:txBody>
+      </p:sp>
+      <p:sp>
+        <p:nvSpPr>
+          <p:cNvPr id="5" name="Text 3"/>
+          <p:cNvSpPr/>
+          <p:nvPr/>
+        </p:nvSpPr>
+        <p:spPr>
+          <a:xfrm>
+            <a:off x="791171" y="1773436"/>
+            <a:ext cx="372374" cy="372467"/>
+          </a:xfrm>
+          <a:prstGeom prst="rect">
+            <a:avLst/>
+          </a:prstGeom>
+          <a:solidFill>
+            <a:srgbClr val="1F3A5F"/>
+          </a:solidFill>
+          <a:ln/>
+        </p:spPr>
+        <p:txBody>
+          <a:bodyPr wrap="square" rtlCol="0" anchor="ctr"/>
+          <a:lstStyle/>
+          <a:p>
+            <a:pPr indent="0" marL="0">
+              <a:buNone/>
+            </a:pPr>
+            <a:endParaRPr lang="en-US" dirty="0"/>
+          </a:p>
+        </p:txBody>
+      </p:sp>
+      <p:sp>
+        <p:nvSpPr>
+          <p:cNvPr id="6" name="Text 4"/>
+          <p:cNvSpPr/>
+          <p:nvPr/>
+        </p:nvSpPr>
+        <p:spPr>
+          <a:xfrm>
+            <a:off x="862987" y="1817489"/>
+            <a:ext cx="233114" cy="284361"/>
+          </a:xfrm>
+          <a:prstGeom prst="rect">
+            <a:avLst/>
+          </a:prstGeom>
+          <a:noFill/>
+          <a:ln/>
+        </p:spPr>
+        <p:txBody>
+          <a:bodyPr wrap="square" lIns="0" tIns="0" rIns="0" bIns="0" rtlCol="0" anchor="t"/>
+          <a:lstStyle/>
+          <a:p>
+            <a:pPr algn="l" indent="0" marL="0">
+              <a:lnSpc>
+                <a:spcPts val="2240"/>
+              </a:lnSpc>
+              <a:buNone/>
+            </a:pPr>
+            <a:r>
+              <a:rPr lang="en-US" sz="1600" b="1" dirty="0">
+                <a:solidFill>
+                  <a:srgbClr val="FFFFFF"/>
+                </a:solidFill>
+                <a:latin typeface="Inter" pitchFamily="34" charset="0"/>
+                <a:ea typeface="Inter" pitchFamily="34" charset="-122"/>
+                <a:cs typeface="Inter" pitchFamily="34" charset="-120"/>
+              </a:rPr>
+              <a:t>01</a:t>
+            </a:r>
+            <a:endParaRPr lang="en-US" sz="1600" dirty="0"/>
+          </a:p>
+        </p:txBody>
+      </p:sp>
+      <p:sp>
+        <p:nvSpPr>
+          <p:cNvPr id="7" name="Text 5"/>
+          <p:cNvSpPr/>
+          <p:nvPr/>
+        </p:nvSpPr>
+        <p:spPr>
+          <a:xfrm>
+            <a:off x="1349633" y="1783556"/>
+            <a:ext cx="4118342" cy="352028"/>
+          </a:xfrm>
+          <a:prstGeom prst="rect">
+            <a:avLst/>
+          </a:prstGeom>
+          <a:noFill/>
+          <a:ln/>
+        </p:spPr>
+        <p:txBody>
+          <a:bodyPr wrap="square" lIns="0" tIns="0" rIns="0" bIns="0" rtlCol="0" anchor="t"/>
+          <a:lstStyle/>
+          <a:p>
+            <a:pPr algn="l" indent="0" marL="0">
+              <a:lnSpc>
+                <a:spcPts val="2773"/>
+              </a:lnSpc>
+              <a:buNone/>
+            </a:pPr>
+            <a:r>
+              <a:rPr lang="en-US" sz="2133" b="1" dirty="0">
+                <a:solidFill>
+                  <a:srgbClr val="1A1A1A"/>
+                </a:solidFill>
+                <a:latin typeface="Inter" pitchFamily="34" charset="0"/>
+                <a:ea typeface="Inter" pitchFamily="34" charset="-122"/>
+                <a:cs typeface="Inter" pitchFamily="34" charset="-120"/>
+              </a:rPr>
+              <a:t>A latency budget you now own</a:t>
+            </a:r>
+            <a:endParaRPr lang="en-US" sz="2133" dirty="0"/>
+          </a:p>
+        </p:txBody>
+      </p:sp>
+      <p:sp>
+        <p:nvSpPr>
+          <p:cNvPr id="8" name="Text 6"/>
+          <p:cNvSpPr/>
+          <p:nvPr/>
+        </p:nvSpPr>
+        <p:spPr>
+          <a:xfrm>
+            <a:off x="791171" y="2298303"/>
+            <a:ext cx="5034001" cy="687388"/>
+          </a:xfrm>
+          <a:prstGeom prst="rect">
+            <a:avLst/>
+          </a:prstGeom>
+          <a:noFill/>
+          <a:ln/>
+        </p:spPr>
+        <p:txBody>
+          <a:bodyPr wrap="square" lIns="0" tIns="0" rIns="0" bIns="0" rtlCol="0" anchor="t"/>
+          <a:lstStyle/>
+          <a:p>
+            <a:pPr algn="l" indent="0" marL="0">
+              <a:lnSpc>
+                <a:spcPts val="2706"/>
+              </a:lnSpc>
+              <a:buNone/>
+            </a:pPr>
+            <a:r>
+              <a:rPr lang="en-US" sz="1866" dirty="0">
+                <a:solidFill>
+                  <a:srgbClr val="3D4350"/>
+                </a:solidFill>
+                <a:latin typeface="Inter" pitchFamily="34" charset="0"/>
+                <a:ea typeface="Inter" pitchFamily="34" charset="-122"/>
+                <a:cs typeface="Inter" pitchFamily="34" charset="-120"/>
+              </a:rPr>
+              <a:t>Every online read sits inside the request path.</a:t>
+            </a:r>
+            <a:endParaRPr lang="en-US" sz="1866" dirty="0"/>
+          </a:p>
+        </p:txBody>
+      </p:sp>
+      <p:sp>
+        <p:nvSpPr>
+          <p:cNvPr id="9" name="Text 7"/>
+          <p:cNvSpPr/>
+          <p:nvPr/>
+        </p:nvSpPr>
+        <p:spPr>
+          <a:xfrm>
+            <a:off x="6212914" y="1540669"/>
+            <a:ext cx="5434439" cy="2061964"/>
+          </a:xfrm>
+          <a:prstGeom prst="rect">
+            <a:avLst/>
+          </a:prstGeom>
+          <a:noFill/>
+          <a:ln w="12698">
+            <a:solidFill>
+              <a:srgbClr val="C9CDD3"/>
+            </a:solidFill>
+          </a:ln>
+        </p:spPr>
+        <p:txBody>
+          <a:bodyPr wrap="square" rtlCol="0" anchor="ctr"/>
+          <a:lstStyle/>
+          <a:p>
+            <a:pPr indent="0" marL="0">
+              <a:buNone/>
+            </a:pPr>
+            <a:endParaRPr lang="en-US" dirty="0"/>
+          </a:p>
+        </p:txBody>
+      </p:sp>
+      <p:sp>
+        <p:nvSpPr>
+          <p:cNvPr id="10" name="Text 8"/>
+          <p:cNvSpPr/>
+          <p:nvPr/>
+        </p:nvSpPr>
+        <p:spPr>
+          <a:xfrm>
+            <a:off x="6462486" y="1939131"/>
+            <a:ext cx="372374" cy="372467"/>
+          </a:xfrm>
+          <a:prstGeom prst="rect">
+            <a:avLst/>
+          </a:prstGeom>
+          <a:solidFill>
+            <a:srgbClr val="1F3A5F"/>
+          </a:solidFill>
+          <a:ln/>
+        </p:spPr>
+        <p:txBody>
+          <a:bodyPr wrap="square" rtlCol="0" anchor="ctr"/>
+          <a:lstStyle/>
+          <a:p>
+            <a:pPr indent="0" marL="0">
+              <a:buNone/>
+            </a:pPr>
+            <a:endParaRPr lang="en-US" dirty="0"/>
+          </a:p>
+        </p:txBody>
+      </p:sp>
+      <p:sp>
+        <p:nvSpPr>
+          <p:cNvPr id="11" name="Text 9"/>
+          <p:cNvSpPr/>
+          <p:nvPr/>
+        </p:nvSpPr>
+        <p:spPr>
+          <a:xfrm>
+            <a:off x="6515257" y="1983184"/>
+            <a:ext cx="271966" cy="284361"/>
+          </a:xfrm>
+          <a:prstGeom prst="rect">
+            <a:avLst/>
+          </a:prstGeom>
+          <a:noFill/>
+          <a:ln/>
+        </p:spPr>
+        <p:txBody>
+          <a:bodyPr wrap="square" lIns="0" tIns="0" rIns="0" bIns="0" rtlCol="0" anchor="t"/>
+          <a:lstStyle/>
+          <a:p>
+            <a:pPr algn="l" indent="0" marL="0">
+              <a:lnSpc>
+                <a:spcPts val="2240"/>
+              </a:lnSpc>
+              <a:buNone/>
+            </a:pPr>
+            <a:r>
+              <a:rPr lang="en-US" sz="1600" b="1" dirty="0">
+                <a:solidFill>
+                  <a:srgbClr val="FFFFFF"/>
+                </a:solidFill>
+                <a:latin typeface="Inter" pitchFamily="34" charset="0"/>
+                <a:ea typeface="Inter" pitchFamily="34" charset="-122"/>
+                <a:cs typeface="Inter" pitchFamily="34" charset="-120"/>
+              </a:rPr>
+              <a:t>02</a:t>
+            </a:r>
+            <a:endParaRPr lang="en-US" sz="1600" dirty="0"/>
+          </a:p>
+        </p:txBody>
+      </p:sp>
+      <p:sp>
+        <p:nvSpPr>
+          <p:cNvPr id="12" name="Text 10"/>
+          <p:cNvSpPr/>
+          <p:nvPr/>
+        </p:nvSpPr>
+        <p:spPr>
+          <a:xfrm>
+            <a:off x="7020947" y="1773436"/>
+            <a:ext cx="4464370" cy="704056"/>
+          </a:xfrm>
+          <a:prstGeom prst="rect">
+            <a:avLst/>
+          </a:prstGeom>
+          <a:noFill/>
+          <a:ln/>
+        </p:spPr>
+        <p:txBody>
+          <a:bodyPr wrap="square" lIns="0" tIns="0" rIns="0" bIns="0" rtlCol="0" anchor="t"/>
+          <a:lstStyle/>
+          <a:p>
+            <a:pPr algn="l" indent="0" marL="0">
+              <a:lnSpc>
+                <a:spcPts val="2773"/>
+              </a:lnSpc>
+              <a:buNone/>
+            </a:pPr>
+            <a:r>
+              <a:rPr lang="en-US" sz="2133" b="1" dirty="0">
+                <a:solidFill>
+                  <a:srgbClr val="1A1A1A"/>
+                </a:solidFill>
+                <a:latin typeface="Inter" pitchFamily="34" charset="0"/>
+                <a:ea typeface="Inter" pitchFamily="34" charset="-122"/>
+                <a:cs typeface="Inter" pitchFamily="34" charset="-120"/>
+              </a:rPr>
+              <a:t>A new page in the on-call rotation</a:t>
+            </a:r>
+            <a:endParaRPr lang="en-US" sz="2133" dirty="0"/>
+          </a:p>
+        </p:txBody>
+      </p:sp>
+      <p:sp>
+        <p:nvSpPr>
+          <p:cNvPr id="13" name="Text 11"/>
+          <p:cNvSpPr/>
+          <p:nvPr/>
+        </p:nvSpPr>
+        <p:spPr>
+          <a:xfrm>
+            <a:off x="6462486" y="2629892"/>
+            <a:ext cx="5034001" cy="343694"/>
+          </a:xfrm>
+          <a:prstGeom prst="rect">
+            <a:avLst/>
+          </a:prstGeom>
+          <a:noFill/>
+          <a:ln/>
+        </p:spPr>
+        <p:txBody>
+          <a:bodyPr wrap="square" lIns="0" tIns="0" rIns="0" bIns="0" rtlCol="0" anchor="t"/>
+          <a:lstStyle/>
+          <a:p>
+            <a:pPr algn="l" indent="0" marL="0">
+              <a:lnSpc>
+                <a:spcPts val="2706"/>
+              </a:lnSpc>
+              <a:buNone/>
+            </a:pPr>
+            <a:r>
+              <a:rPr lang="en-US" sz="1866" dirty="0">
+                <a:solidFill>
+                  <a:srgbClr val="3D4350"/>
+                </a:solidFill>
+                <a:latin typeface="Inter" pitchFamily="34" charset="0"/>
+                <a:ea typeface="Inter" pitchFamily="34" charset="-122"/>
+                <a:cs typeface="Inter" pitchFamily="34" charset="-120"/>
+              </a:rPr>
+              <a:t>The store failing means every model failing.</a:t>
+            </a:r>
+            <a:endParaRPr lang="en-US" sz="1866" dirty="0"/>
+          </a:p>
+        </p:txBody>
+      </p:sp>
+      <p:sp>
+        <p:nvSpPr>
+          <p:cNvPr id="14" name="Text 12"/>
+          <p:cNvSpPr/>
+          <p:nvPr/>
+        </p:nvSpPr>
+        <p:spPr>
+          <a:xfrm>
+            <a:off x="541599" y="3839567"/>
+            <a:ext cx="5434439" cy="2061964"/>
+          </a:xfrm>
+          <a:prstGeom prst="rect">
+            <a:avLst/>
+          </a:prstGeom>
+          <a:noFill/>
+          <a:ln w="12698">
+            <a:solidFill>
+              <a:srgbClr val="C9CDD3"/>
+            </a:solidFill>
+          </a:ln>
+        </p:spPr>
+        <p:txBody>
+          <a:bodyPr wrap="square" rtlCol="0" anchor="ctr"/>
+          <a:lstStyle/>
+          <a:p>
+            <a:pPr indent="0" marL="0">
+              <a:buNone/>
+            </a:pPr>
+            <a:endParaRPr lang="en-US" dirty="0"/>
+          </a:p>
+        </p:txBody>
+      </p:sp>
+      <p:sp>
+        <p:nvSpPr>
+          <p:cNvPr id="15" name="Text 13"/>
+          <p:cNvSpPr/>
+          <p:nvPr/>
+        </p:nvSpPr>
+        <p:spPr>
+          <a:xfrm>
+            <a:off x="791171" y="4072334"/>
+            <a:ext cx="372374" cy="372467"/>
+          </a:xfrm>
+          <a:prstGeom prst="rect">
+            <a:avLst/>
+          </a:prstGeom>
+          <a:solidFill>
+            <a:srgbClr val="1F3A5F"/>
+          </a:solidFill>
+          <a:ln/>
+        </p:spPr>
+        <p:txBody>
+          <a:bodyPr wrap="square" rtlCol="0" anchor="ctr"/>
+          <a:lstStyle/>
+          <a:p>
+            <a:pPr indent="0" marL="0">
+              <a:buNone/>
+            </a:pPr>
+            <a:endParaRPr lang="en-US" dirty="0"/>
+          </a:p>
+        </p:txBody>
+      </p:sp>
+      <p:sp>
+        <p:nvSpPr>
+          <p:cNvPr id="16" name="Text 14"/>
+          <p:cNvSpPr/>
+          <p:nvPr/>
+        </p:nvSpPr>
+        <p:spPr>
+          <a:xfrm>
+            <a:off x="843942" y="4116387"/>
+            <a:ext cx="271966" cy="284361"/>
+          </a:xfrm>
+          <a:prstGeom prst="rect">
+            <a:avLst/>
+          </a:prstGeom>
+          <a:noFill/>
+          <a:ln/>
+        </p:spPr>
+        <p:txBody>
+          <a:bodyPr wrap="square" lIns="0" tIns="0" rIns="0" bIns="0" rtlCol="0" anchor="t"/>
+          <a:lstStyle/>
+          <a:p>
+            <a:pPr algn="l" indent="0" marL="0">
+              <a:lnSpc>
+                <a:spcPts val="2240"/>
+              </a:lnSpc>
+              <a:buNone/>
+            </a:pPr>
+            <a:r>
+              <a:rPr lang="en-US" sz="1600" b="1" dirty="0">
+                <a:solidFill>
+                  <a:srgbClr val="FFFFFF"/>
+                </a:solidFill>
+                <a:latin typeface="Inter" pitchFamily="34" charset="0"/>
+                <a:ea typeface="Inter" pitchFamily="34" charset="-122"/>
+                <a:cs typeface="Inter" pitchFamily="34" charset="-120"/>
+              </a:rPr>
+              <a:t>03</a:t>
+            </a:r>
+            <a:endParaRPr lang="en-US" sz="1600" dirty="0"/>
+          </a:p>
+        </p:txBody>
+      </p:sp>
+      <p:sp>
+        <p:nvSpPr>
+          <p:cNvPr id="17" name="Text 15"/>
+          <p:cNvSpPr/>
+          <p:nvPr/>
+        </p:nvSpPr>
+        <p:spPr>
+          <a:xfrm>
+            <a:off x="1349633" y="4082455"/>
+            <a:ext cx="2654906" cy="352028"/>
+          </a:xfrm>
+          <a:prstGeom prst="rect">
+            <a:avLst/>
+          </a:prstGeom>
+          <a:noFill/>
+          <a:ln/>
+        </p:spPr>
+        <p:txBody>
+          <a:bodyPr wrap="square" lIns="0" tIns="0" rIns="0" bIns="0" rtlCol="0" anchor="t"/>
+          <a:lstStyle/>
+          <a:p>
+            <a:pPr algn="l" indent="0" marL="0">
+              <a:lnSpc>
+                <a:spcPts val="2773"/>
+              </a:lnSpc>
+              <a:buNone/>
+            </a:pPr>
+            <a:r>
+              <a:rPr lang="en-US" sz="2133" b="1" dirty="0">
+                <a:solidFill>
+                  <a:srgbClr val="1A1A1A"/>
+                </a:solidFill>
+                <a:latin typeface="Inter" pitchFamily="34" charset="0"/>
+                <a:ea typeface="Inter" pitchFamily="34" charset="-122"/>
+                <a:cs typeface="Inter" pitchFamily="34" charset="-120"/>
+              </a:rPr>
+              <a:t>Backfill correctness</a:t>
+            </a:r>
+            <a:endParaRPr lang="en-US" sz="2133" dirty="0"/>
+          </a:p>
+        </p:txBody>
+      </p:sp>
+      <p:sp>
+        <p:nvSpPr>
+          <p:cNvPr id="18" name="Text 16"/>
+          <p:cNvSpPr/>
+          <p:nvPr/>
+        </p:nvSpPr>
+        <p:spPr>
+          <a:xfrm>
+            <a:off x="791171" y="4597202"/>
+            <a:ext cx="5034001" cy="687388"/>
+          </a:xfrm>
+          <a:prstGeom prst="rect">
+            <a:avLst/>
+          </a:prstGeom>
+          <a:noFill/>
+          <a:ln/>
+        </p:spPr>
+        <p:txBody>
+          <a:bodyPr wrap="square" lIns="0" tIns="0" rIns="0" bIns="0" rtlCol="0" anchor="t"/>
+          <a:lstStyle/>
+          <a:p>
+            <a:pPr algn="l" indent="0" marL="0">
+              <a:lnSpc>
+                <a:spcPts val="2706"/>
+              </a:lnSpc>
+              <a:buNone/>
+            </a:pPr>
+            <a:r>
+              <a:rPr lang="en-US" sz="1866" dirty="0">
+                <a:solidFill>
+                  <a:srgbClr val="3D4350"/>
+                </a:solidFill>
+                <a:latin typeface="Inter" pitchFamily="34" charset="0"/>
+                <a:ea typeface="Inter" pitchFamily="34" charset="-122"/>
+                <a:cs typeface="Inter" pitchFamily="34" charset="-120"/>
+              </a:rPr>
+              <a:t>Point-in-time joins are easy to get subtly wrong.</a:t>
+            </a:r>
+            <a:endParaRPr lang="en-US" sz="1866" dirty="0"/>
+          </a:p>
+        </p:txBody>
+      </p:sp>
+      <p:sp>
+        <p:nvSpPr>
+          <p:cNvPr id="19" name="Text 17"/>
+          <p:cNvSpPr/>
+          <p:nvPr/>
+        </p:nvSpPr>
+        <p:spPr>
+          <a:xfrm>
+            <a:off x="6212914" y="3839567"/>
+            <a:ext cx="5434439" cy="2061964"/>
+          </a:xfrm>
+          <a:prstGeom prst="rect">
+            <a:avLst/>
+          </a:prstGeom>
+          <a:noFill/>
+          <a:ln w="12698">
+            <a:solidFill>
+              <a:srgbClr val="C9CDD3"/>
+            </a:solidFill>
+          </a:ln>
+        </p:spPr>
+        <p:txBody>
+          <a:bodyPr wrap="square" rtlCol="0" anchor="ctr"/>
+          <a:lstStyle/>
+          <a:p>
+            <a:pPr indent="0" marL="0">
+              <a:buNone/>
+            </a:pPr>
+            <a:endParaRPr lang="en-US" dirty="0"/>
+          </a:p>
+        </p:txBody>
+      </p:sp>
+      <p:sp>
+        <p:nvSpPr>
+          <p:cNvPr id="20" name="Text 18"/>
+          <p:cNvSpPr/>
+          <p:nvPr/>
+        </p:nvSpPr>
+        <p:spPr>
+          <a:xfrm>
+            <a:off x="6462486" y="4072334"/>
+            <a:ext cx="372374" cy="372467"/>
+          </a:xfrm>
+          <a:prstGeom prst="rect">
+            <a:avLst/>
+          </a:prstGeom>
+          <a:solidFill>
+            <a:srgbClr val="1F3A5F"/>
+          </a:solidFill>
+          <a:ln/>
+        </p:spPr>
+        <p:txBody>
+          <a:bodyPr wrap="square" rtlCol="0" anchor="ctr"/>
+          <a:lstStyle/>
+          <a:p>
+            <a:pPr indent="0" marL="0">
+              <a:buNone/>
+            </a:pPr>
+            <a:endParaRPr lang="en-US" dirty="0"/>
+          </a:p>
+        </p:txBody>
+      </p:sp>
+      <p:sp>
+        <p:nvSpPr>
+          <p:cNvPr id="21" name="Text 19"/>
+          <p:cNvSpPr/>
+          <p:nvPr/>
+        </p:nvSpPr>
+        <p:spPr>
+          <a:xfrm>
+            <a:off x="6508908" y="4116387"/>
+            <a:ext cx="284917" cy="284361"/>
+          </a:xfrm>
+          <a:prstGeom prst="rect">
+            <a:avLst/>
+          </a:prstGeom>
+          <a:noFill/>
+          <a:ln/>
+        </p:spPr>
+        <p:txBody>
+          <a:bodyPr wrap="square" lIns="0" tIns="0" rIns="0" bIns="0" rtlCol="0" anchor="t"/>
+          <a:lstStyle/>
+          <a:p>
+            <a:pPr algn="l" indent="0" marL="0">
+              <a:lnSpc>
+                <a:spcPts val="2240"/>
+              </a:lnSpc>
+              <a:buNone/>
+            </a:pPr>
+            <a:r>
+              <a:rPr lang="en-US" sz="1600" b="1" dirty="0">
+                <a:solidFill>
+                  <a:srgbClr val="FFFFFF"/>
+                </a:solidFill>
+                <a:latin typeface="Inter" pitchFamily="34" charset="0"/>
+                <a:ea typeface="Inter" pitchFamily="34" charset="-122"/>
+                <a:cs typeface="Inter" pitchFamily="34" charset="-120"/>
+              </a:rPr>
+              <a:t>04</a:t>
+            </a:r>
+            <a:endParaRPr lang="en-US" sz="1600" dirty="0"/>
+          </a:p>
+        </p:txBody>
+      </p:sp>
+      <p:sp>
+        <p:nvSpPr>
+          <p:cNvPr id="22" name="Text 20"/>
+          <p:cNvSpPr/>
+          <p:nvPr/>
+        </p:nvSpPr>
+        <p:spPr>
+          <a:xfrm>
+            <a:off x="7020947" y="4082455"/>
+            <a:ext cx="4286702" cy="352028"/>
+          </a:xfrm>
+          <a:prstGeom prst="rect">
+            <a:avLst/>
+          </a:prstGeom>
+          <a:noFill/>
+          <a:ln/>
+        </p:spPr>
+        <p:txBody>
+          <a:bodyPr wrap="square" lIns="0" tIns="0" rIns="0" bIns="0" rtlCol="0" anchor="t"/>
+          <a:lstStyle/>
+          <a:p>
+            <a:pPr algn="l" indent="0" marL="0">
+              <a:lnSpc>
+                <a:spcPts val="2773"/>
+              </a:lnSpc>
+              <a:buNone/>
+            </a:pPr>
+            <a:r>
+              <a:rPr lang="en-US" sz="2133" b="1" dirty="0">
+                <a:solidFill>
+                  <a:srgbClr val="1A1A1A"/>
+                </a:solidFill>
+                <a:latin typeface="Inter" pitchFamily="34" charset="0"/>
+                <a:ea typeface="Inter" pitchFamily="34" charset="-122"/>
+                <a:cs typeface="Inter" pitchFamily="34" charset="-120"/>
+              </a:rPr>
+              <a:t>Migration of what already exists</a:t>
+            </a:r>
+            <a:endParaRPr lang="en-US" sz="2133" dirty="0"/>
+          </a:p>
+        </p:txBody>
+      </p:sp>
+      <p:sp>
+        <p:nvSpPr>
+          <p:cNvPr id="23" name="Text 21"/>
+          <p:cNvSpPr/>
+          <p:nvPr/>
+        </p:nvSpPr>
+        <p:spPr>
+          <a:xfrm>
+            <a:off x="6462486" y="4597202"/>
+            <a:ext cx="5034001" cy="687388"/>
+          </a:xfrm>
+          <a:prstGeom prst="rect">
+            <a:avLst/>
+          </a:prstGeom>
+          <a:noFill/>
+          <a:ln/>
+        </p:spPr>
+        <p:txBody>
+          <a:bodyPr wrap="square" lIns="0" tIns="0" rIns="0" bIns="0" rtlCol="0" anchor="t"/>
+          <a:lstStyle/>
+          <a:p>
+            <a:pPr algn="l" indent="0" marL="0">
+              <a:lnSpc>
+                <a:spcPts val="2706"/>
+              </a:lnSpc>
+              <a:buNone/>
+            </a:pPr>
+            <a:r>
+              <a:rPr lang="en-US" sz="1866" dirty="0">
+                <a:solidFill>
+                  <a:srgbClr val="3D4350"/>
+                </a:solidFill>
+                <a:latin typeface="Inter" pitchFamily="34" charset="0"/>
+                <a:ea typeface="Inter" pitchFamily="34" charset="-122"/>
+                <a:cs typeface="Inter" pitchFamily="34" charset="-120"/>
+              </a:rPr>
+              <a:t>Existing features must move, or you run both.</a:t>
+            </a:r>
+            <a:endParaRPr lang="en-US" sz="1866" dirty="0"/>
+          </a:p>
+        </p:txBody>
+      </p:sp>
+      <p:sp>
+        <p:nvSpPr>
+          <p:cNvPr id="24" name="Text 22"/>
+          <p:cNvSpPr/>
+          <p:nvPr/>
+        </p:nvSpPr>
+        <p:spPr>
+          <a:xfrm>
+            <a:off x="319484" y="6104731"/>
+            <a:ext cx="11327869" cy="245269"/>
+          </a:xfrm>
+          <a:prstGeom prst="rect">
+            <a:avLst/>
+          </a:prstGeom>
+          <a:noFill/>
+          <a:ln/>
+        </p:spPr>
+        <p:txBody>
+          <a:bodyPr wrap="square" lIns="0" tIns="0" rIns="0" bIns="0" rtlCol="0" anchor="t"/>
+          <a:lstStyle/>
+          <a:p>
+            <a:pPr algn="r" indent="0" marL="0">
+              <a:lnSpc>
+                <a:spcPts val="1933"/>
+              </a:lnSpc>
+              <a:buNone/>
+            </a:pPr>
+            <a:r>
+              <a:rPr lang="en-US" sz="1333" dirty="0">
+                <a:solidFill>
+                  <a:srgbClr val="7A828F"/>
+                </a:solidFill>
+                <a:latin typeface="Inter" pitchFamily="34" charset="0"/>
+                <a:ea typeface="Inter" pitchFamily="34" charset="-122"/>
+                <a:cs typeface="Inter" pitchFamily="34" charset="-120"/>
+              </a:rPr>
+              <a:t>FEATURE STORE — ADOPTION REVIEW · SHEET 05/06 · FRAMEWORK ONLY, NO EXTERNAL DATA</a:t>
+            </a:r>
+            <a:endParaRPr lang="en-US" sz="1333" dirty="0"/>
+          </a:p>
+        </p:txBody>
+      </p:sp>
     </p:spTree>
   </p:cSld>
   <p:clrMapOvr>
@@ -1544,6 +5665,13 @@
 <file path=ppt/slides/slide6.xml><?xml version="1.0" encoding="utf-8"?>
 <p:sld xmlns:a="http://schemas.openxmlformats.org/drawingml/2006/main" xmlns:r="http://schemas.openxmlformats.org/officeDocument/2006/relationships" xmlns:p="http://schemas.openxmlformats.org/presentationml/2006/main">
   <p:cSld name="Slide 6">
+    <p:bg>
+      <p:bgPr>
+        <a:solidFill>
+          <a:srgbClr val="FFFFFF"/>
+        </a:solidFill>
+      </p:bgPr>
+    </p:bg>
     <p:spTree>
       <p:nvGrpSpPr>
         <p:cNvPr id="1" name=""/>
@@ -1558,30 +5686,702 @@
           <a:chExt cx="0" cy="0"/>
         </a:xfrm>
       </p:grpSpPr>
-      <p:pic>
-        <p:nvPicPr>
-          <p:cNvPr id="2" name="Image 0" descr="/tmp/slide-1787840590226-x5beskga0jb.png">    </p:cNvPr>
-          <p:cNvPicPr>
-            <a:picLocks noChangeAspect="1"/>
-          </p:cNvPicPr>
-          <p:nvPr/>
-        </p:nvPicPr>
-        <p:blipFill>
-          <a:blip r:embed="rId1"/>
-          <a:stretch>
-            <a:fillRect/>
-          </a:stretch>
-        </p:blipFill>
-        <p:spPr>
-          <a:xfrm>
-            <a:off x="0" y="0"/>
-            <a:ext cx="12188952" cy="6858000"/>
-          </a:xfrm>
-          <a:prstGeom prst="rect">
-            <a:avLst/>
-          </a:prstGeom>
-        </p:spPr>
-      </p:pic>
+      <p:sp>
+        <p:nvSpPr>
+          <p:cNvPr id="2" name="Text 0"/>
+          <p:cNvSpPr/>
+          <p:nvPr/>
+        </p:nvSpPr>
+        <p:spPr>
+          <a:xfrm>
+            <a:off x="541599" y="457200"/>
+            <a:ext cx="11327869" cy="440333"/>
+          </a:xfrm>
+          <a:prstGeom prst="rect">
+            <a:avLst/>
+          </a:prstGeom>
+          <a:noFill/>
+          <a:ln/>
+        </p:spPr>
+        <p:txBody>
+          <a:bodyPr wrap="square" lIns="0" tIns="0" rIns="0" bIns="0" rtlCol="0" anchor="t"/>
+          <a:lstStyle/>
+          <a:p>
+            <a:pPr algn="l" indent="0" marL="0">
+              <a:lnSpc>
+                <a:spcPts val="3466"/>
+              </a:lnSpc>
+              <a:buNone/>
+            </a:pPr>
+            <a:r>
+              <a:rPr lang="en-US" sz="2666" b="1" dirty="0">
+                <a:solidFill>
+                  <a:srgbClr val="1A1A1A"/>
+                </a:solidFill>
+                <a:latin typeface="Inter" pitchFamily="34" charset="0"/>
+                <a:ea typeface="Inter" pitchFamily="34" charset="-122"/>
+                <a:cs typeface="Inter" pitchFamily="34" charset="-120"/>
+              </a:rPr>
+              <a:t>What we need to decide before building or buying</a:t>
+            </a:r>
+            <a:endParaRPr lang="en-US" sz="2666" dirty="0"/>
+          </a:p>
+        </p:txBody>
+      </p:sp>
+      <p:sp>
+        <p:nvSpPr>
+          <p:cNvPr id="3" name="Text 1"/>
+          <p:cNvSpPr/>
+          <p:nvPr/>
+        </p:nvSpPr>
+        <p:spPr>
+          <a:xfrm>
+            <a:off x="541599" y="999133"/>
+            <a:ext cx="11327869" cy="270073"/>
+          </a:xfrm>
+          <a:prstGeom prst="rect">
+            <a:avLst/>
+          </a:prstGeom>
+          <a:noFill/>
+          <a:ln/>
+        </p:spPr>
+        <p:txBody>
+          <a:bodyPr wrap="square" lIns="0" tIns="0" rIns="0" bIns="0" rtlCol="0" anchor="t"/>
+          <a:lstStyle/>
+          <a:p>
+            <a:pPr algn="l" indent="0" marL="0">
+              <a:lnSpc>
+                <a:spcPts val="2126"/>
+              </a:lnSpc>
+              <a:spcBef>
+                <a:spcPts val="800"/>
+              </a:spcBef>
+              <a:buNone/>
+            </a:pPr>
+            <a:r>
+              <a:rPr lang="en-US" sz="1466" dirty="0">
+                <a:solidFill>
+                  <a:srgbClr val="7A828F"/>
+                </a:solidFill>
+                <a:latin typeface="Inter" pitchFamily="34" charset="0"/>
+                <a:ea typeface="Inter" pitchFamily="34" charset="-122"/>
+                <a:cs typeface="Inter" pitchFamily="34" charset="-120"/>
+              </a:rPr>
+              <a:t>DISCUSSION</a:t>
+            </a:r>
+            <a:endParaRPr lang="en-US" sz="1466" dirty="0"/>
+          </a:p>
+        </p:txBody>
+      </p:sp>
+      <p:sp>
+        <p:nvSpPr>
+          <p:cNvPr id="4" name="Text 2"/>
+          <p:cNvSpPr/>
+          <p:nvPr/>
+        </p:nvSpPr>
+        <p:spPr>
+          <a:xfrm>
+            <a:off x="541599" y="1540669"/>
+            <a:ext cx="11105754" cy="3801269"/>
+          </a:xfrm>
+          <a:prstGeom prst="rect">
+            <a:avLst/>
+          </a:prstGeom>
+          <a:noFill/>
+          <a:ln/>
+        </p:spPr>
+        <p:txBody>
+          <a:bodyPr wrap="square" lIns="0" tIns="0" rIns="0" bIns="0" rtlCol="0" anchor="t"/>
+          <a:lstStyle/>
+          <a:p>
+            <a:pPr algn="l" marL="342900" indent="-342900">
+              <a:buSzPct val="100000"/>
+              <a:buChar char="•"/>
+            </a:pPr>
+            <a:r>
+              <a:rPr lang="en-US" sz="1600" dirty="0">
+                <a:solidFill>
+                  <a:srgbClr val="FFFFFF"/>
+                </a:solidFill>
+                <a:latin typeface="Inter" pitchFamily="34" charset="0"/>
+                <a:ea typeface="Inter" pitchFamily="34" charset="-122"/>
+                <a:cs typeface="Inter" pitchFamily="34" charset="-120"/>
+              </a:rPr>
+              <a:t>01</a:t>
+            </a:r>
+            <a:pPr algn="l" indent="0" marL="0">
+              <a:buNone/>
+            </a:pPr>
+            <a:r>
+              <a:rPr lang="en-US" sz="1600" dirty="0">
+                <a:solidFill>
+                  <a:srgbClr val="1A1A1A"/>
+                </a:solidFill>
+                <a:latin typeface="Inter" pitchFamily="34" charset="0"/>
+                <a:ea typeface="Inter" pitchFamily="34" charset="-122"/>
+                <a:cs typeface="Inter" pitchFamily="34" charset="-120"/>
+              </a:rPr>
+              <a:t>How many teams share a feature definition today?</a:t>
+            </a:r>
+            <a:endParaRPr lang="en-US" sz="1600" dirty="0"/>
+          </a:p>
+          <a:p>
+            <a:pPr algn="l" marL="342900" indent="-342900">
+              <a:buSzPct val="100000"/>
+              <a:buChar char="•"/>
+            </a:pPr>
+            <a:r>
+              <a:rPr lang="en-US" sz="1600" dirty="0">
+                <a:solidFill>
+                  <a:srgbClr val="FFFFFF"/>
+                </a:solidFill>
+                <a:latin typeface="Inter" pitchFamily="34" charset="0"/>
+                <a:ea typeface="Inter" pitchFamily="34" charset="-122"/>
+                <a:cs typeface="Inter" pitchFamily="34" charset="-120"/>
+              </a:rPr>
+              <a:t>02</a:t>
+            </a:r>
+            <a:pPr algn="l" indent="0" marL="0">
+              <a:buNone/>
+            </a:pPr>
+            <a:r>
+              <a:rPr lang="en-US" sz="1600" dirty="0">
+                <a:solidFill>
+                  <a:srgbClr val="1A1A1A"/>
+                </a:solidFill>
+                <a:latin typeface="Inter" pitchFamily="34" charset="0"/>
+                <a:ea typeface="Inter" pitchFamily="34" charset="-122"/>
+                <a:cs typeface="Inter" pitchFamily="34" charset="-120"/>
+              </a:rPr>
+              <a:t>Do any of our models serve online requests?</a:t>
+            </a:r>
+            <a:endParaRPr lang="en-US" sz="1600" dirty="0"/>
+          </a:p>
+          <a:p>
+            <a:pPr algn="l" marL="342900" indent="-342900">
+              <a:buSzPct val="100000"/>
+              <a:buChar char="•"/>
+            </a:pPr>
+            <a:r>
+              <a:rPr lang="en-US" sz="1600" dirty="0">
+                <a:solidFill>
+                  <a:srgbClr val="FFFFFF"/>
+                </a:solidFill>
+                <a:latin typeface="Inter" pitchFamily="34" charset="0"/>
+                <a:ea typeface="Inter" pitchFamily="34" charset="-122"/>
+                <a:cs typeface="Inter" pitchFamily="34" charset="-120"/>
+              </a:rPr>
+              <a:t>03</a:t>
+            </a:r>
+            <a:pPr algn="l" indent="0" marL="0">
+              <a:buNone/>
+            </a:pPr>
+            <a:r>
+              <a:rPr lang="en-US" sz="1600" dirty="0">
+                <a:solidFill>
+                  <a:srgbClr val="1A1A1A"/>
+                </a:solidFill>
+                <a:latin typeface="Inter" pitchFamily="34" charset="0"/>
+                <a:ea typeface="Inter" pitchFamily="34" charset="-122"/>
+                <a:cs typeface="Inter" pitchFamily="34" charset="-120"/>
+              </a:rPr>
+              <a:t>Who would carry the page when the store is down?</a:t>
+            </a:r>
+            <a:endParaRPr lang="en-US" sz="1600" dirty="0"/>
+          </a:p>
+        </p:txBody>
+      </p:sp>
+      <p:sp>
+        <p:nvSpPr>
+          <p:cNvPr id="5" name="Text 3"/>
+          <p:cNvSpPr/>
+          <p:nvPr/>
+        </p:nvSpPr>
+        <p:spPr>
+          <a:xfrm>
+            <a:off x="541599" y="2316956"/>
+            <a:ext cx="372374" cy="372467"/>
+          </a:xfrm>
+          <a:prstGeom prst="rect">
+            <a:avLst/>
+          </a:prstGeom>
+          <a:solidFill>
+            <a:srgbClr val="1F3A5F"/>
+          </a:solidFill>
+          <a:ln/>
+        </p:spPr>
+        <p:txBody>
+          <a:bodyPr wrap="square" rtlCol="0" anchor="ctr"/>
+          <a:lstStyle/>
+          <a:p>
+            <a:pPr indent="0" marL="0">
+              <a:buNone/>
+            </a:pPr>
+            <a:endParaRPr lang="en-US" dirty="0"/>
+          </a:p>
+        </p:txBody>
+      </p:sp>
+      <p:sp>
+        <p:nvSpPr>
+          <p:cNvPr id="6" name="Text 4"/>
+          <p:cNvSpPr/>
+          <p:nvPr/>
+        </p:nvSpPr>
+        <p:spPr>
+          <a:xfrm>
+            <a:off x="613415" y="2361009"/>
+            <a:ext cx="233114" cy="284361"/>
+          </a:xfrm>
+          <a:prstGeom prst="rect">
+            <a:avLst/>
+          </a:prstGeom>
+          <a:noFill/>
+          <a:ln/>
+        </p:spPr>
+        <p:txBody>
+          <a:bodyPr wrap="square" lIns="0" tIns="0" rIns="0" bIns="0" rtlCol="0" anchor="t"/>
+          <a:lstStyle/>
+          <a:p>
+            <a:pPr algn="l" indent="0" marL="0">
+              <a:lnSpc>
+                <a:spcPts val="2240"/>
+              </a:lnSpc>
+              <a:buNone/>
+            </a:pPr>
+            <a:r>
+              <a:rPr lang="en-US" sz="1600" b="1" dirty="0">
+                <a:solidFill>
+                  <a:srgbClr val="FFFFFF"/>
+                </a:solidFill>
+                <a:latin typeface="Inter" pitchFamily="34" charset="0"/>
+                <a:ea typeface="Inter" pitchFamily="34" charset="-122"/>
+                <a:cs typeface="Inter" pitchFamily="34" charset="-120"/>
+              </a:rPr>
+              <a:t>01</a:t>
+            </a:r>
+            <a:endParaRPr lang="en-US" sz="1600" dirty="0"/>
+          </a:p>
+        </p:txBody>
+      </p:sp>
+      <p:sp>
+        <p:nvSpPr>
+          <p:cNvPr id="7" name="Text 5"/>
+          <p:cNvSpPr/>
+          <p:nvPr/>
+        </p:nvSpPr>
+        <p:spPr>
+          <a:xfrm>
+            <a:off x="1184772" y="2294533"/>
+            <a:ext cx="7097017" cy="417314"/>
+          </a:xfrm>
+          <a:prstGeom prst="rect">
+            <a:avLst/>
+          </a:prstGeom>
+          <a:noFill/>
+          <a:ln/>
+        </p:spPr>
+        <p:txBody>
+          <a:bodyPr wrap="square" lIns="0" tIns="0" rIns="0" bIns="0" rtlCol="0" anchor="t"/>
+          <a:lstStyle/>
+          <a:p>
+            <a:pPr algn="l" indent="0" marL="0">
+              <a:lnSpc>
+                <a:spcPts val="3286"/>
+              </a:lnSpc>
+              <a:buNone/>
+            </a:pPr>
+            <a:r>
+              <a:rPr lang="en-US" sz="2266" dirty="0">
+                <a:solidFill>
+                  <a:srgbClr val="1A1A1A"/>
+                </a:solidFill>
+                <a:latin typeface="Inter" pitchFamily="34" charset="0"/>
+                <a:ea typeface="Inter" pitchFamily="34" charset="-122"/>
+                <a:cs typeface="Inter" pitchFamily="34" charset="-120"/>
+              </a:rPr>
+              <a:t>How many teams share a feature definition today?</a:t>
+            </a:r>
+            <a:endParaRPr lang="en-US" sz="2266" dirty="0"/>
+          </a:p>
+        </p:txBody>
+      </p:sp>
+      <p:sp>
+        <p:nvSpPr>
+          <p:cNvPr id="8" name="Text 6"/>
+          <p:cNvSpPr/>
+          <p:nvPr/>
+        </p:nvSpPr>
+        <p:spPr>
+          <a:xfrm>
+            <a:off x="541599" y="3254970"/>
+            <a:ext cx="372374" cy="372467"/>
+          </a:xfrm>
+          <a:prstGeom prst="rect">
+            <a:avLst/>
+          </a:prstGeom>
+          <a:solidFill>
+            <a:srgbClr val="1F3A5F"/>
+          </a:solidFill>
+          <a:ln/>
+        </p:spPr>
+        <p:txBody>
+          <a:bodyPr wrap="square" rtlCol="0" anchor="ctr"/>
+          <a:lstStyle/>
+          <a:p>
+            <a:pPr indent="0" marL="0">
+              <a:buNone/>
+            </a:pPr>
+            <a:endParaRPr lang="en-US" dirty="0"/>
+          </a:p>
+        </p:txBody>
+      </p:sp>
+      <p:sp>
+        <p:nvSpPr>
+          <p:cNvPr id="9" name="Text 7"/>
+          <p:cNvSpPr/>
+          <p:nvPr/>
+        </p:nvSpPr>
+        <p:spPr>
+          <a:xfrm>
+            <a:off x="594370" y="3299023"/>
+            <a:ext cx="271966" cy="284361"/>
+          </a:xfrm>
+          <a:prstGeom prst="rect">
+            <a:avLst/>
+          </a:prstGeom>
+          <a:noFill/>
+          <a:ln/>
+        </p:spPr>
+        <p:txBody>
+          <a:bodyPr wrap="square" lIns="0" tIns="0" rIns="0" bIns="0" rtlCol="0" anchor="t"/>
+          <a:lstStyle/>
+          <a:p>
+            <a:pPr algn="l" indent="0" marL="0">
+              <a:lnSpc>
+                <a:spcPts val="2240"/>
+              </a:lnSpc>
+              <a:buNone/>
+            </a:pPr>
+            <a:r>
+              <a:rPr lang="en-US" sz="1600" b="1" dirty="0">
+                <a:solidFill>
+                  <a:srgbClr val="FFFFFF"/>
+                </a:solidFill>
+                <a:latin typeface="Inter" pitchFamily="34" charset="0"/>
+                <a:ea typeface="Inter" pitchFamily="34" charset="-122"/>
+                <a:cs typeface="Inter" pitchFamily="34" charset="-120"/>
+              </a:rPr>
+              <a:t>02</a:t>
+            </a:r>
+            <a:endParaRPr lang="en-US" sz="1600" dirty="0"/>
+          </a:p>
+        </p:txBody>
+      </p:sp>
+      <p:sp>
+        <p:nvSpPr>
+          <p:cNvPr id="10" name="Text 8"/>
+          <p:cNvSpPr/>
+          <p:nvPr/>
+        </p:nvSpPr>
+        <p:spPr>
+          <a:xfrm>
+            <a:off x="1184772" y="3232547"/>
+            <a:ext cx="6281119" cy="417314"/>
+          </a:xfrm>
+          <a:prstGeom prst="rect">
+            <a:avLst/>
+          </a:prstGeom>
+          <a:noFill/>
+          <a:ln/>
+        </p:spPr>
+        <p:txBody>
+          <a:bodyPr wrap="square" lIns="0" tIns="0" rIns="0" bIns="0" rtlCol="0" anchor="t"/>
+          <a:lstStyle/>
+          <a:p>
+            <a:pPr algn="l" indent="0" marL="0">
+              <a:lnSpc>
+                <a:spcPts val="3286"/>
+              </a:lnSpc>
+              <a:buNone/>
+            </a:pPr>
+            <a:r>
+              <a:rPr lang="en-US" sz="2266" dirty="0">
+                <a:solidFill>
+                  <a:srgbClr val="1A1A1A"/>
+                </a:solidFill>
+                <a:latin typeface="Inter" pitchFamily="34" charset="0"/>
+                <a:ea typeface="Inter" pitchFamily="34" charset="-122"/>
+                <a:cs typeface="Inter" pitchFamily="34" charset="-120"/>
+              </a:rPr>
+              <a:t>Do any of our models serve online requests?</a:t>
+            </a:r>
+            <a:endParaRPr lang="en-US" sz="2266" dirty="0"/>
+          </a:p>
+        </p:txBody>
+      </p:sp>
+      <p:sp>
+        <p:nvSpPr>
+          <p:cNvPr id="11" name="Text 9"/>
+          <p:cNvSpPr/>
+          <p:nvPr/>
+        </p:nvSpPr>
+        <p:spPr>
+          <a:xfrm>
+            <a:off x="541599" y="4192984"/>
+            <a:ext cx="372374" cy="372467"/>
+          </a:xfrm>
+          <a:prstGeom prst="rect">
+            <a:avLst/>
+          </a:prstGeom>
+          <a:solidFill>
+            <a:srgbClr val="1F3A5F"/>
+          </a:solidFill>
+          <a:ln/>
+        </p:spPr>
+        <p:txBody>
+          <a:bodyPr wrap="square" rtlCol="0" anchor="ctr"/>
+          <a:lstStyle/>
+          <a:p>
+            <a:pPr indent="0" marL="0">
+              <a:buNone/>
+            </a:pPr>
+            <a:endParaRPr lang="en-US" dirty="0"/>
+          </a:p>
+        </p:txBody>
+      </p:sp>
+      <p:sp>
+        <p:nvSpPr>
+          <p:cNvPr id="12" name="Text 10"/>
+          <p:cNvSpPr/>
+          <p:nvPr/>
+        </p:nvSpPr>
+        <p:spPr>
+          <a:xfrm>
+            <a:off x="594370" y="4237038"/>
+            <a:ext cx="271966" cy="284361"/>
+          </a:xfrm>
+          <a:prstGeom prst="rect">
+            <a:avLst/>
+          </a:prstGeom>
+          <a:noFill/>
+          <a:ln/>
+        </p:spPr>
+        <p:txBody>
+          <a:bodyPr wrap="square" lIns="0" tIns="0" rIns="0" bIns="0" rtlCol="0" anchor="t"/>
+          <a:lstStyle/>
+          <a:p>
+            <a:pPr algn="l" indent="0" marL="0">
+              <a:lnSpc>
+                <a:spcPts val="2240"/>
+              </a:lnSpc>
+              <a:buNone/>
+            </a:pPr>
+            <a:r>
+              <a:rPr lang="en-US" sz="1600" b="1" dirty="0">
+                <a:solidFill>
+                  <a:srgbClr val="FFFFFF"/>
+                </a:solidFill>
+                <a:latin typeface="Inter" pitchFamily="34" charset="0"/>
+                <a:ea typeface="Inter" pitchFamily="34" charset="-122"/>
+                <a:cs typeface="Inter" pitchFamily="34" charset="-120"/>
+              </a:rPr>
+              <a:t>03</a:t>
+            </a:r>
+            <a:endParaRPr lang="en-US" sz="1600" dirty="0"/>
+          </a:p>
+        </p:txBody>
+      </p:sp>
+      <p:sp>
+        <p:nvSpPr>
+          <p:cNvPr id="13" name="Text 11"/>
+          <p:cNvSpPr/>
+          <p:nvPr/>
+        </p:nvSpPr>
+        <p:spPr>
+          <a:xfrm>
+            <a:off x="1184772" y="4170561"/>
+            <a:ext cx="7252426" cy="417314"/>
+          </a:xfrm>
+          <a:prstGeom prst="rect">
+            <a:avLst/>
+          </a:prstGeom>
+          <a:noFill/>
+          <a:ln/>
+        </p:spPr>
+        <p:txBody>
+          <a:bodyPr wrap="square" lIns="0" tIns="0" rIns="0" bIns="0" rtlCol="0" anchor="t"/>
+          <a:lstStyle/>
+          <a:p>
+            <a:pPr algn="l" indent="0" marL="0">
+              <a:lnSpc>
+                <a:spcPts val="3286"/>
+              </a:lnSpc>
+              <a:buNone/>
+            </a:pPr>
+            <a:r>
+              <a:rPr lang="en-US" sz="2266" dirty="0">
+                <a:solidFill>
+                  <a:srgbClr val="1A1A1A"/>
+                </a:solidFill>
+                <a:latin typeface="Inter" pitchFamily="34" charset="0"/>
+                <a:ea typeface="Inter" pitchFamily="34" charset="-122"/>
+                <a:cs typeface="Inter" pitchFamily="34" charset="-120"/>
+              </a:rPr>
+              <a:t>Who would carry the page when the store is down?</a:t>
+            </a:r>
+            <a:endParaRPr lang="en-US" sz="2266" dirty="0"/>
+          </a:p>
+        </p:txBody>
+      </p:sp>
+      <p:sp>
+        <p:nvSpPr>
+          <p:cNvPr id="14" name="Shape 12"/>
+          <p:cNvSpPr/>
+          <p:nvPr/>
+        </p:nvSpPr>
+        <p:spPr>
+          <a:xfrm>
+            <a:off x="541599" y="5348288"/>
+            <a:ext cx="11105754" cy="0"/>
+          </a:xfrm>
+          <a:prstGeom prst="line">
+            <a:avLst/>
+          </a:prstGeom>
+          <a:noFill/>
+          <a:ln w="12698">
+            <a:solidFill>
+              <a:srgbClr val="C9CDD3"/>
+            </a:solidFill>
+            <a:prstDash val="solid"/>
+          </a:ln>
+        </p:spPr>
+      </p:sp>
+      <p:sp>
+        <p:nvSpPr>
+          <p:cNvPr id="15" name="Text 13"/>
+          <p:cNvSpPr/>
+          <p:nvPr/>
+        </p:nvSpPr>
+        <p:spPr>
+          <a:xfrm>
+            <a:off x="541599" y="5557838"/>
+            <a:ext cx="1217372" cy="343694"/>
+          </a:xfrm>
+          <a:prstGeom prst="rect">
+            <a:avLst/>
+          </a:prstGeom>
+          <a:noFill/>
+          <a:ln/>
+        </p:spPr>
+        <p:txBody>
+          <a:bodyPr wrap="square" lIns="0" tIns="0" rIns="0" bIns="0" rtlCol="0" anchor="t"/>
+          <a:lstStyle/>
+          <a:p>
+            <a:pPr algn="l" indent="0" marL="0">
+              <a:lnSpc>
+                <a:spcPts val="2706"/>
+              </a:lnSpc>
+              <a:buNone/>
+            </a:pPr>
+            <a:r>
+              <a:rPr lang="en-US" sz="1866" b="1" dirty="0">
+                <a:solidFill>
+                  <a:srgbClr val="1A1A1A"/>
+                </a:solidFill>
+                <a:latin typeface="Inter" pitchFamily="34" charset="0"/>
+                <a:ea typeface="Inter" pitchFamily="34" charset="-122"/>
+                <a:cs typeface="Inter" pitchFamily="34" charset="-120"/>
+              </a:rPr>
+              <a:t>Thank you</a:t>
+            </a:r>
+            <a:endParaRPr lang="en-US" sz="1866" dirty="0"/>
+          </a:p>
+        </p:txBody>
+      </p:sp>
+      <p:sp>
+        <p:nvSpPr>
+          <p:cNvPr id="16" name="Text 14"/>
+          <p:cNvSpPr/>
+          <p:nvPr/>
+        </p:nvSpPr>
+        <p:spPr>
+          <a:xfrm>
+            <a:off x="9690852" y="5621337"/>
+            <a:ext cx="1995631" cy="270073"/>
+          </a:xfrm>
+          <a:prstGeom prst="rect">
+            <a:avLst/>
+          </a:prstGeom>
+          <a:noFill/>
+          <a:ln/>
+        </p:spPr>
+        <p:txBody>
+          <a:bodyPr wrap="square" lIns="0" tIns="0" rIns="0" bIns="0" rtlCol="0" anchor="t"/>
+          <a:lstStyle/>
+          <a:p>
+            <a:pPr algn="l" indent="0" marL="0">
+              <a:lnSpc>
+                <a:spcPts val="2126"/>
+              </a:lnSpc>
+              <a:buNone/>
+            </a:pPr>
+            <a:r>
+              <a:rPr lang="en-US" sz="1466" dirty="0">
+                <a:solidFill>
+                  <a:srgbClr val="7A828F"/>
+                </a:solidFill>
+                <a:latin typeface="Inter" pitchFamily="34" charset="0"/>
+                <a:ea typeface="Inter" pitchFamily="34" charset="-122"/>
+                <a:cs typeface="Inter" pitchFamily="34" charset="-120"/>
+              </a:rPr>
+              <a:t>PRESENTER · TEAM</a:t>
+            </a:r>
+            <a:endParaRPr lang="en-US" sz="1466" dirty="0"/>
+          </a:p>
+        </p:txBody>
+      </p:sp>
+      <p:sp>
+        <p:nvSpPr>
+          <p:cNvPr id="17" name="Text 15"/>
+          <p:cNvSpPr/>
+          <p:nvPr/>
+        </p:nvSpPr>
+        <p:spPr>
+          <a:xfrm>
+            <a:off x="319484" y="6104731"/>
+            <a:ext cx="11327869" cy="245269"/>
+          </a:xfrm>
+          <a:prstGeom prst="rect">
+            <a:avLst/>
+          </a:prstGeom>
+          <a:noFill/>
+          <a:ln/>
+        </p:spPr>
+        <p:txBody>
+          <a:bodyPr wrap="square" lIns="0" tIns="0" rIns="0" bIns="0" rtlCol="0" anchor="t"/>
+          <a:lstStyle/>
+          <a:p>
+            <a:pPr algn="r" indent="0" marL="0">
+              <a:lnSpc>
+                <a:spcPts val="1933"/>
+              </a:lnSpc>
+              <a:buNone/>
+            </a:pPr>
+            <a:r>
+              <a:rPr lang="en-US" sz="1333" dirty="0">
+                <a:solidFill>
+                  <a:srgbClr val="7A828F"/>
+                </a:solidFill>
+                <a:latin typeface="Inter" pitchFamily="34" charset="0"/>
+                <a:ea typeface="Inter" pitchFamily="34" charset="-122"/>
+                <a:cs typeface="Inter" pitchFamily="34" charset="-120"/>
+              </a:rPr>
+              <a:t>FEATURE STORE — ADOPTION REVIEW · SHEET 06/06 · FRAMEWORK ONLY, NO EXTERNAL DATA</a:t>
+            </a:r>
+            <a:endParaRPr lang="en-US" sz="1333" dirty="0"/>
+          </a:p>
+        </p:txBody>
+      </p:sp>
     </p:spTree>
   </p:cSld>
   <p:clrMapOvr>

--- a/decks/feature-store/feature-store.pptx
+++ b/decks/feature-store/feature-store.pptx
@@ -1338,7 +1338,7 @@
           <a:ln/>
         </p:spPr>
         <p:txBody>
-          <a:bodyPr wrap="square" lIns="0" tIns="0" rIns="0" bIns="0" rtlCol="0" anchor="t"/>
+          <a:bodyPr wrap="none" lIns="0" tIns="0" rIns="0" bIns="0" rtlCol="0" anchor="t"/>
           <a:lstStyle/>
           <a:p>
             <a:pPr algn="l" indent="0" marL="0">
@@ -1380,7 +1380,7 @@
           <a:ln/>
         </p:spPr>
         <p:txBody>
-          <a:bodyPr wrap="square" lIns="0" tIns="0" rIns="0" bIns="0" rtlCol="0" anchor="t"/>
+          <a:bodyPr wrap="none" lIns="0" tIns="0" rIns="0" bIns="0" rtlCol="0" anchor="t"/>
           <a:lstStyle/>
           <a:p>
             <a:pPr algn="l" indent="0" marL="0">
@@ -1425,7 +1425,9 @@
           <a:ln/>
         </p:spPr>
         <p:txBody>
-          <a:bodyPr wrap="square" lIns="0" tIns="0" rIns="0" bIns="0" rtlCol="0" anchor="t"/>
+          <a:bodyPr wrap="square" lIns="0" tIns="0" rIns="0" bIns="0" rtlCol="0" anchor="t">
+            <a:normAutofit/>
+          </a:bodyPr>
           <a:lstStyle/>
           <a:p>
             <a:pPr algn="l" indent="0" marL="0">
@@ -1491,6 +1493,10 @@
             <a:prstDash val="solid"/>
           </a:ln>
         </p:spPr>
+        <p:txBody>
+          <a:bodyPr/>
+          <a:p/>
+        </p:txBody>
       </p:sp>
       <p:sp>
         <p:nvSpPr>
@@ -1510,7 +1516,7 @@
           <a:ln/>
         </p:spPr>
         <p:txBody>
-          <a:bodyPr wrap="square" lIns="0" tIns="0" rIns="0" bIns="0" rtlCol="0" anchor="t"/>
+          <a:bodyPr wrap="none" lIns="0" tIns="0" rIns="0" bIns="0" rtlCol="0" anchor="t"/>
           <a:lstStyle/>
           <a:p>
             <a:pPr algn="l" indent="0" marL="0">
@@ -1555,7 +1561,7 @@
           <a:ln/>
         </p:spPr>
         <p:txBody>
-          <a:bodyPr wrap="square" lIns="0" tIns="0" rIns="0" bIns="0" rtlCol="0" anchor="t"/>
+          <a:bodyPr wrap="none" lIns="0" tIns="0" rIns="0" bIns="0" rtlCol="0" anchor="t"/>
           <a:lstStyle/>
           <a:p>
             <a:pPr algn="l" indent="0" marL="0">
@@ -1597,7 +1603,7 @@
           <a:ln/>
         </p:spPr>
         <p:txBody>
-          <a:bodyPr wrap="square" lIns="0" tIns="0" rIns="0" bIns="0" rtlCol="0" anchor="t"/>
+          <a:bodyPr wrap="none" lIns="0" tIns="0" rIns="0" bIns="0" rtlCol="0" anchor="t"/>
           <a:lstStyle/>
           <a:p>
             <a:pPr algn="l" indent="0" marL="0">
@@ -1642,7 +1648,7 @@
           <a:ln/>
         </p:spPr>
         <p:txBody>
-          <a:bodyPr wrap="square" lIns="0" tIns="0" rIns="0" bIns="0" rtlCol="0" anchor="t"/>
+          <a:bodyPr wrap="none" lIns="0" tIns="0" rIns="0" bIns="0" rtlCol="0" anchor="t"/>
           <a:lstStyle/>
           <a:p>
             <a:pPr algn="l" indent="0" marL="0">
@@ -1684,7 +1690,7 @@
           <a:ln/>
         </p:spPr>
         <p:txBody>
-          <a:bodyPr wrap="square" lIns="0" tIns="0" rIns="0" bIns="0" rtlCol="0" anchor="t"/>
+          <a:bodyPr wrap="none" lIns="0" tIns="0" rIns="0" bIns="0" rtlCol="0" anchor="t"/>
           <a:lstStyle/>
           <a:p>
             <a:pPr algn="l" indent="0" marL="0">
@@ -1729,7 +1735,7 @@
           <a:ln/>
         </p:spPr>
         <p:txBody>
-          <a:bodyPr wrap="square" lIns="0" tIns="0" rIns="0" bIns="0" rtlCol="0" anchor="t"/>
+          <a:bodyPr wrap="none" lIns="0" tIns="0" rIns="0" bIns="0" rtlCol="0" anchor="t"/>
           <a:lstStyle/>
           <a:p>
             <a:pPr algn="l" indent="0" marL="0">
@@ -1771,7 +1777,7 @@
           <a:ln/>
         </p:spPr>
         <p:txBody>
-          <a:bodyPr wrap="square" lIns="0" tIns="0" rIns="0" bIns="0" rtlCol="0" anchor="t"/>
+          <a:bodyPr wrap="none" lIns="0" tIns="0" rIns="0" bIns="0" rtlCol="0" anchor="t"/>
           <a:lstStyle/>
           <a:p>
             <a:pPr algn="r" indent="0" marL="0">
@@ -1845,7 +1851,7 @@
           <a:ln/>
         </p:spPr>
         <p:txBody>
-          <a:bodyPr wrap="square" lIns="0" tIns="0" rIns="0" bIns="0" rtlCol="0" anchor="t"/>
+          <a:bodyPr wrap="none" lIns="0" tIns="0" rIns="0" bIns="0" rtlCol="0" anchor="t"/>
           <a:lstStyle/>
           <a:p>
             <a:pPr algn="l" indent="0" marL="0">
@@ -1887,7 +1893,7 @@
           <a:ln/>
         </p:spPr>
         <p:txBody>
-          <a:bodyPr wrap="square" lIns="0" tIns="0" rIns="0" bIns="0" rtlCol="0" anchor="t"/>
+          <a:bodyPr wrap="none" lIns="0" tIns="0" rIns="0" bIns="0" rtlCol="0" anchor="t"/>
           <a:lstStyle/>
           <a:p>
             <a:pPr algn="l" indent="0" marL="0">
@@ -1932,7 +1938,9 @@
           <a:ln/>
         </p:spPr>
         <p:txBody>
-          <a:bodyPr wrap="square" lIns="0" tIns="0" rIns="0" bIns="0" rtlCol="0" anchor="t"/>
+          <a:bodyPr wrap="square" lIns="0" tIns="0" rIns="0" bIns="0" rtlCol="0" anchor="t">
+            <a:normAutofit/>
+          </a:bodyPr>
           <a:lstStyle/>
           <a:p>
             <a:pPr algn="l" indent="0" marL="0">
@@ -1977,7 +1985,9 @@
           <a:ln/>
         </p:spPr>
         <p:txBody>
-          <a:bodyPr wrap="square" lIns="0" tIns="0" rIns="0" bIns="0" rtlCol="0" anchor="t"/>
+          <a:bodyPr wrap="square" lIns="0" tIns="0" rIns="0" bIns="0" rtlCol="0" anchor="t">
+            <a:normAutofit/>
+          </a:bodyPr>
           <a:lstStyle/>
           <a:p>
             <a:pPr algn="l" indent="0" marL="0">
@@ -2019,7 +2029,9 @@
           <a:ln/>
         </p:spPr>
         <p:txBody>
-          <a:bodyPr wrap="square" lIns="0" tIns="0" rIns="0" bIns="0" rtlCol="0" anchor="t"/>
+          <a:bodyPr wrap="square" lIns="0" tIns="0" rIns="0" bIns="0" rtlCol="0" anchor="t">
+            <a:normAutofit/>
+          </a:bodyPr>
           <a:lstStyle/>
           <a:p>
             <a:pPr algn="l" indent="0" marL="0">
@@ -2064,7 +2076,7 @@
           <a:ln/>
         </p:spPr>
         <p:txBody>
-          <a:bodyPr wrap="square" lIns="0" tIns="0" rIns="0" bIns="0" rtlCol="0" anchor="t"/>
+          <a:bodyPr wrap="none" lIns="0" tIns="0" rIns="0" bIns="0" rtlCol="0" anchor="t"/>
           <a:lstStyle/>
           <a:p>
             <a:pPr algn="l" indent="0" marL="0">
@@ -2141,7 +2153,7 @@
           <a:ln/>
         </p:spPr>
         <p:txBody>
-          <a:bodyPr wrap="square" lIns="0" tIns="0" rIns="0" bIns="0" rtlCol="0" anchor="t"/>
+          <a:bodyPr wrap="none" lIns="0" tIns="0" rIns="0" bIns="0" rtlCol="0" anchor="t"/>
           <a:lstStyle/>
           <a:p>
             <a:pPr algn="ctr" indent="0" marL="0">
@@ -2245,7 +2257,7 @@
           <a:ln/>
         </p:spPr>
         <p:txBody>
-          <a:bodyPr wrap="square" lIns="0" tIns="0" rIns="0" bIns="0" rtlCol="0" anchor="t"/>
+          <a:bodyPr wrap="none" lIns="0" tIns="0" rIns="0" bIns="0" rtlCol="0" anchor="t"/>
           <a:lstStyle/>
           <a:p>
             <a:pPr algn="ctr" indent="0" marL="0">
@@ -2349,7 +2361,7 @@
           <a:ln/>
         </p:spPr>
         <p:txBody>
-          <a:bodyPr wrap="square" lIns="0" tIns="0" rIns="0" bIns="0" rtlCol="0" anchor="t"/>
+          <a:bodyPr wrap="none" lIns="0" tIns="0" rIns="0" bIns="0" rtlCol="0" anchor="t"/>
           <a:lstStyle/>
           <a:p>
             <a:pPr algn="ctr" indent="0" marL="0">
@@ -2391,7 +2403,7 @@
           <a:ln/>
         </p:spPr>
         <p:txBody>
-          <a:bodyPr wrap="square" lIns="0" tIns="0" rIns="0" bIns="0" rtlCol="0" anchor="t"/>
+          <a:bodyPr wrap="none" lIns="0" tIns="0" rIns="0" bIns="0" rtlCol="0" anchor="t"/>
           <a:lstStyle/>
           <a:p>
             <a:pPr algn="l" indent="0" marL="0">
@@ -2468,7 +2480,7 @@
           <a:ln/>
         </p:spPr>
         <p:txBody>
-          <a:bodyPr wrap="square" lIns="0" tIns="0" rIns="0" bIns="0" rtlCol="0" anchor="t"/>
+          <a:bodyPr wrap="none" lIns="0" tIns="0" rIns="0" bIns="0" rtlCol="0" anchor="t"/>
           <a:lstStyle/>
           <a:p>
             <a:pPr algn="ctr" indent="0" marL="0">
@@ -2572,7 +2584,7 @@
           <a:ln/>
         </p:spPr>
         <p:txBody>
-          <a:bodyPr wrap="square" lIns="0" tIns="0" rIns="0" bIns="0" rtlCol="0" anchor="t"/>
+          <a:bodyPr wrap="none" lIns="0" tIns="0" rIns="0" bIns="0" rtlCol="0" anchor="t"/>
           <a:lstStyle/>
           <a:p>
             <a:pPr algn="ctr" indent="0" marL="0">
@@ -2676,7 +2688,7 @@
           <a:ln/>
         </p:spPr>
         <p:txBody>
-          <a:bodyPr wrap="square" lIns="0" tIns="0" rIns="0" bIns="0" rtlCol="0" anchor="t"/>
+          <a:bodyPr wrap="none" lIns="0" tIns="0" rIns="0" bIns="0" rtlCol="0" anchor="t"/>
           <a:lstStyle/>
           <a:p>
             <a:pPr algn="ctr" indent="0" marL="0">
@@ -2722,6 +2734,10 @@
             <a:prstDash val="solid"/>
           </a:ln>
         </p:spPr>
+        <p:txBody>
+          <a:bodyPr/>
+          <a:p/>
+        </p:txBody>
       </p:sp>
       <p:sp>
         <p:nvSpPr>
@@ -2741,7 +2757,9 @@
           <a:ln/>
         </p:spPr>
         <p:txBody>
-          <a:bodyPr wrap="square" lIns="0" tIns="0" rIns="0" bIns="0" rtlCol="0" anchor="t"/>
+          <a:bodyPr wrap="square" lIns="0" tIns="0" rIns="0" bIns="0" rtlCol="0" anchor="t">
+            <a:normAutofit/>
+          </a:bodyPr>
           <a:lstStyle/>
           <a:p>
             <a:pPr algn="l" indent="0" marL="0">
@@ -2783,7 +2801,7 @@
           <a:ln/>
         </p:spPr>
         <p:txBody>
-          <a:bodyPr wrap="square" lIns="0" tIns="0" rIns="0" bIns="0" rtlCol="0" anchor="t"/>
+          <a:bodyPr wrap="none" lIns="0" tIns="0" rIns="0" bIns="0" rtlCol="0" anchor="t"/>
           <a:lstStyle/>
           <a:p>
             <a:pPr algn="r" indent="0" marL="0">
@@ -2857,7 +2875,7 @@
           <a:ln/>
         </p:spPr>
         <p:txBody>
-          <a:bodyPr wrap="square" lIns="0" tIns="0" rIns="0" bIns="0" rtlCol="0" anchor="t"/>
+          <a:bodyPr wrap="none" lIns="0" tIns="0" rIns="0" bIns="0" rtlCol="0" anchor="t"/>
           <a:lstStyle/>
           <a:p>
             <a:pPr algn="l" indent="0" marL="0">
@@ -2899,7 +2917,7 @@
           <a:ln/>
         </p:spPr>
         <p:txBody>
-          <a:bodyPr wrap="square" lIns="0" tIns="0" rIns="0" bIns="0" rtlCol="0" anchor="t"/>
+          <a:bodyPr wrap="none" lIns="0" tIns="0" rIns="0" bIns="0" rtlCol="0" anchor="t"/>
           <a:lstStyle/>
           <a:p>
             <a:pPr algn="l" indent="0" marL="0">
@@ -3006,7 +3024,7 @@
           <a:ln/>
         </p:spPr>
         <p:txBody>
-          <a:bodyPr wrap="square" lIns="0" tIns="0" rIns="0" bIns="0" rtlCol="0" anchor="t"/>
+          <a:bodyPr wrap="none" lIns="0" tIns="0" rIns="0" bIns="0" rtlCol="0" anchor="t"/>
           <a:lstStyle/>
           <a:p>
             <a:pPr algn="l" indent="0" marL="0">
@@ -3048,7 +3066,7 @@
           <a:ln/>
         </p:spPr>
         <p:txBody>
-          <a:bodyPr wrap="square" lIns="0" tIns="0" rIns="0" bIns="0" rtlCol="0" anchor="t"/>
+          <a:bodyPr wrap="none" lIns="0" tIns="0" rIns="0" bIns="0" rtlCol="0" anchor="t"/>
           <a:lstStyle/>
           <a:p>
             <a:pPr algn="l" indent="0" marL="0">
@@ -3093,7 +3111,9 @@
           <a:ln/>
         </p:spPr>
         <p:txBody>
-          <a:bodyPr wrap="square" lIns="0" tIns="0" rIns="0" bIns="0" rtlCol="0" anchor="t"/>
+          <a:bodyPr wrap="square" lIns="0" tIns="0" rIns="0" bIns="0" rtlCol="0" anchor="t">
+            <a:normAutofit/>
+          </a:bodyPr>
           <a:lstStyle/>
           <a:p>
             <a:pPr algn="l" indent="0" marL="0">
@@ -3142,6 +3162,10 @@
             <a:prstDash val="solid"/>
           </a:ln>
         </p:spPr>
+        <p:txBody>
+          <a:bodyPr/>
+          <a:p/>
+        </p:txBody>
       </p:sp>
       <p:sp>
         <p:nvSpPr>
@@ -3161,7 +3185,7 @@
           <a:ln/>
         </p:spPr>
         <p:txBody>
-          <a:bodyPr wrap="square" lIns="0" tIns="0" rIns="0" bIns="0" rtlCol="0" anchor="t"/>
+          <a:bodyPr wrap="none" lIns="0" tIns="0" rIns="0" bIns="0" rtlCol="0" anchor="t"/>
           <a:lstStyle/>
           <a:p>
             <a:pPr algn="l" indent="0" marL="0">
@@ -3206,7 +3230,9 @@
           <a:ln/>
         </p:spPr>
         <p:txBody>
-          <a:bodyPr wrap="square" lIns="0" tIns="0" rIns="0" bIns="0" rtlCol="0" anchor="t"/>
+          <a:bodyPr wrap="square" lIns="0" tIns="0" rIns="0" bIns="0" rtlCol="0" anchor="t">
+            <a:normAutofit/>
+          </a:bodyPr>
           <a:lstStyle/>
           <a:p>
             <a:pPr algn="l" indent="0" marL="0">
@@ -3310,7 +3336,7 @@
           <a:ln/>
         </p:spPr>
         <p:txBody>
-          <a:bodyPr wrap="square" lIns="0" tIns="0" rIns="0" bIns="0" rtlCol="0" anchor="t"/>
+          <a:bodyPr wrap="none" lIns="0" tIns="0" rIns="0" bIns="0" rtlCol="0" anchor="t"/>
           <a:lstStyle/>
           <a:p>
             <a:pPr algn="l" indent="0" marL="0">
@@ -3352,7 +3378,7 @@
           <a:ln/>
         </p:spPr>
         <p:txBody>
-          <a:bodyPr wrap="square" lIns="0" tIns="0" rIns="0" bIns="0" rtlCol="0" anchor="t"/>
+          <a:bodyPr wrap="none" lIns="0" tIns="0" rIns="0" bIns="0" rtlCol="0" anchor="t"/>
           <a:lstStyle/>
           <a:p>
             <a:pPr algn="l" indent="0" marL="0">
@@ -3397,7 +3423,9 @@
           <a:ln/>
         </p:spPr>
         <p:txBody>
-          <a:bodyPr wrap="square" lIns="0" tIns="0" rIns="0" bIns="0" rtlCol="0" anchor="t"/>
+          <a:bodyPr wrap="square" lIns="0" tIns="0" rIns="0" bIns="0" rtlCol="0" anchor="t">
+            <a:normAutofit/>
+          </a:bodyPr>
           <a:lstStyle/>
           <a:p>
             <a:pPr algn="l" indent="0" marL="0">
@@ -3446,6 +3474,10 @@
             <a:prstDash val="solid"/>
           </a:ln>
         </p:spPr>
+        <p:txBody>
+          <a:bodyPr/>
+          <a:p/>
+        </p:txBody>
       </p:sp>
       <p:sp>
         <p:nvSpPr>
@@ -3465,7 +3497,7 @@
           <a:ln/>
         </p:spPr>
         <p:txBody>
-          <a:bodyPr wrap="square" lIns="0" tIns="0" rIns="0" bIns="0" rtlCol="0" anchor="t"/>
+          <a:bodyPr wrap="none" lIns="0" tIns="0" rIns="0" bIns="0" rtlCol="0" anchor="t"/>
           <a:lstStyle/>
           <a:p>
             <a:pPr algn="l" indent="0" marL="0">
@@ -3510,7 +3542,9 @@
           <a:ln/>
         </p:spPr>
         <p:txBody>
-          <a:bodyPr wrap="square" lIns="0" tIns="0" rIns="0" bIns="0" rtlCol="0" anchor="t"/>
+          <a:bodyPr wrap="square" lIns="0" tIns="0" rIns="0" bIns="0" rtlCol="0" anchor="t">
+            <a:normAutofit/>
+          </a:bodyPr>
           <a:lstStyle/>
           <a:p>
             <a:pPr algn="l" indent="0" marL="0">
@@ -3614,7 +3648,7 @@
           <a:ln/>
         </p:spPr>
         <p:txBody>
-          <a:bodyPr wrap="square" lIns="0" tIns="0" rIns="0" bIns="0" rtlCol="0" anchor="t"/>
+          <a:bodyPr wrap="none" lIns="0" tIns="0" rIns="0" bIns="0" rtlCol="0" anchor="t"/>
           <a:lstStyle/>
           <a:p>
             <a:pPr algn="l" indent="0" marL="0">
@@ -3656,7 +3690,7 @@
           <a:ln/>
         </p:spPr>
         <p:txBody>
-          <a:bodyPr wrap="square" lIns="0" tIns="0" rIns="0" bIns="0" rtlCol="0" anchor="t"/>
+          <a:bodyPr wrap="none" lIns="0" tIns="0" rIns="0" bIns="0" rtlCol="0" anchor="t"/>
           <a:lstStyle/>
           <a:p>
             <a:pPr algn="l" indent="0" marL="0">
@@ -3701,7 +3735,9 @@
           <a:ln/>
         </p:spPr>
         <p:txBody>
-          <a:bodyPr wrap="square" lIns="0" tIns="0" rIns="0" bIns="0" rtlCol="0" anchor="t"/>
+          <a:bodyPr wrap="square" lIns="0" tIns="0" rIns="0" bIns="0" rtlCol="0" anchor="t">
+            <a:normAutofit/>
+          </a:bodyPr>
           <a:lstStyle/>
           <a:p>
             <a:pPr algn="l" indent="0" marL="0">
@@ -3750,6 +3786,10 @@
             <a:prstDash val="solid"/>
           </a:ln>
         </p:spPr>
+        <p:txBody>
+          <a:bodyPr/>
+          <a:p/>
+        </p:txBody>
       </p:sp>
       <p:sp>
         <p:nvSpPr>
@@ -3769,7 +3809,7 @@
           <a:ln/>
         </p:spPr>
         <p:txBody>
-          <a:bodyPr wrap="square" lIns="0" tIns="0" rIns="0" bIns="0" rtlCol="0" anchor="t"/>
+          <a:bodyPr wrap="none" lIns="0" tIns="0" rIns="0" bIns="0" rtlCol="0" anchor="t"/>
           <a:lstStyle/>
           <a:p>
             <a:pPr algn="l" indent="0" marL="0">
@@ -3814,7 +3854,9 @@
           <a:ln/>
         </p:spPr>
         <p:txBody>
-          <a:bodyPr wrap="square" lIns="0" tIns="0" rIns="0" bIns="0" rtlCol="0" anchor="t"/>
+          <a:bodyPr wrap="square" lIns="0" tIns="0" rIns="0" bIns="0" rtlCol="0" anchor="t">
+            <a:normAutofit/>
+          </a:bodyPr>
           <a:lstStyle/>
           <a:p>
             <a:pPr algn="l" indent="0" marL="0">
@@ -3856,7 +3898,7 @@
           <a:ln/>
         </p:spPr>
         <p:txBody>
-          <a:bodyPr wrap="square" lIns="0" tIns="0" rIns="0" bIns="0" rtlCol="0" anchor="t"/>
+          <a:bodyPr wrap="none" lIns="0" tIns="0" rIns="0" bIns="0" rtlCol="0" anchor="t"/>
           <a:lstStyle/>
           <a:p>
             <a:pPr algn="r" indent="0" marL="0">
@@ -3930,7 +3972,7 @@
           <a:ln/>
         </p:spPr>
         <p:txBody>
-          <a:bodyPr wrap="square" lIns="0" tIns="0" rIns="0" bIns="0" rtlCol="0" anchor="t"/>
+          <a:bodyPr wrap="none" lIns="0" tIns="0" rIns="0" bIns="0" rtlCol="0" anchor="t"/>
           <a:lstStyle/>
           <a:p>
             <a:pPr algn="l" indent="0" marL="0">
@@ -3972,7 +4014,7 @@
           <a:ln/>
         </p:spPr>
         <p:txBody>
-          <a:bodyPr wrap="square" lIns="0" tIns="0" rIns="0" bIns="0" rtlCol="0" anchor="t"/>
+          <a:bodyPr wrap="none" lIns="0" tIns="0" rIns="0" bIns="0" rtlCol="0" anchor="t"/>
           <a:lstStyle/>
           <a:p>
             <a:pPr algn="l" indent="0" marL="0">
@@ -4017,7 +4059,9 @@
           <a:ln/>
         </p:spPr>
         <p:txBody>
-          <a:bodyPr wrap="square" lIns="0" tIns="0" rIns="0" bIns="0" rtlCol="0" anchor="t"/>
+          <a:bodyPr wrap="square" lIns="0" tIns="0" rIns="0" bIns="0" rtlCol="0" anchor="t">
+            <a:normAutofit/>
+          </a:bodyPr>
           <a:lstStyle/>
           <a:p>
             <a:pPr algn="l" indent="0" marL="0">
@@ -4062,7 +4106,9 @@
           <a:ln/>
         </p:spPr>
         <p:txBody>
-          <a:bodyPr wrap="square" lIns="0" tIns="0" rIns="0" bIns="0" rtlCol="0" anchor="t"/>
+          <a:bodyPr wrap="square" lIns="0" tIns="0" rIns="0" bIns="0" rtlCol="0" anchor="t">
+            <a:normAutofit/>
+          </a:bodyPr>
           <a:lstStyle/>
           <a:p>
             <a:pPr algn="l" indent="0" marL="0">
@@ -4104,7 +4150,9 @@
           <a:ln/>
         </p:spPr>
         <p:txBody>
-          <a:bodyPr wrap="square" lIns="0" tIns="0" rIns="0" bIns="0" rtlCol="0" anchor="t"/>
+          <a:bodyPr wrap="square" lIns="0" tIns="0" rIns="0" bIns="0" rtlCol="0" anchor="t">
+            <a:normAutofit/>
+          </a:bodyPr>
           <a:lstStyle/>
           <a:p>
             <a:pPr algn="l" indent="0" marL="0">
@@ -4149,7 +4197,7 @@
           <a:ln/>
         </p:spPr>
         <p:txBody>
-          <a:bodyPr wrap="square" lIns="0" tIns="0" rIns="0" bIns="0" rtlCol="0" anchor="t"/>
+          <a:bodyPr wrap="none" lIns="0" tIns="0" rIns="0" bIns="0" rtlCol="0" anchor="t"/>
           <a:lstStyle/>
           <a:p>
             <a:pPr algn="l" indent="0" marL="0">
@@ -4226,7 +4274,7 @@
           <a:ln/>
         </p:spPr>
         <p:txBody>
-          <a:bodyPr wrap="square" lIns="0" tIns="0" rIns="0" bIns="0" rtlCol="0" anchor="t"/>
+          <a:bodyPr wrap="none" lIns="0" tIns="0" rIns="0" bIns="0" rtlCol="0" anchor="t"/>
           <a:lstStyle/>
           <a:p>
             <a:pPr algn="l" indent="0" marL="0">
@@ -4271,7 +4319,9 @@
           <a:ln/>
         </p:spPr>
         <p:txBody>
-          <a:bodyPr wrap="square" lIns="0" tIns="0" rIns="0" bIns="0" rtlCol="0" anchor="t"/>
+          <a:bodyPr wrap="square" lIns="0" tIns="0" rIns="0" bIns="0" rtlCol="0" anchor="t">
+            <a:normAutofit/>
+          </a:bodyPr>
           <a:lstStyle/>
           <a:p>
             <a:pPr algn="l" indent="0" marL="0">
@@ -4347,7 +4397,7 @@
           <a:ln/>
         </p:spPr>
         <p:txBody>
-          <a:bodyPr wrap="square" lIns="0" tIns="0" rIns="0" bIns="0" rtlCol="0" anchor="t"/>
+          <a:bodyPr wrap="none" lIns="0" tIns="0" rIns="0" bIns="0" rtlCol="0" anchor="t"/>
           <a:lstStyle/>
           <a:p>
             <a:pPr algn="l" indent="0" marL="0">
@@ -4392,7 +4442,9 @@
           <a:ln/>
         </p:spPr>
         <p:txBody>
-          <a:bodyPr wrap="square" lIns="0" tIns="0" rIns="0" bIns="0" rtlCol="0" anchor="t"/>
+          <a:bodyPr wrap="square" lIns="0" tIns="0" rIns="0" bIns="0" rtlCol="0" anchor="t">
+            <a:normAutofit/>
+          </a:bodyPr>
           <a:lstStyle/>
           <a:p>
             <a:pPr algn="l" indent="0" marL="0">
@@ -4466,7 +4518,7 @@
           <a:ln/>
         </p:spPr>
         <p:txBody>
-          <a:bodyPr wrap="square" lIns="0" tIns="0" rIns="0" bIns="0" rtlCol="0" anchor="t"/>
+          <a:bodyPr wrap="none" lIns="0" tIns="0" rIns="0" bIns="0" rtlCol="0" anchor="t"/>
           <a:lstStyle/>
           <a:p>
             <a:pPr algn="l" indent="0" marL="0">
@@ -4511,7 +4563,9 @@
           <a:ln/>
         </p:spPr>
         <p:txBody>
-          <a:bodyPr wrap="square" lIns="0" tIns="0" rIns="0" bIns="0" rtlCol="0" anchor="t"/>
+          <a:bodyPr wrap="square" lIns="0" tIns="0" rIns="0" bIns="0" rtlCol="0" anchor="t">
+            <a:normAutofit/>
+          </a:bodyPr>
           <a:lstStyle/>
           <a:p>
             <a:pPr algn="l" indent="0" marL="0">
@@ -4630,7 +4684,9 @@
           <a:ln/>
         </p:spPr>
         <p:txBody>
-          <a:bodyPr wrap="square" lIns="0" tIns="0" rIns="0" bIns="0" rtlCol="0" anchor="t"/>
+          <a:bodyPr wrap="square" lIns="0" tIns="0" rIns="0" bIns="0" rtlCol="0" anchor="t">
+            <a:normAutofit/>
+          </a:bodyPr>
           <a:lstStyle/>
           <a:p>
             <a:pPr algn="l" indent="0" marL="0">
@@ -4672,7 +4728,7 @@
           <a:ln/>
         </p:spPr>
         <p:txBody>
-          <a:bodyPr wrap="square" lIns="0" tIns="0" rIns="0" bIns="0" rtlCol="0" anchor="t"/>
+          <a:bodyPr wrap="none" lIns="0" tIns="0" rIns="0" bIns="0" rtlCol="0" anchor="t"/>
           <a:lstStyle/>
           <a:p>
             <a:pPr algn="r" indent="0" marL="0">
@@ -4717,7 +4773,7 @@
           <a:ln/>
         </p:spPr>
         <p:txBody>
-          <a:bodyPr wrap="square" lIns="0" tIns="0" rIns="0" bIns="0" rtlCol="0" anchor="t"/>
+          <a:bodyPr wrap="none" lIns="0" tIns="0" rIns="0" bIns="0" rtlCol="0" anchor="t"/>
           <a:lstStyle/>
           <a:p>
             <a:pPr algn="r" indent="0" marL="0">
@@ -4791,7 +4847,7 @@
           <a:ln/>
         </p:spPr>
         <p:txBody>
-          <a:bodyPr wrap="square" lIns="0" tIns="0" rIns="0" bIns="0" rtlCol="0" anchor="t"/>
+          <a:bodyPr wrap="none" lIns="0" tIns="0" rIns="0" bIns="0" rtlCol="0" anchor="t"/>
           <a:lstStyle/>
           <a:p>
             <a:pPr algn="l" indent="0" marL="0">
@@ -4833,7 +4889,7 @@
           <a:ln/>
         </p:spPr>
         <p:txBody>
-          <a:bodyPr wrap="square" lIns="0" tIns="0" rIns="0" bIns="0" rtlCol="0" anchor="t"/>
+          <a:bodyPr wrap="none" lIns="0" tIns="0" rIns="0" bIns="0" rtlCol="0" anchor="t"/>
           <a:lstStyle/>
           <a:p>
             <a:pPr algn="l" indent="0" marL="0">
@@ -4940,7 +4996,7 @@
           <a:ln/>
         </p:spPr>
         <p:txBody>
-          <a:bodyPr wrap="square" lIns="0" tIns="0" rIns="0" bIns="0" rtlCol="0" anchor="t"/>
+          <a:bodyPr wrap="none" lIns="0" tIns="0" rIns="0" bIns="0" rtlCol="0" anchor="t"/>
           <a:lstStyle/>
           <a:p>
             <a:pPr algn="l" indent="0" marL="0">
@@ -4982,7 +5038,7 @@
           <a:ln/>
         </p:spPr>
         <p:txBody>
-          <a:bodyPr wrap="square" lIns="0" tIns="0" rIns="0" bIns="0" rtlCol="0" anchor="t"/>
+          <a:bodyPr wrap="none" lIns="0" tIns="0" rIns="0" bIns="0" rtlCol="0" anchor="t"/>
           <a:lstStyle/>
           <a:p>
             <a:pPr algn="l" indent="0" marL="0">
@@ -5024,7 +5080,9 @@
           <a:ln/>
         </p:spPr>
         <p:txBody>
-          <a:bodyPr wrap="square" lIns="0" tIns="0" rIns="0" bIns="0" rtlCol="0" anchor="t"/>
+          <a:bodyPr wrap="square" lIns="0" tIns="0" rIns="0" bIns="0" rtlCol="0" anchor="t">
+            <a:normAutofit/>
+          </a:bodyPr>
           <a:lstStyle/>
           <a:p>
             <a:pPr algn="l" indent="0" marL="0">
@@ -5128,7 +5186,7 @@
           <a:ln/>
         </p:spPr>
         <p:txBody>
-          <a:bodyPr wrap="square" lIns="0" tIns="0" rIns="0" bIns="0" rtlCol="0" anchor="t"/>
+          <a:bodyPr wrap="none" lIns="0" tIns="0" rIns="0" bIns="0" rtlCol="0" anchor="t"/>
           <a:lstStyle/>
           <a:p>
             <a:pPr algn="l" indent="0" marL="0">
@@ -5212,7 +5270,7 @@
           <a:ln/>
         </p:spPr>
         <p:txBody>
-          <a:bodyPr wrap="square" lIns="0" tIns="0" rIns="0" bIns="0" rtlCol="0" anchor="t"/>
+          <a:bodyPr wrap="none" lIns="0" tIns="0" rIns="0" bIns="0" rtlCol="0" anchor="t"/>
           <a:lstStyle/>
           <a:p>
             <a:pPr algn="l" indent="0" marL="0">
@@ -5316,7 +5374,7 @@
           <a:ln/>
         </p:spPr>
         <p:txBody>
-          <a:bodyPr wrap="square" lIns="0" tIns="0" rIns="0" bIns="0" rtlCol="0" anchor="t"/>
+          <a:bodyPr wrap="none" lIns="0" tIns="0" rIns="0" bIns="0" rtlCol="0" anchor="t"/>
           <a:lstStyle/>
           <a:p>
             <a:pPr algn="l" indent="0" marL="0">
@@ -5358,7 +5416,7 @@
           <a:ln/>
         </p:spPr>
         <p:txBody>
-          <a:bodyPr wrap="square" lIns="0" tIns="0" rIns="0" bIns="0" rtlCol="0" anchor="t"/>
+          <a:bodyPr wrap="none" lIns="0" tIns="0" rIns="0" bIns="0" rtlCol="0" anchor="t"/>
           <a:lstStyle/>
           <a:p>
             <a:pPr algn="l" indent="0" marL="0">
@@ -5400,7 +5458,9 @@
           <a:ln/>
         </p:spPr>
         <p:txBody>
-          <a:bodyPr wrap="square" lIns="0" tIns="0" rIns="0" bIns="0" rtlCol="0" anchor="t"/>
+          <a:bodyPr wrap="square" lIns="0" tIns="0" rIns="0" bIns="0" rtlCol="0" anchor="t">
+            <a:normAutofit/>
+          </a:bodyPr>
           <a:lstStyle/>
           <a:p>
             <a:pPr algn="l" indent="0" marL="0">
@@ -5504,7 +5564,7 @@
           <a:ln/>
         </p:spPr>
         <p:txBody>
-          <a:bodyPr wrap="square" lIns="0" tIns="0" rIns="0" bIns="0" rtlCol="0" anchor="t"/>
+          <a:bodyPr wrap="none" lIns="0" tIns="0" rIns="0" bIns="0" rtlCol="0" anchor="t"/>
           <a:lstStyle/>
           <a:p>
             <a:pPr algn="l" indent="0" marL="0">
@@ -5546,7 +5606,7 @@
           <a:ln/>
         </p:spPr>
         <p:txBody>
-          <a:bodyPr wrap="square" lIns="0" tIns="0" rIns="0" bIns="0" rtlCol="0" anchor="t"/>
+          <a:bodyPr wrap="none" lIns="0" tIns="0" rIns="0" bIns="0" rtlCol="0" anchor="t"/>
           <a:lstStyle/>
           <a:p>
             <a:pPr algn="l" indent="0" marL="0">
@@ -5588,7 +5648,9 @@
           <a:ln/>
         </p:spPr>
         <p:txBody>
-          <a:bodyPr wrap="square" lIns="0" tIns="0" rIns="0" bIns="0" rtlCol="0" anchor="t"/>
+          <a:bodyPr wrap="square" lIns="0" tIns="0" rIns="0" bIns="0" rtlCol="0" anchor="t">
+            <a:normAutofit/>
+          </a:bodyPr>
           <a:lstStyle/>
           <a:p>
             <a:pPr algn="l" indent="0" marL="0">
@@ -5630,7 +5692,7 @@
           <a:ln/>
         </p:spPr>
         <p:txBody>
-          <a:bodyPr wrap="square" lIns="0" tIns="0" rIns="0" bIns="0" rtlCol="0" anchor="t"/>
+          <a:bodyPr wrap="none" lIns="0" tIns="0" rIns="0" bIns="0" rtlCol="0" anchor="t"/>
           <a:lstStyle/>
           <a:p>
             <a:pPr algn="r" indent="0" marL="0">
@@ -5704,7 +5766,7 @@
           <a:ln/>
         </p:spPr>
         <p:txBody>
-          <a:bodyPr wrap="square" lIns="0" tIns="0" rIns="0" bIns="0" rtlCol="0" anchor="t"/>
+          <a:bodyPr wrap="none" lIns="0" tIns="0" rIns="0" bIns="0" rtlCol="0" anchor="t"/>
           <a:lstStyle/>
           <a:p>
             <a:pPr algn="l" indent="0" marL="0">
@@ -5746,7 +5808,7 @@
           <a:ln/>
         </p:spPr>
         <p:txBody>
-          <a:bodyPr wrap="square" lIns="0" tIns="0" rIns="0" bIns="0" rtlCol="0" anchor="t"/>
+          <a:bodyPr wrap="none" lIns="0" tIns="0" rIns="0" bIns="0" rtlCol="0" anchor="t"/>
           <a:lstStyle/>
           <a:p>
             <a:pPr algn="l" indent="0" marL="0">
@@ -5781,124 +5843,6 @@
         </p:nvSpPr>
         <p:spPr>
           <a:xfrm>
-            <a:off x="541599" y="1540669"/>
-            <a:ext cx="11105754" cy="3801269"/>
-          </a:xfrm>
-          <a:prstGeom prst="rect">
-            <a:avLst/>
-          </a:prstGeom>
-          <a:noFill/>
-          <a:ln/>
-        </p:spPr>
-        <p:txBody>
-          <a:bodyPr wrap="square" lIns="0" tIns="0" rIns="0" bIns="0" rtlCol="0" anchor="t"/>
-          <a:lstStyle/>
-          <a:p>
-            <a:pPr algn="l" marL="342900" indent="-342900">
-              <a:buSzPct val="100000"/>
-              <a:buChar char="•"/>
-            </a:pPr>
-            <a:r>
-              <a:rPr lang="en-US" sz="1600" dirty="0">
-                <a:solidFill>
-                  <a:srgbClr val="FFFFFF"/>
-                </a:solidFill>
-                <a:latin typeface="Inter" pitchFamily="34" charset="0"/>
-                <a:ea typeface="Inter" pitchFamily="34" charset="-122"/>
-                <a:cs typeface="Inter" pitchFamily="34" charset="-120"/>
-              </a:rPr>
-              <a:t>01</a:t>
-            </a:r>
-            <a:pPr algn="l" indent="0" marL="0">
-              <a:buNone/>
-            </a:pPr>
-            <a:r>
-              <a:rPr lang="en-US" sz="1600" dirty="0">
-                <a:solidFill>
-                  <a:srgbClr val="1A1A1A"/>
-                </a:solidFill>
-                <a:latin typeface="Inter" pitchFamily="34" charset="0"/>
-                <a:ea typeface="Inter" pitchFamily="34" charset="-122"/>
-                <a:cs typeface="Inter" pitchFamily="34" charset="-120"/>
-              </a:rPr>
-              <a:t>How many teams share a feature definition today?</a:t>
-            </a:r>
-            <a:endParaRPr lang="en-US" sz="1600" dirty="0"/>
-          </a:p>
-          <a:p>
-            <a:pPr algn="l" marL="342900" indent="-342900">
-              <a:buSzPct val="100000"/>
-              <a:buChar char="•"/>
-            </a:pPr>
-            <a:r>
-              <a:rPr lang="en-US" sz="1600" dirty="0">
-                <a:solidFill>
-                  <a:srgbClr val="FFFFFF"/>
-                </a:solidFill>
-                <a:latin typeface="Inter" pitchFamily="34" charset="0"/>
-                <a:ea typeface="Inter" pitchFamily="34" charset="-122"/>
-                <a:cs typeface="Inter" pitchFamily="34" charset="-120"/>
-              </a:rPr>
-              <a:t>02</a:t>
-            </a:r>
-            <a:pPr algn="l" indent="0" marL="0">
-              <a:buNone/>
-            </a:pPr>
-            <a:r>
-              <a:rPr lang="en-US" sz="1600" dirty="0">
-                <a:solidFill>
-                  <a:srgbClr val="1A1A1A"/>
-                </a:solidFill>
-                <a:latin typeface="Inter" pitchFamily="34" charset="0"/>
-                <a:ea typeface="Inter" pitchFamily="34" charset="-122"/>
-                <a:cs typeface="Inter" pitchFamily="34" charset="-120"/>
-              </a:rPr>
-              <a:t>Do any of our models serve online requests?</a:t>
-            </a:r>
-            <a:endParaRPr lang="en-US" sz="1600" dirty="0"/>
-          </a:p>
-          <a:p>
-            <a:pPr algn="l" marL="342900" indent="-342900">
-              <a:buSzPct val="100000"/>
-              <a:buChar char="•"/>
-            </a:pPr>
-            <a:r>
-              <a:rPr lang="en-US" sz="1600" dirty="0">
-                <a:solidFill>
-                  <a:srgbClr val="FFFFFF"/>
-                </a:solidFill>
-                <a:latin typeface="Inter" pitchFamily="34" charset="0"/>
-                <a:ea typeface="Inter" pitchFamily="34" charset="-122"/>
-                <a:cs typeface="Inter" pitchFamily="34" charset="-120"/>
-              </a:rPr>
-              <a:t>03</a:t>
-            </a:r>
-            <a:pPr algn="l" indent="0" marL="0">
-              <a:buNone/>
-            </a:pPr>
-            <a:r>
-              <a:rPr lang="en-US" sz="1600" dirty="0">
-                <a:solidFill>
-                  <a:srgbClr val="1A1A1A"/>
-                </a:solidFill>
-                <a:latin typeface="Inter" pitchFamily="34" charset="0"/>
-                <a:ea typeface="Inter" pitchFamily="34" charset="-122"/>
-                <a:cs typeface="Inter" pitchFamily="34" charset="-120"/>
-              </a:rPr>
-              <a:t>Who would carry the page when the store is down?</a:t>
-            </a:r>
-            <a:endParaRPr lang="en-US" sz="1600" dirty="0"/>
-          </a:p>
-        </p:txBody>
-      </p:sp>
-      <p:sp>
-        <p:nvSpPr>
-          <p:cNvPr id="5" name="Text 3"/>
-          <p:cNvSpPr/>
-          <p:nvPr/>
-        </p:nvSpPr>
-        <p:spPr>
-          <a:xfrm>
             <a:off x="541599" y="2316956"/>
             <a:ext cx="372374" cy="372467"/>
           </a:xfrm>
@@ -5923,7 +5867,7 @@
       </p:sp>
       <p:sp>
         <p:nvSpPr>
-          <p:cNvPr id="6" name="Text 4"/>
+          <p:cNvPr id="5" name="Text 3"/>
           <p:cNvSpPr/>
           <p:nvPr/>
         </p:nvSpPr>
@@ -5939,7 +5883,7 @@
           <a:ln/>
         </p:spPr>
         <p:txBody>
-          <a:bodyPr wrap="square" lIns="0" tIns="0" rIns="0" bIns="0" rtlCol="0" anchor="t"/>
+          <a:bodyPr wrap="none" lIns="0" tIns="0" rIns="0" bIns="0" rtlCol="0" anchor="t"/>
           <a:lstStyle/>
           <a:p>
             <a:pPr algn="l" indent="0" marL="0">
@@ -5965,7 +5909,7 @@
       </p:sp>
       <p:sp>
         <p:nvSpPr>
-          <p:cNvPr id="7" name="Text 5"/>
+          <p:cNvPr id="6" name="Text 4"/>
           <p:cNvSpPr/>
           <p:nvPr/>
         </p:nvSpPr>
@@ -5981,7 +5925,7 @@
           <a:ln/>
         </p:spPr>
         <p:txBody>
-          <a:bodyPr wrap="square" lIns="0" tIns="0" rIns="0" bIns="0" rtlCol="0" anchor="t"/>
+          <a:bodyPr wrap="none" lIns="0" tIns="0" rIns="0" bIns="0" rtlCol="0" anchor="t"/>
           <a:lstStyle/>
           <a:p>
             <a:pPr algn="l" indent="0" marL="0">
@@ -6007,241 +5951,13 @@
       </p:sp>
       <p:sp>
         <p:nvSpPr>
-          <p:cNvPr id="8" name="Text 6"/>
-          <p:cNvSpPr/>
-          <p:nvPr/>
-        </p:nvSpPr>
-        <p:spPr>
-          <a:xfrm>
-            <a:off x="541599" y="3254970"/>
-            <a:ext cx="372374" cy="372467"/>
-          </a:xfrm>
-          <a:prstGeom prst="rect">
-            <a:avLst/>
-          </a:prstGeom>
-          <a:solidFill>
-            <a:srgbClr val="1F3A5F"/>
-          </a:solidFill>
-          <a:ln/>
-        </p:spPr>
-        <p:txBody>
-          <a:bodyPr wrap="square" rtlCol="0" anchor="ctr"/>
-          <a:lstStyle/>
-          <a:p>
-            <a:pPr indent="0" marL="0">
-              <a:buNone/>
-            </a:pPr>
-            <a:endParaRPr lang="en-US" dirty="0"/>
-          </a:p>
-        </p:txBody>
-      </p:sp>
-      <p:sp>
-        <p:nvSpPr>
-          <p:cNvPr id="9" name="Text 7"/>
-          <p:cNvSpPr/>
-          <p:nvPr/>
-        </p:nvSpPr>
-        <p:spPr>
-          <a:xfrm>
-            <a:off x="594370" y="3299023"/>
-            <a:ext cx="271966" cy="284361"/>
-          </a:xfrm>
-          <a:prstGeom prst="rect">
-            <a:avLst/>
-          </a:prstGeom>
-          <a:noFill/>
-          <a:ln/>
-        </p:spPr>
-        <p:txBody>
-          <a:bodyPr wrap="square" lIns="0" tIns="0" rIns="0" bIns="0" rtlCol="0" anchor="t"/>
-          <a:lstStyle/>
-          <a:p>
-            <a:pPr algn="l" indent="0" marL="0">
-              <a:lnSpc>
-                <a:spcPts val="2240"/>
-              </a:lnSpc>
-              <a:buNone/>
-            </a:pPr>
-            <a:r>
-              <a:rPr lang="en-US" sz="1600" b="1" dirty="0">
-                <a:solidFill>
-                  <a:srgbClr val="FFFFFF"/>
-                </a:solidFill>
-                <a:latin typeface="Inter" pitchFamily="34" charset="0"/>
-                <a:ea typeface="Inter" pitchFamily="34" charset="-122"/>
-                <a:cs typeface="Inter" pitchFamily="34" charset="-120"/>
-              </a:rPr>
-              <a:t>02</a:t>
-            </a:r>
-            <a:endParaRPr lang="en-US" sz="1600" dirty="0"/>
-          </a:p>
-        </p:txBody>
-      </p:sp>
-      <p:sp>
-        <p:nvSpPr>
-          <p:cNvPr id="10" name="Text 8"/>
-          <p:cNvSpPr/>
-          <p:nvPr/>
-        </p:nvSpPr>
-        <p:spPr>
-          <a:xfrm>
-            <a:off x="1184772" y="3232547"/>
-            <a:ext cx="6281119" cy="417314"/>
-          </a:xfrm>
-          <a:prstGeom prst="rect">
-            <a:avLst/>
-          </a:prstGeom>
-          <a:noFill/>
-          <a:ln/>
-        </p:spPr>
-        <p:txBody>
-          <a:bodyPr wrap="square" lIns="0" tIns="0" rIns="0" bIns="0" rtlCol="0" anchor="t"/>
-          <a:lstStyle/>
-          <a:p>
-            <a:pPr algn="l" indent="0" marL="0">
-              <a:lnSpc>
-                <a:spcPts val="3286"/>
-              </a:lnSpc>
-              <a:buNone/>
-            </a:pPr>
-            <a:r>
-              <a:rPr lang="en-US" sz="2266" dirty="0">
-                <a:solidFill>
-                  <a:srgbClr val="1A1A1A"/>
-                </a:solidFill>
-                <a:latin typeface="Inter" pitchFamily="34" charset="0"/>
-                <a:ea typeface="Inter" pitchFamily="34" charset="-122"/>
-                <a:cs typeface="Inter" pitchFamily="34" charset="-120"/>
-              </a:rPr>
-              <a:t>Do any of our models serve online requests?</a:t>
-            </a:r>
-            <a:endParaRPr lang="en-US" sz="2266" dirty="0"/>
-          </a:p>
-        </p:txBody>
-      </p:sp>
-      <p:sp>
-        <p:nvSpPr>
-          <p:cNvPr id="11" name="Text 9"/>
-          <p:cNvSpPr/>
-          <p:nvPr/>
-        </p:nvSpPr>
-        <p:spPr>
-          <a:xfrm>
-            <a:off x="541599" y="4192984"/>
-            <a:ext cx="372374" cy="372467"/>
-          </a:xfrm>
-          <a:prstGeom prst="rect">
-            <a:avLst/>
-          </a:prstGeom>
-          <a:solidFill>
-            <a:srgbClr val="1F3A5F"/>
-          </a:solidFill>
-          <a:ln/>
-        </p:spPr>
-        <p:txBody>
-          <a:bodyPr wrap="square" rtlCol="0" anchor="ctr"/>
-          <a:lstStyle/>
-          <a:p>
-            <a:pPr indent="0" marL="0">
-              <a:buNone/>
-            </a:pPr>
-            <a:endParaRPr lang="en-US" dirty="0"/>
-          </a:p>
-        </p:txBody>
-      </p:sp>
-      <p:sp>
-        <p:nvSpPr>
-          <p:cNvPr id="12" name="Text 10"/>
-          <p:cNvSpPr/>
-          <p:nvPr/>
-        </p:nvSpPr>
-        <p:spPr>
-          <a:xfrm>
-            <a:off x="594370" y="4237038"/>
-            <a:ext cx="271966" cy="284361"/>
-          </a:xfrm>
-          <a:prstGeom prst="rect">
-            <a:avLst/>
-          </a:prstGeom>
-          <a:noFill/>
-          <a:ln/>
-        </p:spPr>
-        <p:txBody>
-          <a:bodyPr wrap="square" lIns="0" tIns="0" rIns="0" bIns="0" rtlCol="0" anchor="t"/>
-          <a:lstStyle/>
-          <a:p>
-            <a:pPr algn="l" indent="0" marL="0">
-              <a:lnSpc>
-                <a:spcPts val="2240"/>
-              </a:lnSpc>
-              <a:buNone/>
-            </a:pPr>
-            <a:r>
-              <a:rPr lang="en-US" sz="1600" b="1" dirty="0">
-                <a:solidFill>
-                  <a:srgbClr val="FFFFFF"/>
-                </a:solidFill>
-                <a:latin typeface="Inter" pitchFamily="34" charset="0"/>
-                <a:ea typeface="Inter" pitchFamily="34" charset="-122"/>
-                <a:cs typeface="Inter" pitchFamily="34" charset="-120"/>
-              </a:rPr>
-              <a:t>03</a:t>
-            </a:r>
-            <a:endParaRPr lang="en-US" sz="1600" dirty="0"/>
-          </a:p>
-        </p:txBody>
-      </p:sp>
-      <p:sp>
-        <p:nvSpPr>
-          <p:cNvPr id="13" name="Text 11"/>
-          <p:cNvSpPr/>
-          <p:nvPr/>
-        </p:nvSpPr>
-        <p:spPr>
-          <a:xfrm>
-            <a:off x="1184772" y="4170561"/>
-            <a:ext cx="7252426" cy="417314"/>
-          </a:xfrm>
-          <a:prstGeom prst="rect">
-            <a:avLst/>
-          </a:prstGeom>
-          <a:noFill/>
-          <a:ln/>
-        </p:spPr>
-        <p:txBody>
-          <a:bodyPr wrap="square" lIns="0" tIns="0" rIns="0" bIns="0" rtlCol="0" anchor="t"/>
-          <a:lstStyle/>
-          <a:p>
-            <a:pPr algn="l" indent="0" marL="0">
-              <a:lnSpc>
-                <a:spcPts val="3286"/>
-              </a:lnSpc>
-              <a:buNone/>
-            </a:pPr>
-            <a:r>
-              <a:rPr lang="en-US" sz="2266" dirty="0">
-                <a:solidFill>
-                  <a:srgbClr val="1A1A1A"/>
-                </a:solidFill>
-                <a:latin typeface="Inter" pitchFamily="34" charset="0"/>
-                <a:ea typeface="Inter" pitchFamily="34" charset="-122"/>
-                <a:cs typeface="Inter" pitchFamily="34" charset="-120"/>
-              </a:rPr>
-              <a:t>Who would carry the page when the store is down?</a:t>
-            </a:r>
-            <a:endParaRPr lang="en-US" sz="2266" dirty="0"/>
-          </a:p>
-        </p:txBody>
-      </p:sp>
-      <p:sp>
-        <p:nvSpPr>
-          <p:cNvPr id="14" name="Shape 12"/>
-          <p:cNvSpPr/>
-          <p:nvPr/>
-        </p:nvSpPr>
-        <p:spPr>
-          <a:xfrm>
-            <a:off x="541599" y="5348288"/>
+          <p:cNvPr id="7" name="Shape 5"/>
+          <p:cNvSpPr/>
+          <p:nvPr/>
+        </p:nvSpPr>
+        <p:spPr>
+          <a:xfrm>
+            <a:off x="541599" y="2972197"/>
             <a:ext cx="11105754" cy="0"/>
           </a:xfrm>
           <a:prstGeom prst="line">
@@ -6255,10 +5971,296 @@
             <a:prstDash val="solid"/>
           </a:ln>
         </p:spPr>
-      </p:sp>
-      <p:sp>
-        <p:nvSpPr>
-          <p:cNvPr id="15" name="Text 13"/>
+        <p:txBody>
+          <a:bodyPr/>
+          <a:p/>
+        </p:txBody>
+      </p:sp>
+      <p:sp>
+        <p:nvSpPr>
+          <p:cNvPr id="8" name="Text 6"/>
+          <p:cNvSpPr/>
+          <p:nvPr/>
+        </p:nvSpPr>
+        <p:spPr>
+          <a:xfrm>
+            <a:off x="541599" y="3254970"/>
+            <a:ext cx="372374" cy="372467"/>
+          </a:xfrm>
+          <a:prstGeom prst="rect">
+            <a:avLst/>
+          </a:prstGeom>
+          <a:solidFill>
+            <a:srgbClr val="1F3A5F"/>
+          </a:solidFill>
+          <a:ln/>
+        </p:spPr>
+        <p:txBody>
+          <a:bodyPr wrap="square" rtlCol="0" anchor="ctr"/>
+          <a:lstStyle/>
+          <a:p>
+            <a:pPr indent="0" marL="0">
+              <a:buNone/>
+            </a:pPr>
+            <a:endParaRPr lang="en-US" dirty="0"/>
+          </a:p>
+        </p:txBody>
+      </p:sp>
+      <p:sp>
+        <p:nvSpPr>
+          <p:cNvPr id="9" name="Text 7"/>
+          <p:cNvSpPr/>
+          <p:nvPr/>
+        </p:nvSpPr>
+        <p:spPr>
+          <a:xfrm>
+            <a:off x="594370" y="3299023"/>
+            <a:ext cx="271966" cy="284361"/>
+          </a:xfrm>
+          <a:prstGeom prst="rect">
+            <a:avLst/>
+          </a:prstGeom>
+          <a:noFill/>
+          <a:ln/>
+        </p:spPr>
+        <p:txBody>
+          <a:bodyPr wrap="none" lIns="0" tIns="0" rIns="0" bIns="0" rtlCol="0" anchor="t"/>
+          <a:lstStyle/>
+          <a:p>
+            <a:pPr algn="l" indent="0" marL="0">
+              <a:lnSpc>
+                <a:spcPts val="2240"/>
+              </a:lnSpc>
+              <a:buNone/>
+            </a:pPr>
+            <a:r>
+              <a:rPr lang="en-US" sz="1600" b="1" dirty="0">
+                <a:solidFill>
+                  <a:srgbClr val="FFFFFF"/>
+                </a:solidFill>
+                <a:latin typeface="Inter" pitchFamily="34" charset="0"/>
+                <a:ea typeface="Inter" pitchFamily="34" charset="-122"/>
+                <a:cs typeface="Inter" pitchFamily="34" charset="-120"/>
+              </a:rPr>
+              <a:t>02</a:t>
+            </a:r>
+            <a:endParaRPr lang="en-US" sz="1600" dirty="0"/>
+          </a:p>
+        </p:txBody>
+      </p:sp>
+      <p:sp>
+        <p:nvSpPr>
+          <p:cNvPr id="10" name="Text 8"/>
+          <p:cNvSpPr/>
+          <p:nvPr/>
+        </p:nvSpPr>
+        <p:spPr>
+          <a:xfrm>
+            <a:off x="1184772" y="3232547"/>
+            <a:ext cx="6281119" cy="417314"/>
+          </a:xfrm>
+          <a:prstGeom prst="rect">
+            <a:avLst/>
+          </a:prstGeom>
+          <a:noFill/>
+          <a:ln/>
+        </p:spPr>
+        <p:txBody>
+          <a:bodyPr wrap="none" lIns="0" tIns="0" rIns="0" bIns="0" rtlCol="0" anchor="t"/>
+          <a:lstStyle/>
+          <a:p>
+            <a:pPr algn="l" indent="0" marL="0">
+              <a:lnSpc>
+                <a:spcPts val="3286"/>
+              </a:lnSpc>
+              <a:buNone/>
+            </a:pPr>
+            <a:r>
+              <a:rPr lang="en-US" sz="2266" dirty="0">
+                <a:solidFill>
+                  <a:srgbClr val="1A1A1A"/>
+                </a:solidFill>
+                <a:latin typeface="Inter" pitchFamily="34" charset="0"/>
+                <a:ea typeface="Inter" pitchFamily="34" charset="-122"/>
+                <a:cs typeface="Inter" pitchFamily="34" charset="-120"/>
+              </a:rPr>
+              <a:t>Do any of our models serve online requests?</a:t>
+            </a:r>
+            <a:endParaRPr lang="en-US" sz="2266" dirty="0"/>
+          </a:p>
+        </p:txBody>
+      </p:sp>
+      <p:sp>
+        <p:nvSpPr>
+          <p:cNvPr id="11" name="Shape 9"/>
+          <p:cNvSpPr/>
+          <p:nvPr/>
+        </p:nvSpPr>
+        <p:spPr>
+          <a:xfrm>
+            <a:off x="541599" y="3910211"/>
+            <a:ext cx="11105754" cy="0"/>
+          </a:xfrm>
+          <a:prstGeom prst="line">
+            <a:avLst/>
+          </a:prstGeom>
+          <a:noFill/>
+          <a:ln w="12698">
+            <a:solidFill>
+              <a:srgbClr val="C9CDD3"/>
+            </a:solidFill>
+            <a:prstDash val="solid"/>
+          </a:ln>
+        </p:spPr>
+        <p:txBody>
+          <a:bodyPr/>
+          <a:p/>
+        </p:txBody>
+      </p:sp>
+      <p:sp>
+        <p:nvSpPr>
+          <p:cNvPr id="12" name="Text 10"/>
+          <p:cNvSpPr/>
+          <p:nvPr/>
+        </p:nvSpPr>
+        <p:spPr>
+          <a:xfrm>
+            <a:off x="541599" y="4192984"/>
+            <a:ext cx="372374" cy="372467"/>
+          </a:xfrm>
+          <a:prstGeom prst="rect">
+            <a:avLst/>
+          </a:prstGeom>
+          <a:solidFill>
+            <a:srgbClr val="1F3A5F"/>
+          </a:solidFill>
+          <a:ln/>
+        </p:spPr>
+        <p:txBody>
+          <a:bodyPr wrap="square" rtlCol="0" anchor="ctr"/>
+          <a:lstStyle/>
+          <a:p>
+            <a:pPr indent="0" marL="0">
+              <a:buNone/>
+            </a:pPr>
+            <a:endParaRPr lang="en-US" dirty="0"/>
+          </a:p>
+        </p:txBody>
+      </p:sp>
+      <p:sp>
+        <p:nvSpPr>
+          <p:cNvPr id="13" name="Text 11"/>
+          <p:cNvSpPr/>
+          <p:nvPr/>
+        </p:nvSpPr>
+        <p:spPr>
+          <a:xfrm>
+            <a:off x="594370" y="4237038"/>
+            <a:ext cx="271966" cy="284361"/>
+          </a:xfrm>
+          <a:prstGeom prst="rect">
+            <a:avLst/>
+          </a:prstGeom>
+          <a:noFill/>
+          <a:ln/>
+        </p:spPr>
+        <p:txBody>
+          <a:bodyPr wrap="none" lIns="0" tIns="0" rIns="0" bIns="0" rtlCol="0" anchor="t"/>
+          <a:lstStyle/>
+          <a:p>
+            <a:pPr algn="l" indent="0" marL="0">
+              <a:lnSpc>
+                <a:spcPts val="2240"/>
+              </a:lnSpc>
+              <a:buNone/>
+            </a:pPr>
+            <a:r>
+              <a:rPr lang="en-US" sz="1600" b="1" dirty="0">
+                <a:solidFill>
+                  <a:srgbClr val="FFFFFF"/>
+                </a:solidFill>
+                <a:latin typeface="Inter" pitchFamily="34" charset="0"/>
+                <a:ea typeface="Inter" pitchFamily="34" charset="-122"/>
+                <a:cs typeface="Inter" pitchFamily="34" charset="-120"/>
+              </a:rPr>
+              <a:t>03</a:t>
+            </a:r>
+            <a:endParaRPr lang="en-US" sz="1600" dirty="0"/>
+          </a:p>
+        </p:txBody>
+      </p:sp>
+      <p:sp>
+        <p:nvSpPr>
+          <p:cNvPr id="14" name="Text 12"/>
+          <p:cNvSpPr/>
+          <p:nvPr/>
+        </p:nvSpPr>
+        <p:spPr>
+          <a:xfrm>
+            <a:off x="1184772" y="4170561"/>
+            <a:ext cx="7252426" cy="417314"/>
+          </a:xfrm>
+          <a:prstGeom prst="rect">
+            <a:avLst/>
+          </a:prstGeom>
+          <a:noFill/>
+          <a:ln/>
+        </p:spPr>
+        <p:txBody>
+          <a:bodyPr wrap="none" lIns="0" tIns="0" rIns="0" bIns="0" rtlCol="0" anchor="t"/>
+          <a:lstStyle/>
+          <a:p>
+            <a:pPr algn="l" indent="0" marL="0">
+              <a:lnSpc>
+                <a:spcPts val="3286"/>
+              </a:lnSpc>
+              <a:buNone/>
+            </a:pPr>
+            <a:r>
+              <a:rPr lang="en-US" sz="2266" dirty="0">
+                <a:solidFill>
+                  <a:srgbClr val="1A1A1A"/>
+                </a:solidFill>
+                <a:latin typeface="Inter" pitchFamily="34" charset="0"/>
+                <a:ea typeface="Inter" pitchFamily="34" charset="-122"/>
+                <a:cs typeface="Inter" pitchFamily="34" charset="-120"/>
+              </a:rPr>
+              <a:t>Who would carry the page when the store is down?</a:t>
+            </a:r>
+            <a:endParaRPr lang="en-US" sz="2266" dirty="0"/>
+          </a:p>
+        </p:txBody>
+      </p:sp>
+      <p:sp>
+        <p:nvSpPr>
+          <p:cNvPr id="15" name="Shape 13"/>
+          <p:cNvSpPr/>
+          <p:nvPr/>
+        </p:nvSpPr>
+        <p:spPr>
+          <a:xfrm>
+            <a:off x="541599" y="5348288"/>
+            <a:ext cx="11105754" cy="0"/>
+          </a:xfrm>
+          <a:prstGeom prst="line">
+            <a:avLst/>
+          </a:prstGeom>
+          <a:noFill/>
+          <a:ln w="12698">
+            <a:solidFill>
+              <a:srgbClr val="C9CDD3"/>
+            </a:solidFill>
+            <a:prstDash val="solid"/>
+          </a:ln>
+        </p:spPr>
+        <p:txBody>
+          <a:bodyPr/>
+          <a:p/>
+        </p:txBody>
+      </p:sp>
+      <p:sp>
+        <p:nvSpPr>
+          <p:cNvPr id="16" name="Text 14"/>
           <p:cNvSpPr/>
           <p:nvPr/>
         </p:nvSpPr>
@@ -6274,7 +6276,7 @@
           <a:ln/>
         </p:spPr>
         <p:txBody>
-          <a:bodyPr wrap="square" lIns="0" tIns="0" rIns="0" bIns="0" rtlCol="0" anchor="t"/>
+          <a:bodyPr wrap="none" lIns="0" tIns="0" rIns="0" bIns="0" rtlCol="0" anchor="t"/>
           <a:lstStyle/>
           <a:p>
             <a:pPr algn="l" indent="0" marL="0">
@@ -6300,7 +6302,7 @@
       </p:sp>
       <p:sp>
         <p:nvSpPr>
-          <p:cNvPr id="16" name="Text 14"/>
+          <p:cNvPr id="17" name="Text 15"/>
           <p:cNvSpPr/>
           <p:nvPr/>
         </p:nvSpPr>
@@ -6316,7 +6318,7 @@
           <a:ln/>
         </p:spPr>
         <p:txBody>
-          <a:bodyPr wrap="square" lIns="0" tIns="0" rIns="0" bIns="0" rtlCol="0" anchor="t"/>
+          <a:bodyPr wrap="none" lIns="0" tIns="0" rIns="0" bIns="0" rtlCol="0" anchor="t"/>
           <a:lstStyle/>
           <a:p>
             <a:pPr algn="l" indent="0" marL="0">
@@ -6342,7 +6344,7 @@
       </p:sp>
       <p:sp>
         <p:nvSpPr>
-          <p:cNvPr id="17" name="Text 15"/>
+          <p:cNvPr id="18" name="Text 16"/>
           <p:cNvSpPr/>
           <p:nvPr/>
         </p:nvSpPr>
@@ -6358,7 +6360,7 @@
           <a:ln/>
         </p:spPr>
         <p:txBody>
-          <a:bodyPr wrap="square" lIns="0" tIns="0" rIns="0" bIns="0" rtlCol="0" anchor="t"/>
+          <a:bodyPr wrap="none" lIns="0" tIns="0" rIns="0" bIns="0" rtlCol="0" anchor="t"/>
           <a:lstStyle/>
           <a:p>
             <a:pPr algn="r" indent="0" marL="0">

--- a/decks/feature-store/feature-store.pptx
+++ b/decks/feature-store/feature-store.pptx
@@ -1425,9 +1425,7 @@
           <a:ln/>
         </p:spPr>
         <p:txBody>
-          <a:bodyPr wrap="square" lIns="0" tIns="0" rIns="0" bIns="0" rtlCol="0" anchor="t">
-            <a:normAutofit/>
-          </a:bodyPr>
+          <a:bodyPr wrap="none" lIns="0" tIns="0" rIns="0" bIns="0" rtlCol="0" anchor="t"/>
           <a:lstStyle/>
           <a:p>
             <a:pPr algn="l" indent="0" marL="0">
